--- a/assets/ppts/Module_4_Network_Management_and_Physical_Layer.pptx
+++ b/assets/ppts/Module_4_Network_Management_and_Physical_Layer.pptx
@@ -12,6 +12,19 @@
     <p:sldId id="260" r:id="rId11"/>
     <p:sldId id="261" r:id="rId12"/>
     <p:sldId id="262" r:id="rId13"/>
+    <p:sldId id="263" r:id="rId14"/>
+    <p:sldId id="264" r:id="rId15"/>
+    <p:sldId id="265" r:id="rId16"/>
+    <p:sldId id="266" r:id="rId17"/>
+    <p:sldId id="267" r:id="rId18"/>
+    <p:sldId id="268" r:id="rId19"/>
+    <p:sldId id="269" r:id="rId20"/>
+    <p:sldId id="270" r:id="rId21"/>
+    <p:sldId id="271" r:id="rId22"/>
+    <p:sldId id="272" r:id="rId23"/>
+    <p:sldId id="273" r:id="rId24"/>
+    <p:sldId id="274" r:id="rId25"/>
+    <p:sldId id="275" r:id="rId26"/>
   </p:sldIdLst>
   <p:sldSz cx="12191695" cy="6858000" type="screen4x3"/>
   <p:notesSz cx="6858000" cy="9144000"/>
@@ -3145,14 +3158,14 @@
         </p:nvSpPr>
         <p:spPr>
           <a:xfrm>
-            <a:off x="914400" y="1371600"/>
-            <a:ext cx="182880" cy="4114800"/>
+            <a:off x="822960" y="1188720"/>
+            <a:ext cx="164592" cy="4480560"/>
           </a:xfrm>
           <a:prstGeom prst="rect">
             <a:avLst/>
           </a:prstGeom>
           <a:solidFill>
-            <a:srgbClr val="F59E0B"/>
+            <a:srgbClr val="D97706"/>
           </a:solidFill>
           <a:ln>
             <a:noFill/>
@@ -3188,8 +3201,8 @@
         </p:nvSpPr>
         <p:spPr>
           <a:xfrm>
-            <a:off x="1371600" y="1371600"/>
-            <a:ext cx="9601200" cy="4114800"/>
+            <a:off x="1280160" y="1097280"/>
+            <a:ext cx="10058400" cy="4663440"/>
           </a:xfrm>
           <a:prstGeom prst="rect">
             <a:avLst/>
@@ -3204,58 +3217,4258 @@
           <a:p>
             <a:pPr>
               <a:spcAft>
+                <a:spcPts val="1200"/>
+              </a:spcAft>
+              <a:defRPr b="1" sz="1300">
+                <a:solidFill>
+                  <a:srgbClr val="D97706"/>
+                </a:solidFill>
+              </a:defRPr>
+            </a:pPr>
+            <a:r>
+              <a:t>PCCST501 Computer Networks | KTU 2024 Scheme • MODULE 4 COMPLETE • MODULE 4</a:t>
+            </a:r>
+          </a:p>
+          <a:p>
+            <a:pPr>
+              <a:spcAft>
                 <a:spcPts val="1400"/>
               </a:spcAft>
+              <a:defRPr b="1" sz="3200">
+                <a:solidFill>
+                  <a:srgbClr val="F8FAFC"/>
+                </a:solidFill>
+              </a:defRPr>
+            </a:pPr>
+            <a:r>
+              <a:t>Network Management &amp; Physical Layer Fundamentals</a:t>
+            </a:r>
+          </a:p>
+          <a:p>
+            <a:pPr>
+              <a:spcAft>
+                <a:spcPts val="2800"/>
+              </a:spcAft>
+              <a:defRPr sz="1700">
+                <a:solidFill>
+                  <a:srgbClr val="94A3B8"/>
+                </a:solidFill>
+              </a:defRPr>
+            </a:pPr>
+            <a:r>
+              <a:t>Complete Lecture &amp; Revision Master Deck (M4.1 to M4.6)</a:t>
+            </a:r>
+          </a:p>
+          <a:p>
+            <a:pPr>
+              <a:defRPr b="1" sz="1300">
+                <a:solidFill>
+                  <a:srgbClr val="E2E8F0"/>
+                </a:solidFill>
+              </a:defRPr>
+            </a:pPr>
+            <a:r>
+              <a:t>Prepared by: Prof. Anju Markose | Assistant Professor, Dept. of CSE | VJCET</a:t>
+            </a:r>
+          </a:p>
+          <a:p>
+            <a:pPr>
+              <a:defRPr sz="1100">
+                <a:solidFill>
+                  <a:srgbClr val="94A3B8"/>
+                </a:solidFill>
+              </a:defRPr>
+            </a:pPr>
+            <a:r>
+              <a:t>Viswajyothi College of Engineering and Technology (VJCET), Vazhakulam</a:t>
+            </a:r>
+          </a:p>
+        </p:txBody>
+      </p:sp>
+    </p:spTree>
+  </p:cSld>
+  <p:clrMapOvr>
+    <a:masterClrMapping/>
+  </p:clrMapOvr>
+</p:sld>
+</file>
+
+<file path=ppt/slides/slide10.xml><?xml version="1.0" encoding="utf-8"?>
+<p:sld xmlns:a="http://schemas.openxmlformats.org/drawingml/2006/main" xmlns:p="http://schemas.openxmlformats.org/presentationml/2006/main" xmlns:r="http://schemas.openxmlformats.org/officeDocument/2006/relationships">
+  <p:cSld>
+    <p:spTree>
+      <p:nvGrpSpPr>
+        <p:cNvPr id="1" name=""/>
+        <p:cNvGrpSpPr/>
+        <p:nvPr/>
+      </p:nvGrpSpPr>
+      <p:grpSpPr/>
+      <p:sp>
+        <p:nvSpPr>
+          <p:cNvPr id="2" name="Rectangle 1"/>
+          <p:cNvSpPr/>
+          <p:nvPr/>
+        </p:nvSpPr>
+        <p:spPr>
+          <a:xfrm>
+            <a:off x="0" y="0"/>
+            <a:ext cx="12191695" cy="1005840"/>
+          </a:xfrm>
+          <a:prstGeom prst="rect">
+            <a:avLst/>
+          </a:prstGeom>
+          <a:solidFill>
+            <a:srgbClr val="0F1E4A"/>
+          </a:solidFill>
+          <a:ln>
+            <a:noFill/>
+          </a:ln>
+        </p:spPr>
+        <p:style>
+          <a:lnRef idx="1">
+            <a:schemeClr val="accent1"/>
+          </a:lnRef>
+          <a:fillRef idx="3">
+            <a:schemeClr val="accent1"/>
+          </a:fillRef>
+          <a:effectRef idx="2">
+            <a:schemeClr val="accent1"/>
+          </a:effectRef>
+          <a:fontRef idx="minor">
+            <a:schemeClr val="lt1"/>
+          </a:fontRef>
+        </p:style>
+        <p:txBody>
+          <a:bodyPr rtlCol="0" anchor="ctr"/>
+          <a:lstStyle/>
+          <a:p>
+            <a:pPr algn="ctr"/>
+          </a:p>
+        </p:txBody>
+      </p:sp>
+      <p:sp>
+        <p:nvSpPr>
+          <p:cNvPr id="3" name="Rectangle 2"/>
+          <p:cNvSpPr/>
+          <p:nvPr/>
+        </p:nvSpPr>
+        <p:spPr>
+          <a:xfrm>
+            <a:off x="0" y="969264"/>
+            <a:ext cx="12191695" cy="36576"/>
+          </a:xfrm>
+          <a:prstGeom prst="rect">
+            <a:avLst/>
+          </a:prstGeom>
+          <a:solidFill>
+            <a:srgbClr val="D97706"/>
+          </a:solidFill>
+          <a:ln>
+            <a:noFill/>
+          </a:ln>
+        </p:spPr>
+        <p:style>
+          <a:lnRef idx="1">
+            <a:schemeClr val="accent1"/>
+          </a:lnRef>
+          <a:fillRef idx="3">
+            <a:schemeClr val="accent1"/>
+          </a:fillRef>
+          <a:effectRef idx="2">
+            <a:schemeClr val="accent1"/>
+          </a:effectRef>
+          <a:fontRef idx="minor">
+            <a:schemeClr val="lt1"/>
+          </a:fontRef>
+        </p:style>
+        <p:txBody>
+          <a:bodyPr rtlCol="0" anchor="ctr"/>
+          <a:lstStyle/>
+          <a:p>
+            <a:pPr algn="ctr"/>
+          </a:p>
+        </p:txBody>
+      </p:sp>
+      <p:sp>
+        <p:nvSpPr>
+          <p:cNvPr id="4" name="TextBox 3"/>
+          <p:cNvSpPr txBox="1"/>
+          <p:nvPr/>
+        </p:nvSpPr>
+        <p:spPr>
+          <a:xfrm>
+            <a:off x="731520" y="164592"/>
+            <a:ext cx="8412480" cy="685800"/>
+          </a:xfrm>
+          <a:prstGeom prst="rect">
+            <a:avLst/>
+          </a:prstGeom>
+          <a:noFill/>
+        </p:spPr>
+        <p:txBody>
+          <a:bodyPr wrap="none">
+            <a:spAutoFit/>
+          </a:bodyPr>
+          <a:lstStyle/>
+          <a:p>
+            <a:pPr>
+              <a:defRPr b="1" sz="2300">
+                <a:solidFill>
+                  <a:srgbClr val="F8FAFC"/>
+                </a:solidFill>
+              </a:defRPr>
+            </a:pPr>
+            <a:r>
+              <a:t>4.3.1 Data, Signals &amp; Transmission Impairments</a:t>
+            </a:r>
+          </a:p>
+        </p:txBody>
+      </p:sp>
+      <p:sp>
+        <p:nvSpPr>
+          <p:cNvPr id="5" name="TextBox 4"/>
+          <p:cNvSpPr txBox="1"/>
+          <p:nvPr/>
+        </p:nvSpPr>
+        <p:spPr>
+          <a:xfrm>
+            <a:off x="8229600" y="164592"/>
+            <a:ext cx="3291840" cy="685800"/>
+          </a:xfrm>
+          <a:prstGeom prst="rect">
+            <a:avLst/>
+          </a:prstGeom>
+          <a:noFill/>
+        </p:spPr>
+        <p:txBody>
+          <a:bodyPr wrap="none">
+            <a:spAutoFit/>
+          </a:bodyPr>
+          <a:lstStyle/>
+          <a:p>
+            <a:pPr algn="r">
+              <a:defRPr b="1" sz="1300">
+                <a:solidFill>
+                  <a:srgbClr val="D97706"/>
+                </a:solidFill>
+              </a:defRPr>
+            </a:pPr>
+            <a:r>
+              <a:t>M4.3 SIGNALS &amp; IMPAIRMENTS</a:t>
+            </a:r>
+          </a:p>
+        </p:txBody>
+      </p:sp>
+      <p:sp>
+        <p:nvSpPr>
+          <p:cNvPr id="6" name="TextBox 5"/>
+          <p:cNvSpPr txBox="1"/>
+          <p:nvPr/>
+        </p:nvSpPr>
+        <p:spPr>
+          <a:xfrm>
+            <a:off x="731520" y="1280160"/>
+            <a:ext cx="6858000" cy="4937760"/>
+          </a:xfrm>
+          <a:prstGeom prst="rect">
+            <a:avLst/>
+          </a:prstGeom>
+          <a:noFill/>
+        </p:spPr>
+        <p:txBody>
+          <a:bodyPr wrap="square">
+            <a:spAutoFit/>
+          </a:bodyPr>
+          <a:lstStyle/>
+          <a:p>
+            <a:pPr>
+              <a:spcAft>
+                <a:spcPts val="200"/>
+              </a:spcAft>
+              <a:defRPr b="1" sz="1500">
+                <a:solidFill>
+                  <a:srgbClr val="0F1E4A"/>
+                </a:solidFill>
+              </a:defRPr>
+            </a:pPr>
+            <a:r>
+              <a:t>• Analog vs Digital Signals</a:t>
+            </a:r>
+          </a:p>
+          <a:p>
+            <a:pPr>
+              <a:spcAft>
+                <a:spcPts val="800"/>
+              </a:spcAft>
+              <a:defRPr sz="1300">
+                <a:solidFill>
+                  <a:srgbClr val="1E293B"/>
+                </a:solidFill>
+              </a:defRPr>
+            </a:pPr>
+            <a:r>
+              <a:t>   Analog: Continuous signal waveform over time with infinite voltage levels. Digital: Discrete discrete voltage levels representing binary 0s and 1s.</a:t>
+            </a:r>
+          </a:p>
+          <a:p>
+            <a:pPr>
+              <a:spcAft>
+                <a:spcPts val="200"/>
+              </a:spcAft>
+              <a:defRPr b="1" sz="1500">
+                <a:solidFill>
+                  <a:srgbClr val="0F1E4A"/>
+                </a:solidFill>
+              </a:defRPr>
+            </a:pPr>
+            <a:r>
+              <a:t>• Fourier Harmonic Analysis</a:t>
+            </a:r>
+          </a:p>
+          <a:p>
+            <a:pPr>
+              <a:spcAft>
+                <a:spcPts val="800"/>
+              </a:spcAft>
+              <a:defRPr sz="1300">
+                <a:solidFill>
+                  <a:srgbClr val="1E293B"/>
+                </a:solidFill>
+              </a:defRPr>
+            </a:pPr>
+            <a:r>
+              <a:t>   Any periodic composite signal can be decomposed into an infinite series of fundamental and harmonic sine waves: $s(t) = \frac{A_0}{2} + \sum [A_n \sin(2\pi n f t) + B_n \cos(2\pi n f t)]$.</a:t>
+            </a:r>
+          </a:p>
+          <a:p>
+            <a:pPr>
+              <a:spcAft>
+                <a:spcPts val="200"/>
+              </a:spcAft>
+              <a:defRPr b="1" sz="1500">
+                <a:solidFill>
+                  <a:srgbClr val="0F1E4A"/>
+                </a:solidFill>
+              </a:defRPr>
+            </a:pPr>
+            <a:r>
+              <a:t>• Transmission Impairment 1: Attenuation</a:t>
+            </a:r>
+          </a:p>
+          <a:p>
+            <a:pPr>
+              <a:spcAft>
+                <a:spcPts val="800"/>
+              </a:spcAft>
+              <a:defRPr sz="1300">
+                <a:solidFill>
+                  <a:srgbClr val="1E293B"/>
+                </a:solidFill>
+              </a:defRPr>
+            </a:pPr>
+            <a:r>
+              <a:t>   Loss of signal energy over transmission distance. Measured in decibels (dB): $\text{dB} = 10 \log_{10} \left( \frac{P_2}{P_1} \right)$ (Negative dB = signal loss). Compensated by amplifiers / repeaters.</a:t>
+            </a:r>
+          </a:p>
+          <a:p>
+            <a:pPr>
+              <a:spcAft>
+                <a:spcPts val="200"/>
+              </a:spcAft>
+              <a:defRPr b="1" sz="1500">
+                <a:solidFill>
+                  <a:srgbClr val="0F1E4A"/>
+                </a:solidFill>
+              </a:defRPr>
+            </a:pPr>
+            <a:r>
+              <a:t>• Transmission Impairment 2: Distortion</a:t>
+            </a:r>
+          </a:p>
+          <a:p>
+            <a:pPr>
+              <a:spcAft>
+                <a:spcPts val="800"/>
+              </a:spcAft>
+              <a:defRPr sz="1300">
+                <a:solidFill>
+                  <a:srgbClr val="1E293B"/>
+                </a:solidFill>
+              </a:defRPr>
+            </a:pPr>
+            <a:r>
+              <a:t>   Different harmonic frequency components travel at slightly different speeds in guided media, shifting relative phase and altering signal shape.</a:t>
+            </a:r>
+          </a:p>
+          <a:p>
+            <a:pPr>
+              <a:spcAft>
+                <a:spcPts val="200"/>
+              </a:spcAft>
+              <a:defRPr b="1" sz="1500">
+                <a:solidFill>
+                  <a:srgbClr val="0F1E4A"/>
+                </a:solidFill>
+              </a:defRPr>
+            </a:pPr>
+            <a:r>
+              <a:t>• Transmission Impairment 3: Noise</a:t>
+            </a:r>
+          </a:p>
+          <a:p>
+            <a:pPr>
+              <a:spcAft>
+                <a:spcPts val="800"/>
+              </a:spcAft>
+              <a:defRPr sz="1300">
+                <a:solidFill>
+                  <a:srgbClr val="1E293B"/>
+                </a:solidFill>
+              </a:defRPr>
+            </a:pPr>
+            <a:r>
+              <a:t>   Thermal noise (Johnson noise: $N = kTB$), Induced noise, Crosstalk (coupling between adjacent wires), Impulse noise (sudden spikes).</a:t>
+            </a:r>
+          </a:p>
+        </p:txBody>
+      </p:sp>
+      <p:sp>
+        <p:nvSpPr>
+          <p:cNvPr id="7" name="Rounded Rectangle 6"/>
+          <p:cNvSpPr/>
+          <p:nvPr/>
+        </p:nvSpPr>
+        <p:spPr>
+          <a:xfrm>
+            <a:off x="7955279" y="1280160"/>
+            <a:ext cx="3566160" cy="4846320"/>
+          </a:xfrm>
+          <a:prstGeom prst="roundRect">
+            <a:avLst/>
+          </a:prstGeom>
+          <a:solidFill>
+            <a:srgbClr val="F1F5F9"/>
+          </a:solidFill>
+          <a:ln w="19050">
+            <a:solidFill>
+              <a:srgbClr val="0E7490"/>
+            </a:solidFill>
+          </a:ln>
+        </p:spPr>
+        <p:style>
+          <a:lnRef idx="1">
+            <a:schemeClr val="accent1"/>
+          </a:lnRef>
+          <a:fillRef idx="3">
+            <a:schemeClr val="accent1"/>
+          </a:fillRef>
+          <a:effectRef idx="2">
+            <a:schemeClr val="accent1"/>
+          </a:effectRef>
+          <a:fontRef idx="minor">
+            <a:schemeClr val="lt1"/>
+          </a:fontRef>
+        </p:style>
+        <p:txBody>
+          <a:bodyPr rtlCol="0" anchor="ctr"/>
+          <a:lstStyle/>
+          <a:p>
+            <a:pPr algn="ctr"/>
+          </a:p>
+        </p:txBody>
+      </p:sp>
+      <p:sp>
+        <p:nvSpPr>
+          <p:cNvPr id="8" name="TextBox 7"/>
+          <p:cNvSpPr txBox="1"/>
+          <p:nvPr/>
+        </p:nvSpPr>
+        <p:spPr>
+          <a:xfrm>
+            <a:off x="8138160" y="1417320"/>
+            <a:ext cx="3200400" cy="4572000"/>
+          </a:xfrm>
+          <a:prstGeom prst="rect">
+            <a:avLst/>
+          </a:prstGeom>
+          <a:noFill/>
+        </p:spPr>
+        <p:txBody>
+          <a:bodyPr wrap="square">
+            <a:spAutoFit/>
+          </a:bodyPr>
+          <a:lstStyle/>
+          <a:p>
+            <a:pPr>
+              <a:spcAft>
+                <a:spcPts val="1000"/>
+              </a:spcAft>
+              <a:defRPr b="1" sz="1500">
+                <a:solidFill>
+                  <a:srgbClr val="0E7490"/>
+                </a:solidFill>
+              </a:defRPr>
+            </a:pPr>
+            <a:r>
+              <a:t>Decibel Formulas</a:t>
+            </a:r>
+          </a:p>
+          <a:p>
+            <a:pPr>
+              <a:spcAft>
+                <a:spcPts val="600"/>
+              </a:spcAft>
+              <a:defRPr sz="1200">
+                <a:solidFill>
+                  <a:srgbClr val="1E293B"/>
+                </a:solidFill>
+              </a:defRPr>
+            </a:pPr>
+            <a:r>
+              <a:t>→ Power: dB = 10 * log10(P2 / P1)</a:t>
+            </a:r>
+          </a:p>
+          <a:p>
+            <a:pPr>
+              <a:spcAft>
+                <a:spcPts val="600"/>
+              </a:spcAft>
+              <a:defRPr sz="1200">
+                <a:solidFill>
+                  <a:srgbClr val="1E293B"/>
+                </a:solidFill>
+              </a:defRPr>
+            </a:pPr>
+            <a:r>
+              <a:t>→ Voltage: dB = 20 * log10(V2 / V1)</a:t>
+            </a:r>
+          </a:p>
+          <a:p>
+            <a:pPr>
+              <a:spcAft>
+                <a:spcPts val="600"/>
+              </a:spcAft>
+              <a:defRPr sz="1200">
+                <a:solidFill>
+                  <a:srgbClr val="1E293B"/>
+                </a:solidFill>
+              </a:defRPr>
+            </a:pPr>
+            <a:r>
+              <a:t>→ Half power = -3 dB</a:t>
+            </a:r>
+          </a:p>
+          <a:p>
+            <a:pPr>
+              <a:spcAft>
+                <a:spcPts val="600"/>
+              </a:spcAft>
+              <a:defRPr sz="1200">
+                <a:solidFill>
+                  <a:srgbClr val="1E293B"/>
+                </a:solidFill>
+              </a:defRPr>
+            </a:pPr>
+            <a:r>
+              <a:t>→ 10x power = +10 dB</a:t>
+            </a:r>
+          </a:p>
+          <a:p>
+            <a:pPr>
+              <a:spcAft>
+                <a:spcPts val="600"/>
+              </a:spcAft>
+              <a:defRPr sz="1200">
+                <a:solidFill>
+                  <a:srgbClr val="1E293B"/>
+                </a:solidFill>
+              </a:defRPr>
+            </a:pPr>
+            <a:r>
+              <a:t>→ 100x power = +20 dB</a:t>
+            </a:r>
+          </a:p>
+        </p:txBody>
+      </p:sp>
+      <p:sp>
+        <p:nvSpPr>
+          <p:cNvPr id="9" name="TextBox 8"/>
+          <p:cNvSpPr txBox="1"/>
+          <p:nvPr/>
+        </p:nvSpPr>
+        <p:spPr>
+          <a:xfrm>
+            <a:off x="731520" y="6309360"/>
+            <a:ext cx="10789920" cy="365760"/>
+          </a:xfrm>
+          <a:prstGeom prst="rect">
+            <a:avLst/>
+          </a:prstGeom>
+          <a:noFill/>
+        </p:spPr>
+        <p:txBody>
+          <a:bodyPr wrap="none">
+            <a:spAutoFit/>
+          </a:bodyPr>
+          <a:lstStyle/>
+          <a:p>
+            <a:pPr>
+              <a:defRPr sz="950">
+                <a:solidFill>
+                  <a:srgbClr val="64748B"/>
+                </a:solidFill>
+              </a:defRPr>
+            </a:pPr>
+            <a:r>
+              <a:t>PCCST501 Computer Networks | KTU 2024 Scheme | Prof. Anju Markose | Assistant Professor, Dept. of CSE | VJCET</a:t>
+            </a:r>
+          </a:p>
+        </p:txBody>
+      </p:sp>
+    </p:spTree>
+  </p:cSld>
+  <p:clrMapOvr>
+    <a:masterClrMapping/>
+  </p:clrMapOvr>
+</p:sld>
+</file>
+
+<file path=ppt/slides/slide11.xml><?xml version="1.0" encoding="utf-8"?>
+<p:sld xmlns:a="http://schemas.openxmlformats.org/drawingml/2006/main" xmlns:p="http://schemas.openxmlformats.org/presentationml/2006/main" xmlns:r="http://schemas.openxmlformats.org/officeDocument/2006/relationships">
+  <p:cSld>
+    <p:spTree>
+      <p:nvGrpSpPr>
+        <p:cNvPr id="1" name=""/>
+        <p:cNvGrpSpPr/>
+        <p:nvPr/>
+      </p:nvGrpSpPr>
+      <p:grpSpPr/>
+      <p:sp>
+        <p:nvSpPr>
+          <p:cNvPr id="2" name="Rectangle 1"/>
+          <p:cNvSpPr/>
+          <p:nvPr/>
+        </p:nvSpPr>
+        <p:spPr>
+          <a:xfrm>
+            <a:off x="0" y="0"/>
+            <a:ext cx="12191695" cy="1005840"/>
+          </a:xfrm>
+          <a:prstGeom prst="rect">
+            <a:avLst/>
+          </a:prstGeom>
+          <a:solidFill>
+            <a:srgbClr val="0F1E4A"/>
+          </a:solidFill>
+          <a:ln>
+            <a:noFill/>
+          </a:ln>
+        </p:spPr>
+        <p:style>
+          <a:lnRef idx="1">
+            <a:schemeClr val="accent1"/>
+          </a:lnRef>
+          <a:fillRef idx="3">
+            <a:schemeClr val="accent1"/>
+          </a:fillRef>
+          <a:effectRef idx="2">
+            <a:schemeClr val="accent1"/>
+          </a:effectRef>
+          <a:fontRef idx="minor">
+            <a:schemeClr val="lt1"/>
+          </a:fontRef>
+        </p:style>
+        <p:txBody>
+          <a:bodyPr rtlCol="0" anchor="ctr"/>
+          <a:lstStyle/>
+          <a:p>
+            <a:pPr algn="ctr"/>
+          </a:p>
+        </p:txBody>
+      </p:sp>
+      <p:sp>
+        <p:nvSpPr>
+          <p:cNvPr id="3" name="Rectangle 2"/>
+          <p:cNvSpPr/>
+          <p:nvPr/>
+        </p:nvSpPr>
+        <p:spPr>
+          <a:xfrm>
+            <a:off x="0" y="969264"/>
+            <a:ext cx="12191695" cy="36576"/>
+          </a:xfrm>
+          <a:prstGeom prst="rect">
+            <a:avLst/>
+          </a:prstGeom>
+          <a:solidFill>
+            <a:srgbClr val="D97706"/>
+          </a:solidFill>
+          <a:ln>
+            <a:noFill/>
+          </a:ln>
+        </p:spPr>
+        <p:style>
+          <a:lnRef idx="1">
+            <a:schemeClr val="accent1"/>
+          </a:lnRef>
+          <a:fillRef idx="3">
+            <a:schemeClr val="accent1"/>
+          </a:fillRef>
+          <a:effectRef idx="2">
+            <a:schemeClr val="accent1"/>
+          </a:effectRef>
+          <a:fontRef idx="minor">
+            <a:schemeClr val="lt1"/>
+          </a:fontRef>
+        </p:style>
+        <p:txBody>
+          <a:bodyPr rtlCol="0" anchor="ctr"/>
+          <a:lstStyle/>
+          <a:p>
+            <a:pPr algn="ctr"/>
+          </a:p>
+        </p:txBody>
+      </p:sp>
+      <p:sp>
+        <p:nvSpPr>
+          <p:cNvPr id="4" name="TextBox 3"/>
+          <p:cNvSpPr txBox="1"/>
+          <p:nvPr/>
+        </p:nvSpPr>
+        <p:spPr>
+          <a:xfrm>
+            <a:off x="731520" y="164592"/>
+            <a:ext cx="8412480" cy="685800"/>
+          </a:xfrm>
+          <a:prstGeom prst="rect">
+            <a:avLst/>
+          </a:prstGeom>
+          <a:noFill/>
+        </p:spPr>
+        <p:txBody>
+          <a:bodyPr wrap="none">
+            <a:spAutoFit/>
+          </a:bodyPr>
+          <a:lstStyle/>
+          <a:p>
+            <a:pPr>
+              <a:defRPr b="1" sz="2300">
+                <a:solidFill>
+                  <a:srgbClr val="F8FAFC"/>
+                </a:solidFill>
+              </a:defRPr>
+            </a:pPr>
+            <a:r>
+              <a:t>4.3.2 Channel Capacity Limits: Nyquist vs Shannon</a:t>
+            </a:r>
+          </a:p>
+        </p:txBody>
+      </p:sp>
+      <p:sp>
+        <p:nvSpPr>
+          <p:cNvPr id="5" name="TextBox 4"/>
+          <p:cNvSpPr txBox="1"/>
+          <p:nvPr/>
+        </p:nvSpPr>
+        <p:spPr>
+          <a:xfrm>
+            <a:off x="8229600" y="164592"/>
+            <a:ext cx="3291840" cy="685800"/>
+          </a:xfrm>
+          <a:prstGeom prst="rect">
+            <a:avLst/>
+          </a:prstGeom>
+          <a:noFill/>
+        </p:spPr>
+        <p:txBody>
+          <a:bodyPr wrap="none">
+            <a:spAutoFit/>
+          </a:bodyPr>
+          <a:lstStyle/>
+          <a:p>
+            <a:pPr algn="r">
+              <a:defRPr b="1" sz="1300">
+                <a:solidFill>
+                  <a:srgbClr val="D97706"/>
+                </a:solidFill>
+              </a:defRPr>
+            </a:pPr>
+            <a:r>
+              <a:t>M4.3 THEORETICAL LIMITS</a:t>
+            </a:r>
+          </a:p>
+        </p:txBody>
+      </p:sp>
+      <p:sp>
+        <p:nvSpPr>
+          <p:cNvPr id="6" name="Rounded Rectangle 5"/>
+          <p:cNvSpPr/>
+          <p:nvPr/>
+        </p:nvSpPr>
+        <p:spPr>
+          <a:xfrm>
+            <a:off x="731520" y="1280160"/>
+            <a:ext cx="5212080" cy="4846320"/>
+          </a:xfrm>
+          <a:prstGeom prst="roundRect">
+            <a:avLst/>
+          </a:prstGeom>
+          <a:solidFill>
+            <a:srgbClr val="F1F5F9"/>
+          </a:solidFill>
+          <a:ln w="19050">
+            <a:solidFill>
+              <a:srgbClr val="0E7490"/>
+            </a:solidFill>
+          </a:ln>
+        </p:spPr>
+        <p:style>
+          <a:lnRef idx="1">
+            <a:schemeClr val="accent1"/>
+          </a:lnRef>
+          <a:fillRef idx="3">
+            <a:schemeClr val="accent1"/>
+          </a:fillRef>
+          <a:effectRef idx="2">
+            <a:schemeClr val="accent1"/>
+          </a:effectRef>
+          <a:fontRef idx="minor">
+            <a:schemeClr val="lt1"/>
+          </a:fontRef>
+        </p:style>
+        <p:txBody>
+          <a:bodyPr rtlCol="0" anchor="ctr"/>
+          <a:lstStyle/>
+          <a:p>
+            <a:pPr algn="ctr"/>
+          </a:p>
+        </p:txBody>
+      </p:sp>
+      <p:sp>
+        <p:nvSpPr>
+          <p:cNvPr id="7" name="TextBox 6"/>
+          <p:cNvSpPr txBox="1"/>
+          <p:nvPr/>
+        </p:nvSpPr>
+        <p:spPr>
+          <a:xfrm>
+            <a:off x="914400" y="1417320"/>
+            <a:ext cx="4846320" cy="4572000"/>
+          </a:xfrm>
+          <a:prstGeom prst="rect">
+            <a:avLst/>
+          </a:prstGeom>
+          <a:noFill/>
+        </p:spPr>
+        <p:txBody>
+          <a:bodyPr wrap="square">
+            <a:spAutoFit/>
+          </a:bodyPr>
+          <a:lstStyle/>
+          <a:p>
+            <a:pPr>
+              <a:spcAft>
+                <a:spcPts val="1200"/>
+              </a:spcAft>
               <a:defRPr b="1" sz="1600">
                 <a:solidFill>
-                  <a:srgbClr val="F59E0B"/>
-                </a:solidFill>
-              </a:defRPr>
-            </a:pPr>
-            <a:r>
-              <a:t>PCCST501 COMPUTER NETWORKS | MODULE 4</a:t>
-            </a:r>
-          </a:p>
-          <a:p>
-            <a:pPr>
-              <a:spcAft>
-                <a:spcPts val="2000"/>
-              </a:spcAft>
-              <a:defRPr b="1" sz="3800">
+                  <a:srgbClr val="0F1E4A"/>
+                </a:solidFill>
+              </a:defRPr>
+            </a:pPr>
+            <a:r>
+              <a:t>Nyquist Bit Rate (Noiseless Channel)</a:t>
+            </a:r>
+          </a:p>
+          <a:p>
+            <a:pPr>
+              <a:spcAft>
+                <a:spcPts val="600"/>
+              </a:spcAft>
+              <a:defRPr sz="1250">
+                <a:solidFill>
+                  <a:srgbClr val="1E293B"/>
+                </a:solidFill>
+              </a:defRPr>
+            </a:pPr>
+            <a:r>
+              <a:t>• Condition: Ideal noiseless channel of bandwidth $B$ Hz</a:t>
+            </a:r>
+          </a:p>
+          <a:p>
+            <a:pPr>
+              <a:spcAft>
+                <a:spcPts val="600"/>
+              </a:spcAft>
+              <a:defRPr sz="1250">
+                <a:solidFill>
+                  <a:srgbClr val="1E293B"/>
+                </a:solidFill>
+              </a:defRPr>
+            </a:pPr>
+            <a:r>
+              <a:t>• Signal Levels: $L$ distinct discrete signal voltage levels</a:t>
+            </a:r>
+          </a:p>
+          <a:p>
+            <a:pPr>
+              <a:spcAft>
+                <a:spcPts val="600"/>
+              </a:spcAft>
+              <a:defRPr sz="1250">
+                <a:solidFill>
+                  <a:srgbClr val="1E293B"/>
+                </a:solidFill>
+              </a:defRPr>
+            </a:pPr>
+            <a:r>
+              <a:t>• Formula: $\text{Bit Rate} = 2 \times B \times \log_2(L) \text{ bps}$</a:t>
+            </a:r>
+          </a:p>
+          <a:p>
+            <a:pPr>
+              <a:spcAft>
+                <a:spcPts val="600"/>
+              </a:spcAft>
+              <a:defRPr sz="1250">
+                <a:solidFill>
+                  <a:srgbClr val="1E293B"/>
+                </a:solidFill>
+              </a:defRPr>
+            </a:pPr>
+            <a:r>
+              <a:t>• Example: Bandwidth = 3000 Hz, $L = 2 \implies \text{Bit Rate} = 2 \times 3000 \times 1 = 6000 \text{ bps}$</a:t>
+            </a:r>
+          </a:p>
+          <a:p>
+            <a:pPr>
+              <a:spcAft>
+                <a:spcPts val="600"/>
+              </a:spcAft>
+              <a:defRPr sz="1250">
+                <a:solidFill>
+                  <a:srgbClr val="1E293B"/>
+                </a:solidFill>
+              </a:defRPr>
+            </a:pPr>
+            <a:r>
+              <a:t>• Significance: Upper bound determined strictly by bandwidth and modulation levels</a:t>
+            </a:r>
+          </a:p>
+        </p:txBody>
+      </p:sp>
+      <p:sp>
+        <p:nvSpPr>
+          <p:cNvPr id="8" name="Rounded Rectangle 7"/>
+          <p:cNvSpPr/>
+          <p:nvPr/>
+        </p:nvSpPr>
+        <p:spPr>
+          <a:xfrm>
+            <a:off x="6309360" y="1280160"/>
+            <a:ext cx="5212080" cy="4846320"/>
+          </a:xfrm>
+          <a:prstGeom prst="roundRect">
+            <a:avLst/>
+          </a:prstGeom>
+          <a:solidFill>
+            <a:srgbClr val="EEF2FF"/>
+          </a:solidFill>
+          <a:ln w="19050">
+            <a:solidFill>
+              <a:srgbClr val="0F1E4A"/>
+            </a:solidFill>
+          </a:ln>
+        </p:spPr>
+        <p:style>
+          <a:lnRef idx="1">
+            <a:schemeClr val="accent1"/>
+          </a:lnRef>
+          <a:fillRef idx="3">
+            <a:schemeClr val="accent1"/>
+          </a:fillRef>
+          <a:effectRef idx="2">
+            <a:schemeClr val="accent1"/>
+          </a:effectRef>
+          <a:fontRef idx="minor">
+            <a:schemeClr val="lt1"/>
+          </a:fontRef>
+        </p:style>
+        <p:txBody>
+          <a:bodyPr rtlCol="0" anchor="ctr"/>
+          <a:lstStyle/>
+          <a:p>
+            <a:pPr algn="ctr"/>
+          </a:p>
+        </p:txBody>
+      </p:sp>
+      <p:sp>
+        <p:nvSpPr>
+          <p:cNvPr id="9" name="TextBox 8"/>
+          <p:cNvSpPr txBox="1"/>
+          <p:nvPr/>
+        </p:nvSpPr>
+        <p:spPr>
+          <a:xfrm>
+            <a:off x="6492240" y="1417320"/>
+            <a:ext cx="4846320" cy="4572000"/>
+          </a:xfrm>
+          <a:prstGeom prst="rect">
+            <a:avLst/>
+          </a:prstGeom>
+          <a:noFill/>
+        </p:spPr>
+        <p:txBody>
+          <a:bodyPr wrap="square">
+            <a:spAutoFit/>
+          </a:bodyPr>
+          <a:lstStyle/>
+          <a:p>
+            <a:pPr>
+              <a:spcAft>
+                <a:spcPts val="1200"/>
+              </a:spcAft>
+              <a:defRPr b="1" sz="1600">
+                <a:solidFill>
+                  <a:srgbClr val="0E7490"/>
+                </a:solidFill>
+              </a:defRPr>
+            </a:pPr>
+            <a:r>
+              <a:t>Shannon Capacity Theorem (Noisy Channel)</a:t>
+            </a:r>
+          </a:p>
+          <a:p>
+            <a:pPr>
+              <a:spcAft>
+                <a:spcPts val="600"/>
+              </a:spcAft>
+              <a:defRPr sz="1250">
+                <a:solidFill>
+                  <a:srgbClr val="1E293B"/>
+                </a:solidFill>
+              </a:defRPr>
+            </a:pPr>
+            <a:r>
+              <a:t>• Condition: Real-world physical channel with Gaussian thermal noise</a:t>
+            </a:r>
+          </a:p>
+          <a:p>
+            <a:pPr>
+              <a:spcAft>
+                <a:spcPts val="600"/>
+              </a:spcAft>
+              <a:defRPr sz="1250">
+                <a:solidFill>
+                  <a:srgbClr val="1E293B"/>
+                </a:solidFill>
+              </a:defRPr>
+            </a:pPr>
+            <a:r>
+              <a:t>• Signal-to-Noise: $\text{SNR} = \frac{\text{Signal Power}}{\text{Noise Power}}$ (Linear scale)</a:t>
+            </a:r>
+          </a:p>
+          <a:p>
+            <a:pPr>
+              <a:spcAft>
+                <a:spcPts val="600"/>
+              </a:spcAft>
+              <a:defRPr sz="1250">
+                <a:solidFill>
+                  <a:srgbClr val="1E293B"/>
+                </a:solidFill>
+              </a:defRPr>
+            </a:pPr>
+            <a:r>
+              <a:t>• Formula: $\text{Capacity } C = B \times \log_2(1 + \text{SNR}) \text{ bps}$</a:t>
+            </a:r>
+          </a:p>
+          <a:p>
+            <a:pPr>
+              <a:spcAft>
+                <a:spcPts val="600"/>
+              </a:spcAft>
+              <a:defRPr sz="1250">
+                <a:solidFill>
+                  <a:srgbClr val="1E293B"/>
+                </a:solidFill>
+              </a:defRPr>
+            </a:pPr>
+            <a:r>
+              <a:t>• Example: $B = 3000\text{ Hz}, \text{SNR}_{\text{dB}} = 30\text{ dB} \implies \text{SNR} = 1000$ $\implies C = 3000 \times \log_2(1001) \approx 29,887\text{ bps}$</a:t>
+            </a:r>
+          </a:p>
+          <a:p>
+            <a:pPr>
+              <a:spcAft>
+                <a:spcPts val="600"/>
+              </a:spcAft>
+              <a:defRPr sz="1250">
+                <a:solidFill>
+                  <a:srgbClr val="1E293B"/>
+                </a:solidFill>
+              </a:defRPr>
+            </a:pPr>
+            <a:r>
+              <a:t>• Significance: Absolute theoretical upper bound regardless of signal levels $L$</a:t>
+            </a:r>
+          </a:p>
+        </p:txBody>
+      </p:sp>
+      <p:sp>
+        <p:nvSpPr>
+          <p:cNvPr id="10" name="TextBox 9"/>
+          <p:cNvSpPr txBox="1"/>
+          <p:nvPr/>
+        </p:nvSpPr>
+        <p:spPr>
+          <a:xfrm>
+            <a:off x="731520" y="6309360"/>
+            <a:ext cx="10789920" cy="365760"/>
+          </a:xfrm>
+          <a:prstGeom prst="rect">
+            <a:avLst/>
+          </a:prstGeom>
+          <a:noFill/>
+        </p:spPr>
+        <p:txBody>
+          <a:bodyPr wrap="none">
+            <a:spAutoFit/>
+          </a:bodyPr>
+          <a:lstStyle/>
+          <a:p>
+            <a:pPr>
+              <a:defRPr sz="950">
+                <a:solidFill>
+                  <a:srgbClr val="64748B"/>
+                </a:solidFill>
+              </a:defRPr>
+            </a:pPr>
+            <a:r>
+              <a:t>PCCST501 Computer Networks | KTU 2024 Scheme | Prof. Anju Markose | Assistant Professor, Dept. of CSE | VJCET</a:t>
+            </a:r>
+          </a:p>
+        </p:txBody>
+      </p:sp>
+    </p:spTree>
+  </p:cSld>
+  <p:clrMapOvr>
+    <a:masterClrMapping/>
+  </p:clrMapOvr>
+</p:sld>
+</file>
+
+<file path=ppt/slides/slide12.xml><?xml version="1.0" encoding="utf-8"?>
+<p:sld xmlns:a="http://schemas.openxmlformats.org/drawingml/2006/main" xmlns:p="http://schemas.openxmlformats.org/presentationml/2006/main" xmlns:r="http://schemas.openxmlformats.org/officeDocument/2006/relationships">
+  <p:cSld>
+    <p:spTree>
+      <p:nvGrpSpPr>
+        <p:cNvPr id="1" name=""/>
+        <p:cNvGrpSpPr/>
+        <p:nvPr/>
+      </p:nvGrpSpPr>
+      <p:grpSpPr/>
+      <p:sp>
+        <p:nvSpPr>
+          <p:cNvPr id="2" name="Rectangle 1"/>
+          <p:cNvSpPr/>
+          <p:nvPr/>
+        </p:nvSpPr>
+        <p:spPr>
+          <a:xfrm>
+            <a:off x="0" y="0"/>
+            <a:ext cx="12191695" cy="6858000"/>
+          </a:xfrm>
+          <a:prstGeom prst="rect">
+            <a:avLst/>
+          </a:prstGeom>
+          <a:solidFill>
+            <a:srgbClr val="0F172A"/>
+          </a:solidFill>
+          <a:ln>
+            <a:noFill/>
+          </a:ln>
+        </p:spPr>
+        <p:style>
+          <a:lnRef idx="1">
+            <a:schemeClr val="accent1"/>
+          </a:lnRef>
+          <a:fillRef idx="3">
+            <a:schemeClr val="accent1"/>
+          </a:fillRef>
+          <a:effectRef idx="2">
+            <a:schemeClr val="accent1"/>
+          </a:effectRef>
+          <a:fontRef idx="minor">
+            <a:schemeClr val="lt1"/>
+          </a:fontRef>
+        </p:style>
+        <p:txBody>
+          <a:bodyPr rtlCol="0" anchor="ctr"/>
+          <a:lstStyle/>
+          <a:p>
+            <a:pPr algn="ctr"/>
+          </a:p>
+        </p:txBody>
+      </p:sp>
+      <p:sp>
+        <p:nvSpPr>
+          <p:cNvPr id="3" name="Rectangle 2"/>
+          <p:cNvSpPr/>
+          <p:nvPr/>
+        </p:nvSpPr>
+        <p:spPr>
+          <a:xfrm>
+            <a:off x="822960" y="1188720"/>
+            <a:ext cx="164592" cy="4480560"/>
+          </a:xfrm>
+          <a:prstGeom prst="rect">
+            <a:avLst/>
+          </a:prstGeom>
+          <a:solidFill>
+            <a:srgbClr val="D97706"/>
+          </a:solidFill>
+          <a:ln>
+            <a:noFill/>
+          </a:ln>
+        </p:spPr>
+        <p:style>
+          <a:lnRef idx="1">
+            <a:schemeClr val="accent1"/>
+          </a:lnRef>
+          <a:fillRef idx="3">
+            <a:schemeClr val="accent1"/>
+          </a:fillRef>
+          <a:effectRef idx="2">
+            <a:schemeClr val="accent1"/>
+          </a:effectRef>
+          <a:fontRef idx="minor">
+            <a:schemeClr val="lt1"/>
+          </a:fontRef>
+        </p:style>
+        <p:txBody>
+          <a:bodyPr rtlCol="0" anchor="ctr"/>
+          <a:lstStyle/>
+          <a:p>
+            <a:pPr algn="ctr"/>
+          </a:p>
+        </p:txBody>
+      </p:sp>
+      <p:sp>
+        <p:nvSpPr>
+          <p:cNvPr id="4" name="TextBox 3"/>
+          <p:cNvSpPr txBox="1"/>
+          <p:nvPr/>
+        </p:nvSpPr>
+        <p:spPr>
+          <a:xfrm>
+            <a:off x="1280160" y="1097280"/>
+            <a:ext cx="10058400" cy="4663440"/>
+          </a:xfrm>
+          <a:prstGeom prst="rect">
+            <a:avLst/>
+          </a:prstGeom>
+          <a:noFill/>
+        </p:spPr>
+        <p:txBody>
+          <a:bodyPr wrap="square">
+            <a:spAutoFit/>
+          </a:bodyPr>
+          <a:lstStyle/>
+          <a:p>
+            <a:pPr>
+              <a:spcAft>
+                <a:spcPts val="1200"/>
+              </a:spcAft>
+              <a:defRPr b="1" sz="1300">
+                <a:solidFill>
+                  <a:srgbClr val="D97706"/>
+                </a:solidFill>
+              </a:defRPr>
+            </a:pPr>
+            <a:r>
+              <a:t>PCCST501 Computer Networks | KTU 2024 Scheme • MODULE 4 • M4.4</a:t>
+            </a:r>
+          </a:p>
+          <a:p>
+            <a:pPr>
+              <a:spcAft>
+                <a:spcPts val="1400"/>
+              </a:spcAft>
+              <a:defRPr b="1" sz="3200">
                 <a:solidFill>
                   <a:srgbClr val="F8FAFC"/>
                 </a:solidFill>
               </a:defRPr>
             </a:pPr>
             <a:r>
-              <a:t>Network Management &amp; Physical Layer</a:t>
-            </a:r>
-          </a:p>
-          <a:p>
-            <a:pPr>
-              <a:spcAft>
-                <a:spcPts val="2400"/>
-              </a:spcAft>
-              <a:defRPr sz="2000">
+              <a:t>Digital Transmission: Line Coding Techniques</a:t>
+            </a:r>
+          </a:p>
+          <a:p>
+            <a:pPr>
+              <a:spcAft>
+                <a:spcPts val="2800"/>
+              </a:spcAft>
+              <a:defRPr sz="1700">
                 <a:solidFill>
                   <a:srgbClr val="94A3B8"/>
                 </a:solidFill>
               </a:defRPr>
             </a:pPr>
             <a:r>
-              <a:t>SNMP, ASN.1, Signals, Digital/Analog Transmission &amp; Media</a:t>
-            </a:r>
-          </a:p>
-          <a:p>
-            <a:pPr>
-              <a:defRPr sz="1400">
-                <a:solidFill>
-                  <a:srgbClr val="CBD5E1"/>
-                </a:solidFill>
-              </a:defRPr>
-            </a:pPr>
-            <a:r>
-              <a:t>Prof. Anju Markose | Assistant Professor, Dept. of CSE | VJCET</a:t>
+              <a:t>Baseband Transmission, Unipolar, Polar (NRZ-L, NRZ-I), Biphase (Manchester, Differential Manchester), Bipolar AMI &amp; Block Codes</a:t>
+            </a:r>
+          </a:p>
+          <a:p>
+            <a:pPr>
+              <a:defRPr b="1" sz="1300">
+                <a:solidFill>
+                  <a:srgbClr val="E2E8F0"/>
+                </a:solidFill>
+              </a:defRPr>
+            </a:pPr>
+            <a:r>
+              <a:t>Prepared by: Prof. Anju Markose | Assistant Professor, Dept. of CSE | VJCET</a:t>
+            </a:r>
+          </a:p>
+          <a:p>
+            <a:pPr>
+              <a:defRPr sz="1100">
+                <a:solidFill>
+                  <a:srgbClr val="94A3B8"/>
+                </a:solidFill>
+              </a:defRPr>
+            </a:pPr>
+            <a:r>
+              <a:t>Viswajyothi College of Engineering and Technology (VJCET), Vazhakulam</a:t>
+            </a:r>
+          </a:p>
+        </p:txBody>
+      </p:sp>
+    </p:spTree>
+  </p:cSld>
+  <p:clrMapOvr>
+    <a:masterClrMapping/>
+  </p:clrMapOvr>
+</p:sld>
+</file>
+
+<file path=ppt/slides/slide13.xml><?xml version="1.0" encoding="utf-8"?>
+<p:sld xmlns:a="http://schemas.openxmlformats.org/drawingml/2006/main" xmlns:p="http://schemas.openxmlformats.org/presentationml/2006/main" xmlns:r="http://schemas.openxmlformats.org/officeDocument/2006/relationships">
+  <p:cSld>
+    <p:spTree>
+      <p:nvGrpSpPr>
+        <p:cNvPr id="1" name=""/>
+        <p:cNvGrpSpPr/>
+        <p:nvPr/>
+      </p:nvGrpSpPr>
+      <p:grpSpPr/>
+      <p:sp>
+        <p:nvSpPr>
+          <p:cNvPr id="2" name="Rectangle 1"/>
+          <p:cNvSpPr/>
+          <p:nvPr/>
+        </p:nvSpPr>
+        <p:spPr>
+          <a:xfrm>
+            <a:off x="0" y="0"/>
+            <a:ext cx="12191695" cy="1005840"/>
+          </a:xfrm>
+          <a:prstGeom prst="rect">
+            <a:avLst/>
+          </a:prstGeom>
+          <a:solidFill>
+            <a:srgbClr val="0F1E4A"/>
+          </a:solidFill>
+          <a:ln>
+            <a:noFill/>
+          </a:ln>
+        </p:spPr>
+        <p:style>
+          <a:lnRef idx="1">
+            <a:schemeClr val="accent1"/>
+          </a:lnRef>
+          <a:fillRef idx="3">
+            <a:schemeClr val="accent1"/>
+          </a:fillRef>
+          <a:effectRef idx="2">
+            <a:schemeClr val="accent1"/>
+          </a:effectRef>
+          <a:fontRef idx="minor">
+            <a:schemeClr val="lt1"/>
+          </a:fontRef>
+        </p:style>
+        <p:txBody>
+          <a:bodyPr rtlCol="0" anchor="ctr"/>
+          <a:lstStyle/>
+          <a:p>
+            <a:pPr algn="ctr"/>
+          </a:p>
+        </p:txBody>
+      </p:sp>
+      <p:sp>
+        <p:nvSpPr>
+          <p:cNvPr id="3" name="Rectangle 2"/>
+          <p:cNvSpPr/>
+          <p:nvPr/>
+        </p:nvSpPr>
+        <p:spPr>
+          <a:xfrm>
+            <a:off x="0" y="969264"/>
+            <a:ext cx="12191695" cy="36576"/>
+          </a:xfrm>
+          <a:prstGeom prst="rect">
+            <a:avLst/>
+          </a:prstGeom>
+          <a:solidFill>
+            <a:srgbClr val="D97706"/>
+          </a:solidFill>
+          <a:ln>
+            <a:noFill/>
+          </a:ln>
+        </p:spPr>
+        <p:style>
+          <a:lnRef idx="1">
+            <a:schemeClr val="accent1"/>
+          </a:lnRef>
+          <a:fillRef idx="3">
+            <a:schemeClr val="accent1"/>
+          </a:fillRef>
+          <a:effectRef idx="2">
+            <a:schemeClr val="accent1"/>
+          </a:effectRef>
+          <a:fontRef idx="minor">
+            <a:schemeClr val="lt1"/>
+          </a:fontRef>
+        </p:style>
+        <p:txBody>
+          <a:bodyPr rtlCol="0" anchor="ctr"/>
+          <a:lstStyle/>
+          <a:p>
+            <a:pPr algn="ctr"/>
+          </a:p>
+        </p:txBody>
+      </p:sp>
+      <p:sp>
+        <p:nvSpPr>
+          <p:cNvPr id="4" name="TextBox 3"/>
+          <p:cNvSpPr txBox="1"/>
+          <p:nvPr/>
+        </p:nvSpPr>
+        <p:spPr>
+          <a:xfrm>
+            <a:off x="731520" y="164592"/>
+            <a:ext cx="8412480" cy="685800"/>
+          </a:xfrm>
+          <a:prstGeom prst="rect">
+            <a:avLst/>
+          </a:prstGeom>
+          <a:noFill/>
+        </p:spPr>
+        <p:txBody>
+          <a:bodyPr wrap="none">
+            <a:spAutoFit/>
+          </a:bodyPr>
+          <a:lstStyle/>
+          <a:p>
+            <a:pPr>
+              <a:defRPr b="1" sz="2300">
+                <a:solidFill>
+                  <a:srgbClr val="F8FAFC"/>
+                </a:solidFill>
+              </a:defRPr>
+            </a:pPr>
+            <a:r>
+              <a:t>4.4.1 NRZ vs Biphase Manchester Line Coding</a:t>
+            </a:r>
+          </a:p>
+        </p:txBody>
+      </p:sp>
+      <p:sp>
+        <p:nvSpPr>
+          <p:cNvPr id="5" name="TextBox 4"/>
+          <p:cNvSpPr txBox="1"/>
+          <p:nvPr/>
+        </p:nvSpPr>
+        <p:spPr>
+          <a:xfrm>
+            <a:off x="8229600" y="164592"/>
+            <a:ext cx="3291840" cy="685800"/>
+          </a:xfrm>
+          <a:prstGeom prst="rect">
+            <a:avLst/>
+          </a:prstGeom>
+          <a:noFill/>
+        </p:spPr>
+        <p:txBody>
+          <a:bodyPr wrap="none">
+            <a:spAutoFit/>
+          </a:bodyPr>
+          <a:lstStyle/>
+          <a:p>
+            <a:pPr algn="r">
+              <a:defRPr b="1" sz="1300">
+                <a:solidFill>
+                  <a:srgbClr val="D97706"/>
+                </a:solidFill>
+              </a:defRPr>
+            </a:pPr>
+            <a:r>
+              <a:t>M4.4 LINE CODING</a:t>
+            </a:r>
+          </a:p>
+        </p:txBody>
+      </p:sp>
+      <p:sp>
+        <p:nvSpPr>
+          <p:cNvPr id="6" name="Rounded Rectangle 5"/>
+          <p:cNvSpPr/>
+          <p:nvPr/>
+        </p:nvSpPr>
+        <p:spPr>
+          <a:xfrm>
+            <a:off x="731520" y="1280160"/>
+            <a:ext cx="5212080" cy="4846320"/>
+          </a:xfrm>
+          <a:prstGeom prst="roundRect">
+            <a:avLst/>
+          </a:prstGeom>
+          <a:solidFill>
+            <a:srgbClr val="F1F5F9"/>
+          </a:solidFill>
+          <a:ln w="19050">
+            <a:solidFill>
+              <a:srgbClr val="0E7490"/>
+            </a:solidFill>
+          </a:ln>
+        </p:spPr>
+        <p:style>
+          <a:lnRef idx="1">
+            <a:schemeClr val="accent1"/>
+          </a:lnRef>
+          <a:fillRef idx="3">
+            <a:schemeClr val="accent1"/>
+          </a:fillRef>
+          <a:effectRef idx="2">
+            <a:schemeClr val="accent1"/>
+          </a:effectRef>
+          <a:fontRef idx="minor">
+            <a:schemeClr val="lt1"/>
+          </a:fontRef>
+        </p:style>
+        <p:txBody>
+          <a:bodyPr rtlCol="0" anchor="ctr"/>
+          <a:lstStyle/>
+          <a:p>
+            <a:pPr algn="ctr"/>
+          </a:p>
+        </p:txBody>
+      </p:sp>
+      <p:sp>
+        <p:nvSpPr>
+          <p:cNvPr id="7" name="TextBox 6"/>
+          <p:cNvSpPr txBox="1"/>
+          <p:nvPr/>
+        </p:nvSpPr>
+        <p:spPr>
+          <a:xfrm>
+            <a:off x="914400" y="1417320"/>
+            <a:ext cx="4846320" cy="4572000"/>
+          </a:xfrm>
+          <a:prstGeom prst="rect">
+            <a:avLst/>
+          </a:prstGeom>
+          <a:noFill/>
+        </p:spPr>
+        <p:txBody>
+          <a:bodyPr wrap="square">
+            <a:spAutoFit/>
+          </a:bodyPr>
+          <a:lstStyle/>
+          <a:p>
+            <a:pPr>
+              <a:spcAft>
+                <a:spcPts val="1200"/>
+              </a:spcAft>
+              <a:defRPr b="1" sz="1600">
+                <a:solidFill>
+                  <a:srgbClr val="0F1E4A"/>
+                </a:solidFill>
+              </a:defRPr>
+            </a:pPr>
+            <a:r>
+              <a:t>NRZ (Non-Return-to-Zero)</a:t>
+            </a:r>
+          </a:p>
+          <a:p>
+            <a:pPr>
+              <a:spcAft>
+                <a:spcPts val="600"/>
+              </a:spcAft>
+              <a:defRPr sz="1250">
+                <a:solidFill>
+                  <a:srgbClr val="1E293B"/>
+                </a:solidFill>
+              </a:defRPr>
+            </a:pPr>
+            <a:r>
+              <a:t>• NRZ-L (Level): Bit 0 = Positive voltage $+V$; Bit 1 = Negative voltage $-V$</a:t>
+            </a:r>
+          </a:p>
+          <a:p>
+            <a:pPr>
+              <a:spcAft>
+                <a:spcPts val="600"/>
+              </a:spcAft>
+              <a:defRPr sz="1250">
+                <a:solidFill>
+                  <a:srgbClr val="1E293B"/>
+                </a:solidFill>
+              </a:defRPr>
+            </a:pPr>
+            <a:r>
+              <a:t>• NRZ-I (Invert): Bit 1 = Transition at bit beginning; Bit 0 = No transition</a:t>
+            </a:r>
+          </a:p>
+          <a:p>
+            <a:pPr>
+              <a:spcAft>
+                <a:spcPts val="600"/>
+              </a:spcAft>
+              <a:defRPr sz="1250">
+                <a:solidFill>
+                  <a:srgbClr val="1E293B"/>
+                </a:solidFill>
+              </a:defRPr>
+            </a:pPr>
+            <a:r>
+              <a:t>• Drawback: Significant DC component; baseline wander; loss of synchronization on consecutive 0s or 1s</a:t>
+            </a:r>
+          </a:p>
+          <a:p>
+            <a:pPr>
+              <a:spcAft>
+                <a:spcPts val="600"/>
+              </a:spcAft>
+              <a:defRPr sz="1250">
+                <a:solidFill>
+                  <a:srgbClr val="1E293B"/>
+                </a:solidFill>
+              </a:defRPr>
+            </a:pPr>
+            <a:r>
+              <a:t>• Bandwidth: Low bandwidth ($B = N / 2$)</a:t>
+            </a:r>
+          </a:p>
+        </p:txBody>
+      </p:sp>
+      <p:sp>
+        <p:nvSpPr>
+          <p:cNvPr id="8" name="Rounded Rectangle 7"/>
+          <p:cNvSpPr/>
+          <p:nvPr/>
+        </p:nvSpPr>
+        <p:spPr>
+          <a:xfrm>
+            <a:off x="6309360" y="1280160"/>
+            <a:ext cx="5212080" cy="4846320"/>
+          </a:xfrm>
+          <a:prstGeom prst="roundRect">
+            <a:avLst/>
+          </a:prstGeom>
+          <a:solidFill>
+            <a:srgbClr val="EEF2FF"/>
+          </a:solidFill>
+          <a:ln w="19050">
+            <a:solidFill>
+              <a:srgbClr val="0F1E4A"/>
+            </a:solidFill>
+          </a:ln>
+        </p:spPr>
+        <p:style>
+          <a:lnRef idx="1">
+            <a:schemeClr val="accent1"/>
+          </a:lnRef>
+          <a:fillRef idx="3">
+            <a:schemeClr val="accent1"/>
+          </a:fillRef>
+          <a:effectRef idx="2">
+            <a:schemeClr val="accent1"/>
+          </a:effectRef>
+          <a:fontRef idx="minor">
+            <a:schemeClr val="lt1"/>
+          </a:fontRef>
+        </p:style>
+        <p:txBody>
+          <a:bodyPr rtlCol="0" anchor="ctr"/>
+          <a:lstStyle/>
+          <a:p>
+            <a:pPr algn="ctr"/>
+          </a:p>
+        </p:txBody>
+      </p:sp>
+      <p:sp>
+        <p:nvSpPr>
+          <p:cNvPr id="9" name="TextBox 8"/>
+          <p:cNvSpPr txBox="1"/>
+          <p:nvPr/>
+        </p:nvSpPr>
+        <p:spPr>
+          <a:xfrm>
+            <a:off x="6492240" y="1417320"/>
+            <a:ext cx="4846320" cy="4572000"/>
+          </a:xfrm>
+          <a:prstGeom prst="rect">
+            <a:avLst/>
+          </a:prstGeom>
+          <a:noFill/>
+        </p:spPr>
+        <p:txBody>
+          <a:bodyPr wrap="square">
+            <a:spAutoFit/>
+          </a:bodyPr>
+          <a:lstStyle/>
+          <a:p>
+            <a:pPr>
+              <a:spcAft>
+                <a:spcPts val="1200"/>
+              </a:spcAft>
+              <a:defRPr b="1" sz="1600">
+                <a:solidFill>
+                  <a:srgbClr val="0E7490"/>
+                </a:solidFill>
+              </a:defRPr>
+            </a:pPr>
+            <a:r>
+              <a:t>Manchester &amp; Differential Manchester (Self-Clocking)</a:t>
+            </a:r>
+          </a:p>
+          <a:p>
+            <a:pPr>
+              <a:spcAft>
+                <a:spcPts val="600"/>
+              </a:spcAft>
+              <a:defRPr sz="1250">
+                <a:solidFill>
+                  <a:srgbClr val="1E293B"/>
+                </a:solidFill>
+              </a:defRPr>
+            </a:pPr>
+            <a:r>
+              <a:t>• Manchester (IEEE 802.3): Bit 0 = High-to-Low mid-bit transition; Bit 1 = Low-to-High mid-bit transition</a:t>
+            </a:r>
+          </a:p>
+          <a:p>
+            <a:pPr>
+              <a:spcAft>
+                <a:spcPts val="600"/>
+              </a:spcAft>
+              <a:defRPr sz="1250">
+                <a:solidFill>
+                  <a:srgbClr val="1E293B"/>
+                </a:solidFill>
+              </a:defRPr>
+            </a:pPr>
+            <a:r>
+              <a:t>• Diff Manchester (802.5): Always mid-bit transition for clocking. Bit 0 = Transition at bit start; Bit 1 = No transition at start</a:t>
+            </a:r>
+          </a:p>
+          <a:p>
+            <a:pPr>
+              <a:spcAft>
+                <a:spcPts val="600"/>
+              </a:spcAft>
+              <a:defRPr sz="1250">
+                <a:solidFill>
+                  <a:srgbClr val="1E293B"/>
+                </a:solidFill>
+              </a:defRPr>
+            </a:pPr>
+            <a:r>
+              <a:t>• Advantage: Guaranteed mid-bit transition gives perfect receiver clock synchronization and ZERO DC bias!</a:t>
+            </a:r>
+          </a:p>
+          <a:p>
+            <a:pPr>
+              <a:spcAft>
+                <a:spcPts val="600"/>
+              </a:spcAft>
+              <a:defRPr sz="1250">
+                <a:solidFill>
+                  <a:srgbClr val="1E293B"/>
+                </a:solidFill>
+              </a:defRPr>
+            </a:pPr>
+            <a:r>
+              <a:t>• Drawback: Requires DOUBLE bandwidth ($B = N$)</a:t>
+            </a:r>
+          </a:p>
+        </p:txBody>
+      </p:sp>
+      <p:sp>
+        <p:nvSpPr>
+          <p:cNvPr id="10" name="TextBox 9"/>
+          <p:cNvSpPr txBox="1"/>
+          <p:nvPr/>
+        </p:nvSpPr>
+        <p:spPr>
+          <a:xfrm>
+            <a:off x="731520" y="6309360"/>
+            <a:ext cx="10789920" cy="365760"/>
+          </a:xfrm>
+          <a:prstGeom prst="rect">
+            <a:avLst/>
+          </a:prstGeom>
+          <a:noFill/>
+        </p:spPr>
+        <p:txBody>
+          <a:bodyPr wrap="none">
+            <a:spAutoFit/>
+          </a:bodyPr>
+          <a:lstStyle/>
+          <a:p>
+            <a:pPr>
+              <a:defRPr sz="950">
+                <a:solidFill>
+                  <a:srgbClr val="64748B"/>
+                </a:solidFill>
+              </a:defRPr>
+            </a:pPr>
+            <a:r>
+              <a:t>PCCST501 Computer Networks | KTU 2024 Scheme | Prof. Anju Markose | Assistant Professor, Dept. of CSE | VJCET</a:t>
+            </a:r>
+          </a:p>
+        </p:txBody>
+      </p:sp>
+    </p:spTree>
+  </p:cSld>
+  <p:clrMapOvr>
+    <a:masterClrMapping/>
+  </p:clrMapOvr>
+</p:sld>
+</file>
+
+<file path=ppt/slides/slide14.xml><?xml version="1.0" encoding="utf-8"?>
+<p:sld xmlns:a="http://schemas.openxmlformats.org/drawingml/2006/main" xmlns:p="http://schemas.openxmlformats.org/presentationml/2006/main" xmlns:r="http://schemas.openxmlformats.org/officeDocument/2006/relationships">
+  <p:cSld>
+    <p:spTree>
+      <p:nvGrpSpPr>
+        <p:cNvPr id="1" name=""/>
+        <p:cNvGrpSpPr/>
+        <p:nvPr/>
+      </p:nvGrpSpPr>
+      <p:grpSpPr/>
+      <p:sp>
+        <p:nvSpPr>
+          <p:cNvPr id="2" name="Rectangle 1"/>
+          <p:cNvSpPr/>
+          <p:nvPr/>
+        </p:nvSpPr>
+        <p:spPr>
+          <a:xfrm>
+            <a:off x="0" y="0"/>
+            <a:ext cx="12191695" cy="1005840"/>
+          </a:xfrm>
+          <a:prstGeom prst="rect">
+            <a:avLst/>
+          </a:prstGeom>
+          <a:solidFill>
+            <a:srgbClr val="0F1E4A"/>
+          </a:solidFill>
+          <a:ln>
+            <a:noFill/>
+          </a:ln>
+        </p:spPr>
+        <p:style>
+          <a:lnRef idx="1">
+            <a:schemeClr val="accent1"/>
+          </a:lnRef>
+          <a:fillRef idx="3">
+            <a:schemeClr val="accent1"/>
+          </a:fillRef>
+          <a:effectRef idx="2">
+            <a:schemeClr val="accent1"/>
+          </a:effectRef>
+          <a:fontRef idx="minor">
+            <a:schemeClr val="lt1"/>
+          </a:fontRef>
+        </p:style>
+        <p:txBody>
+          <a:bodyPr rtlCol="0" anchor="ctr"/>
+          <a:lstStyle/>
+          <a:p>
+            <a:pPr algn="ctr"/>
+          </a:p>
+        </p:txBody>
+      </p:sp>
+      <p:sp>
+        <p:nvSpPr>
+          <p:cNvPr id="3" name="Rectangle 2"/>
+          <p:cNvSpPr/>
+          <p:nvPr/>
+        </p:nvSpPr>
+        <p:spPr>
+          <a:xfrm>
+            <a:off x="0" y="969264"/>
+            <a:ext cx="12191695" cy="36576"/>
+          </a:xfrm>
+          <a:prstGeom prst="rect">
+            <a:avLst/>
+          </a:prstGeom>
+          <a:solidFill>
+            <a:srgbClr val="D97706"/>
+          </a:solidFill>
+          <a:ln>
+            <a:noFill/>
+          </a:ln>
+        </p:spPr>
+        <p:style>
+          <a:lnRef idx="1">
+            <a:schemeClr val="accent1"/>
+          </a:lnRef>
+          <a:fillRef idx="3">
+            <a:schemeClr val="accent1"/>
+          </a:fillRef>
+          <a:effectRef idx="2">
+            <a:schemeClr val="accent1"/>
+          </a:effectRef>
+          <a:fontRef idx="minor">
+            <a:schemeClr val="lt1"/>
+          </a:fontRef>
+        </p:style>
+        <p:txBody>
+          <a:bodyPr rtlCol="0" anchor="ctr"/>
+          <a:lstStyle/>
+          <a:p>
+            <a:pPr algn="ctr"/>
+          </a:p>
+        </p:txBody>
+      </p:sp>
+      <p:sp>
+        <p:nvSpPr>
+          <p:cNvPr id="4" name="TextBox 3"/>
+          <p:cNvSpPr txBox="1"/>
+          <p:nvPr/>
+        </p:nvSpPr>
+        <p:spPr>
+          <a:xfrm>
+            <a:off x="731520" y="164592"/>
+            <a:ext cx="8412480" cy="685800"/>
+          </a:xfrm>
+          <a:prstGeom prst="rect">
+            <a:avLst/>
+          </a:prstGeom>
+          <a:noFill/>
+        </p:spPr>
+        <p:txBody>
+          <a:bodyPr wrap="none">
+            <a:spAutoFit/>
+          </a:bodyPr>
+          <a:lstStyle/>
+          <a:p>
+            <a:pPr>
+              <a:defRPr b="1" sz="2300">
+                <a:solidFill>
+                  <a:srgbClr val="F8FAFC"/>
+                </a:solidFill>
+              </a:defRPr>
+            </a:pPr>
+            <a:r>
+              <a:t>4.4.2 Bipolar AMI, Block Coding &amp; Scrambling</a:t>
+            </a:r>
+          </a:p>
+        </p:txBody>
+      </p:sp>
+      <p:sp>
+        <p:nvSpPr>
+          <p:cNvPr id="5" name="TextBox 4"/>
+          <p:cNvSpPr txBox="1"/>
+          <p:nvPr/>
+        </p:nvSpPr>
+        <p:spPr>
+          <a:xfrm>
+            <a:off x="8229600" y="164592"/>
+            <a:ext cx="3291840" cy="685800"/>
+          </a:xfrm>
+          <a:prstGeom prst="rect">
+            <a:avLst/>
+          </a:prstGeom>
+          <a:noFill/>
+        </p:spPr>
+        <p:txBody>
+          <a:bodyPr wrap="none">
+            <a:spAutoFit/>
+          </a:bodyPr>
+          <a:lstStyle/>
+          <a:p>
+            <a:pPr algn="r">
+              <a:defRPr b="1" sz="1300">
+                <a:solidFill>
+                  <a:srgbClr val="D97706"/>
+                </a:solidFill>
+              </a:defRPr>
+            </a:pPr>
+            <a:r>
+              <a:t>M4.4 BIPOLAR &amp; BLOCK CODES</a:t>
+            </a:r>
+          </a:p>
+        </p:txBody>
+      </p:sp>
+      <p:sp>
+        <p:nvSpPr>
+          <p:cNvPr id="6" name="TextBox 5"/>
+          <p:cNvSpPr txBox="1"/>
+          <p:nvPr/>
+        </p:nvSpPr>
+        <p:spPr>
+          <a:xfrm>
+            <a:off x="731520" y="1280160"/>
+            <a:ext cx="6858000" cy="4937760"/>
+          </a:xfrm>
+          <a:prstGeom prst="rect">
+            <a:avLst/>
+          </a:prstGeom>
+          <a:noFill/>
+        </p:spPr>
+        <p:txBody>
+          <a:bodyPr wrap="square">
+            <a:spAutoFit/>
+          </a:bodyPr>
+          <a:lstStyle/>
+          <a:p>
+            <a:pPr>
+              <a:spcAft>
+                <a:spcPts val="200"/>
+              </a:spcAft>
+              <a:defRPr b="1" sz="1500">
+                <a:solidFill>
+                  <a:srgbClr val="0F1E4A"/>
+                </a:solidFill>
+              </a:defRPr>
+            </a:pPr>
+            <a:r>
+              <a:t>• Bipolar AMI (Alternate Mark Inversion)</a:t>
+            </a:r>
+          </a:p>
+          <a:p>
+            <a:pPr>
+              <a:spcAft>
+                <a:spcPts val="800"/>
+              </a:spcAft>
+              <a:defRPr sz="1300">
+                <a:solidFill>
+                  <a:srgbClr val="1E293B"/>
+                </a:solidFill>
+              </a:defRPr>
+            </a:pPr>
+            <a:r>
+              <a:t>   Bit 0 = Zero volts ($0\text{V}$). Bit 1 = Alternating positive ($+V$) and negative ($-V$) voltages. Eliminates DC component entirely; provides basic error detection (violating polarity rule = error).</a:t>
+            </a:r>
+          </a:p>
+          <a:p>
+            <a:pPr>
+              <a:spcAft>
+                <a:spcPts val="200"/>
+              </a:spcAft>
+              <a:defRPr b="1" sz="1500">
+                <a:solidFill>
+                  <a:srgbClr val="0F1E4A"/>
+                </a:solidFill>
+              </a:defRPr>
+            </a:pPr>
+            <a:r>
+              <a:t>• Loss of Sync on Zeros</a:t>
+            </a:r>
+          </a:p>
+          <a:p>
+            <a:pPr>
+              <a:spcAft>
+                <a:spcPts val="800"/>
+              </a:spcAft>
+              <a:defRPr sz="1300">
+                <a:solidFill>
+                  <a:srgbClr val="1E293B"/>
+                </a:solidFill>
+              </a:defRPr>
+            </a:pPr>
+            <a:r>
+              <a:t>   Long strings of consecutive 0s produce continuous $0\text{V}$, causing receiver clock drift.</a:t>
+            </a:r>
+          </a:p>
+          <a:p>
+            <a:pPr>
+              <a:spcAft>
+                <a:spcPts val="200"/>
+              </a:spcAft>
+              <a:defRPr b="1" sz="1500">
+                <a:solidFill>
+                  <a:srgbClr val="0F1E4A"/>
+                </a:solidFill>
+              </a:defRPr>
+            </a:pPr>
+            <a:r>
+              <a:t>• Scrambling (B8ZS &amp; HDB3)</a:t>
+            </a:r>
+          </a:p>
+          <a:p>
+            <a:pPr>
+              <a:spcAft>
+                <a:spcPts val="800"/>
+              </a:spcAft>
+              <a:defRPr sz="1300">
+                <a:solidFill>
+                  <a:srgbClr val="1E293B"/>
+                </a:solidFill>
+              </a:defRPr>
+            </a:pPr>
+            <a:r>
+              <a:t>   B8ZS (North America T1): Replaces eight consecutive 0s with `000VB0VB` (where V=Bipolar Violation, B=Bipolar Rule). HDB3 (Europe E1): Replaces four consecutive 0s with `000V` or `B00V`.</a:t>
+            </a:r>
+          </a:p>
+          <a:p>
+            <a:pPr>
+              <a:spcAft>
+                <a:spcPts val="200"/>
+              </a:spcAft>
+              <a:defRPr b="1" sz="1500">
+                <a:solidFill>
+                  <a:srgbClr val="0F1E4A"/>
+                </a:solidFill>
+              </a:defRPr>
+            </a:pPr>
+            <a:r>
+              <a:t>• Block Coding (4B/5B &amp; 8B/10B)</a:t>
+            </a:r>
+          </a:p>
+          <a:p>
+            <a:pPr>
+              <a:spcAft>
+                <a:spcPts val="800"/>
+              </a:spcAft>
+              <a:defRPr sz="1300">
+                <a:solidFill>
+                  <a:srgbClr val="1E293B"/>
+                </a:solidFill>
+              </a:defRPr>
+            </a:pPr>
+            <a:r>
+              <a:t>   Converts 4-bit data nibbles into 5-bit codewords ensuring no more than three consecutive 0s ever occur, which are then transmitted using NRZ-I (Used in 100BASE-TX Fast Ethernet).</a:t>
+            </a:r>
+          </a:p>
+        </p:txBody>
+      </p:sp>
+      <p:sp>
+        <p:nvSpPr>
+          <p:cNvPr id="7" name="Rounded Rectangle 6"/>
+          <p:cNvSpPr/>
+          <p:nvPr/>
+        </p:nvSpPr>
+        <p:spPr>
+          <a:xfrm>
+            <a:off x="7955279" y="1280160"/>
+            <a:ext cx="3566160" cy="4846320"/>
+          </a:xfrm>
+          <a:prstGeom prst="roundRect">
+            <a:avLst/>
+          </a:prstGeom>
+          <a:solidFill>
+            <a:srgbClr val="F1F5F9"/>
+          </a:solidFill>
+          <a:ln w="19050">
+            <a:solidFill>
+              <a:srgbClr val="0E7490"/>
+            </a:solidFill>
+          </a:ln>
+        </p:spPr>
+        <p:style>
+          <a:lnRef idx="1">
+            <a:schemeClr val="accent1"/>
+          </a:lnRef>
+          <a:fillRef idx="3">
+            <a:schemeClr val="accent1"/>
+          </a:fillRef>
+          <a:effectRef idx="2">
+            <a:schemeClr val="accent1"/>
+          </a:effectRef>
+          <a:fontRef idx="minor">
+            <a:schemeClr val="lt1"/>
+          </a:fontRef>
+        </p:style>
+        <p:txBody>
+          <a:bodyPr rtlCol="0" anchor="ctr"/>
+          <a:lstStyle/>
+          <a:p>
+            <a:pPr algn="ctr"/>
+          </a:p>
+        </p:txBody>
+      </p:sp>
+      <p:sp>
+        <p:nvSpPr>
+          <p:cNvPr id="8" name="TextBox 7"/>
+          <p:cNvSpPr txBox="1"/>
+          <p:nvPr/>
+        </p:nvSpPr>
+        <p:spPr>
+          <a:xfrm>
+            <a:off x="8138160" y="1417320"/>
+            <a:ext cx="3200400" cy="4572000"/>
+          </a:xfrm>
+          <a:prstGeom prst="rect">
+            <a:avLst/>
+          </a:prstGeom>
+          <a:noFill/>
+        </p:spPr>
+        <p:txBody>
+          <a:bodyPr wrap="square">
+            <a:spAutoFit/>
+          </a:bodyPr>
+          <a:lstStyle/>
+          <a:p>
+            <a:pPr>
+              <a:spcAft>
+                <a:spcPts val="1000"/>
+              </a:spcAft>
+              <a:defRPr b="1" sz="1500">
+                <a:solidFill>
+                  <a:srgbClr val="0E7490"/>
+                </a:solidFill>
+              </a:defRPr>
+            </a:pPr>
+            <a:r>
+              <a:t>Line Coding Summary</a:t>
+            </a:r>
+          </a:p>
+          <a:p>
+            <a:pPr>
+              <a:spcAft>
+                <a:spcPts val="600"/>
+              </a:spcAft>
+              <a:defRPr sz="1200">
+                <a:solidFill>
+                  <a:srgbClr val="1E293B"/>
+                </a:solidFill>
+              </a:defRPr>
+            </a:pPr>
+            <a:r>
+              <a:t>→ NRZ: Simple, DC bias issue</a:t>
+            </a:r>
+          </a:p>
+          <a:p>
+            <a:pPr>
+              <a:spcAft>
+                <a:spcPts val="600"/>
+              </a:spcAft>
+              <a:defRPr sz="1200">
+                <a:solidFill>
+                  <a:srgbClr val="1E293B"/>
+                </a:solidFill>
+              </a:defRPr>
+            </a:pPr>
+            <a:r>
+              <a:t>→ Manchester: 802.3, self-clocking</a:t>
+            </a:r>
+          </a:p>
+          <a:p>
+            <a:pPr>
+              <a:spcAft>
+                <a:spcPts val="600"/>
+              </a:spcAft>
+              <a:defRPr sz="1200">
+                <a:solidFill>
+                  <a:srgbClr val="1E293B"/>
+                </a:solidFill>
+              </a:defRPr>
+            </a:pPr>
+            <a:r>
+              <a:t>→ AMI: Alternates +V/-V on 1s</a:t>
+            </a:r>
+          </a:p>
+          <a:p>
+            <a:pPr>
+              <a:spcAft>
+                <a:spcPts val="600"/>
+              </a:spcAft>
+              <a:defRPr sz="1200">
+                <a:solidFill>
+                  <a:srgbClr val="1E293B"/>
+                </a:solidFill>
+              </a:defRPr>
+            </a:pPr>
+            <a:r>
+              <a:t>→ B8ZS/HDB3: Scrambles long 0s</a:t>
+            </a:r>
+          </a:p>
+          <a:p>
+            <a:pPr>
+              <a:spcAft>
+                <a:spcPts val="600"/>
+              </a:spcAft>
+              <a:defRPr sz="1200">
+                <a:solidFill>
+                  <a:srgbClr val="1E293B"/>
+                </a:solidFill>
+              </a:defRPr>
+            </a:pPr>
+            <a:r>
+              <a:t>→ 4B/5B: Guarantees clock sync</a:t>
+            </a:r>
+          </a:p>
+        </p:txBody>
+      </p:sp>
+      <p:sp>
+        <p:nvSpPr>
+          <p:cNvPr id="9" name="TextBox 8"/>
+          <p:cNvSpPr txBox="1"/>
+          <p:nvPr/>
+        </p:nvSpPr>
+        <p:spPr>
+          <a:xfrm>
+            <a:off x="731520" y="6309360"/>
+            <a:ext cx="10789920" cy="365760"/>
+          </a:xfrm>
+          <a:prstGeom prst="rect">
+            <a:avLst/>
+          </a:prstGeom>
+          <a:noFill/>
+        </p:spPr>
+        <p:txBody>
+          <a:bodyPr wrap="none">
+            <a:spAutoFit/>
+          </a:bodyPr>
+          <a:lstStyle/>
+          <a:p>
+            <a:pPr>
+              <a:defRPr sz="950">
+                <a:solidFill>
+                  <a:srgbClr val="64748B"/>
+                </a:solidFill>
+              </a:defRPr>
+            </a:pPr>
+            <a:r>
+              <a:t>PCCST501 Computer Networks | KTU 2024 Scheme | Prof. Anju Markose | Assistant Professor, Dept. of CSE | VJCET</a:t>
+            </a:r>
+          </a:p>
+        </p:txBody>
+      </p:sp>
+    </p:spTree>
+  </p:cSld>
+  <p:clrMapOvr>
+    <a:masterClrMapping/>
+  </p:clrMapOvr>
+</p:sld>
+</file>
+
+<file path=ppt/slides/slide15.xml><?xml version="1.0" encoding="utf-8"?>
+<p:sld xmlns:a="http://schemas.openxmlformats.org/drawingml/2006/main" xmlns:p="http://schemas.openxmlformats.org/presentationml/2006/main" xmlns:r="http://schemas.openxmlformats.org/officeDocument/2006/relationships">
+  <p:cSld>
+    <p:spTree>
+      <p:nvGrpSpPr>
+        <p:cNvPr id="1" name=""/>
+        <p:cNvGrpSpPr/>
+        <p:nvPr/>
+      </p:nvGrpSpPr>
+      <p:grpSpPr/>
+      <p:sp>
+        <p:nvSpPr>
+          <p:cNvPr id="2" name="Rectangle 1"/>
+          <p:cNvSpPr/>
+          <p:nvPr/>
+        </p:nvSpPr>
+        <p:spPr>
+          <a:xfrm>
+            <a:off x="0" y="0"/>
+            <a:ext cx="12191695" cy="6858000"/>
+          </a:xfrm>
+          <a:prstGeom prst="rect">
+            <a:avLst/>
+          </a:prstGeom>
+          <a:solidFill>
+            <a:srgbClr val="0F172A"/>
+          </a:solidFill>
+          <a:ln>
+            <a:noFill/>
+          </a:ln>
+        </p:spPr>
+        <p:style>
+          <a:lnRef idx="1">
+            <a:schemeClr val="accent1"/>
+          </a:lnRef>
+          <a:fillRef idx="3">
+            <a:schemeClr val="accent1"/>
+          </a:fillRef>
+          <a:effectRef idx="2">
+            <a:schemeClr val="accent1"/>
+          </a:effectRef>
+          <a:fontRef idx="minor">
+            <a:schemeClr val="lt1"/>
+          </a:fontRef>
+        </p:style>
+        <p:txBody>
+          <a:bodyPr rtlCol="0" anchor="ctr"/>
+          <a:lstStyle/>
+          <a:p>
+            <a:pPr algn="ctr"/>
+          </a:p>
+        </p:txBody>
+      </p:sp>
+      <p:sp>
+        <p:nvSpPr>
+          <p:cNvPr id="3" name="Rectangle 2"/>
+          <p:cNvSpPr/>
+          <p:nvPr/>
+        </p:nvSpPr>
+        <p:spPr>
+          <a:xfrm>
+            <a:off x="822960" y="1188720"/>
+            <a:ext cx="164592" cy="4480560"/>
+          </a:xfrm>
+          <a:prstGeom prst="rect">
+            <a:avLst/>
+          </a:prstGeom>
+          <a:solidFill>
+            <a:srgbClr val="D97706"/>
+          </a:solidFill>
+          <a:ln>
+            <a:noFill/>
+          </a:ln>
+        </p:spPr>
+        <p:style>
+          <a:lnRef idx="1">
+            <a:schemeClr val="accent1"/>
+          </a:lnRef>
+          <a:fillRef idx="3">
+            <a:schemeClr val="accent1"/>
+          </a:fillRef>
+          <a:effectRef idx="2">
+            <a:schemeClr val="accent1"/>
+          </a:effectRef>
+          <a:fontRef idx="minor">
+            <a:schemeClr val="lt1"/>
+          </a:fontRef>
+        </p:style>
+        <p:txBody>
+          <a:bodyPr rtlCol="0" anchor="ctr"/>
+          <a:lstStyle/>
+          <a:p>
+            <a:pPr algn="ctr"/>
+          </a:p>
+        </p:txBody>
+      </p:sp>
+      <p:sp>
+        <p:nvSpPr>
+          <p:cNvPr id="4" name="TextBox 3"/>
+          <p:cNvSpPr txBox="1"/>
+          <p:nvPr/>
+        </p:nvSpPr>
+        <p:spPr>
+          <a:xfrm>
+            <a:off x="1280160" y="1097280"/>
+            <a:ext cx="10058400" cy="4663440"/>
+          </a:xfrm>
+          <a:prstGeom prst="rect">
+            <a:avLst/>
+          </a:prstGeom>
+          <a:noFill/>
+        </p:spPr>
+        <p:txBody>
+          <a:bodyPr wrap="square">
+            <a:spAutoFit/>
+          </a:bodyPr>
+          <a:lstStyle/>
+          <a:p>
+            <a:pPr>
+              <a:spcAft>
+                <a:spcPts val="1200"/>
+              </a:spcAft>
+              <a:defRPr b="1" sz="1300">
+                <a:solidFill>
+                  <a:srgbClr val="D97706"/>
+                </a:solidFill>
+              </a:defRPr>
+            </a:pPr>
+            <a:r>
+              <a:t>PCCST501 Computer Networks | KTU 2024 Scheme • MODULE 4 • M4.5</a:t>
+            </a:r>
+          </a:p>
+          <a:p>
+            <a:pPr>
+              <a:spcAft>
+                <a:spcPts val="1400"/>
+              </a:spcAft>
+              <a:defRPr b="1" sz="3200">
+                <a:solidFill>
+                  <a:srgbClr val="F8FAFC"/>
+                </a:solidFill>
+              </a:defRPr>
+            </a:pPr>
+            <a:r>
+              <a:t>Analog Transmission &amp; Bandwidth Utilization</a:t>
+            </a:r>
+          </a:p>
+          <a:p>
+            <a:pPr>
+              <a:spcAft>
+                <a:spcPts val="2800"/>
+              </a:spcAft>
+              <a:defRPr sz="1700">
+                <a:solidFill>
+                  <a:srgbClr val="94A3B8"/>
+                </a:solidFill>
+              </a:defRPr>
+            </a:pPr>
+            <a:r>
+              <a:t>Digital-to-Analog Modulation (ASK, FSK, PSK, QAM), Multiplexing Techniques: FDM, WDM, Synchronous TDM &amp; Statistical TDM</a:t>
+            </a:r>
+          </a:p>
+          <a:p>
+            <a:pPr>
+              <a:defRPr b="1" sz="1300">
+                <a:solidFill>
+                  <a:srgbClr val="E2E8F0"/>
+                </a:solidFill>
+              </a:defRPr>
+            </a:pPr>
+            <a:r>
+              <a:t>Prepared by: Prof. Anju Markose | Assistant Professor, Dept. of CSE | VJCET</a:t>
+            </a:r>
+          </a:p>
+          <a:p>
+            <a:pPr>
+              <a:defRPr sz="1100">
+                <a:solidFill>
+                  <a:srgbClr val="94A3B8"/>
+                </a:solidFill>
+              </a:defRPr>
+            </a:pPr>
+            <a:r>
+              <a:t>Viswajyothi College of Engineering and Technology (VJCET), Vazhakulam</a:t>
+            </a:r>
+          </a:p>
+        </p:txBody>
+      </p:sp>
+    </p:spTree>
+  </p:cSld>
+  <p:clrMapOvr>
+    <a:masterClrMapping/>
+  </p:clrMapOvr>
+</p:sld>
+</file>
+
+<file path=ppt/slides/slide16.xml><?xml version="1.0" encoding="utf-8"?>
+<p:sld xmlns:a="http://schemas.openxmlformats.org/drawingml/2006/main" xmlns:p="http://schemas.openxmlformats.org/presentationml/2006/main" xmlns:r="http://schemas.openxmlformats.org/officeDocument/2006/relationships">
+  <p:cSld>
+    <p:spTree>
+      <p:nvGrpSpPr>
+        <p:cNvPr id="1" name=""/>
+        <p:cNvGrpSpPr/>
+        <p:nvPr/>
+      </p:nvGrpSpPr>
+      <p:grpSpPr/>
+      <p:sp>
+        <p:nvSpPr>
+          <p:cNvPr id="2" name="Rectangle 1"/>
+          <p:cNvSpPr/>
+          <p:nvPr/>
+        </p:nvSpPr>
+        <p:spPr>
+          <a:xfrm>
+            <a:off x="0" y="0"/>
+            <a:ext cx="12191695" cy="1005840"/>
+          </a:xfrm>
+          <a:prstGeom prst="rect">
+            <a:avLst/>
+          </a:prstGeom>
+          <a:solidFill>
+            <a:srgbClr val="0F1E4A"/>
+          </a:solidFill>
+          <a:ln>
+            <a:noFill/>
+          </a:ln>
+        </p:spPr>
+        <p:style>
+          <a:lnRef idx="1">
+            <a:schemeClr val="accent1"/>
+          </a:lnRef>
+          <a:fillRef idx="3">
+            <a:schemeClr val="accent1"/>
+          </a:fillRef>
+          <a:effectRef idx="2">
+            <a:schemeClr val="accent1"/>
+          </a:effectRef>
+          <a:fontRef idx="minor">
+            <a:schemeClr val="lt1"/>
+          </a:fontRef>
+        </p:style>
+        <p:txBody>
+          <a:bodyPr rtlCol="0" anchor="ctr"/>
+          <a:lstStyle/>
+          <a:p>
+            <a:pPr algn="ctr"/>
+          </a:p>
+        </p:txBody>
+      </p:sp>
+      <p:sp>
+        <p:nvSpPr>
+          <p:cNvPr id="3" name="Rectangle 2"/>
+          <p:cNvSpPr/>
+          <p:nvPr/>
+        </p:nvSpPr>
+        <p:spPr>
+          <a:xfrm>
+            <a:off x="0" y="969264"/>
+            <a:ext cx="12191695" cy="36576"/>
+          </a:xfrm>
+          <a:prstGeom prst="rect">
+            <a:avLst/>
+          </a:prstGeom>
+          <a:solidFill>
+            <a:srgbClr val="D97706"/>
+          </a:solidFill>
+          <a:ln>
+            <a:noFill/>
+          </a:ln>
+        </p:spPr>
+        <p:style>
+          <a:lnRef idx="1">
+            <a:schemeClr val="accent1"/>
+          </a:lnRef>
+          <a:fillRef idx="3">
+            <a:schemeClr val="accent1"/>
+          </a:fillRef>
+          <a:effectRef idx="2">
+            <a:schemeClr val="accent1"/>
+          </a:effectRef>
+          <a:fontRef idx="minor">
+            <a:schemeClr val="lt1"/>
+          </a:fontRef>
+        </p:style>
+        <p:txBody>
+          <a:bodyPr rtlCol="0" anchor="ctr"/>
+          <a:lstStyle/>
+          <a:p>
+            <a:pPr algn="ctr"/>
+          </a:p>
+        </p:txBody>
+      </p:sp>
+      <p:sp>
+        <p:nvSpPr>
+          <p:cNvPr id="4" name="TextBox 3"/>
+          <p:cNvSpPr txBox="1"/>
+          <p:nvPr/>
+        </p:nvSpPr>
+        <p:spPr>
+          <a:xfrm>
+            <a:off x="731520" y="164592"/>
+            <a:ext cx="8412480" cy="685800"/>
+          </a:xfrm>
+          <a:prstGeom prst="rect">
+            <a:avLst/>
+          </a:prstGeom>
+          <a:noFill/>
+        </p:spPr>
+        <p:txBody>
+          <a:bodyPr wrap="none">
+            <a:spAutoFit/>
+          </a:bodyPr>
+          <a:lstStyle/>
+          <a:p>
+            <a:pPr>
+              <a:defRPr b="1" sz="2300">
+                <a:solidFill>
+                  <a:srgbClr val="F8FAFC"/>
+                </a:solidFill>
+              </a:defRPr>
+            </a:pPr>
+            <a:r>
+              <a:t>4.5.1 Digital-to-Analog Modulation Techniques</a:t>
+            </a:r>
+          </a:p>
+        </p:txBody>
+      </p:sp>
+      <p:sp>
+        <p:nvSpPr>
+          <p:cNvPr id="5" name="TextBox 4"/>
+          <p:cNvSpPr txBox="1"/>
+          <p:nvPr/>
+        </p:nvSpPr>
+        <p:spPr>
+          <a:xfrm>
+            <a:off x="8229600" y="164592"/>
+            <a:ext cx="3291840" cy="685800"/>
+          </a:xfrm>
+          <a:prstGeom prst="rect">
+            <a:avLst/>
+          </a:prstGeom>
+          <a:noFill/>
+        </p:spPr>
+        <p:txBody>
+          <a:bodyPr wrap="none">
+            <a:spAutoFit/>
+          </a:bodyPr>
+          <a:lstStyle/>
+          <a:p>
+            <a:pPr algn="r">
+              <a:defRPr b="1" sz="1300">
+                <a:solidFill>
+                  <a:srgbClr val="D97706"/>
+                </a:solidFill>
+              </a:defRPr>
+            </a:pPr>
+            <a:r>
+              <a:t>M4.5 MODULATION METHODS</a:t>
+            </a:r>
+          </a:p>
+        </p:txBody>
+      </p:sp>
+      <p:sp>
+        <p:nvSpPr>
+          <p:cNvPr id="6" name="Rounded Rectangle 5"/>
+          <p:cNvSpPr/>
+          <p:nvPr/>
+        </p:nvSpPr>
+        <p:spPr>
+          <a:xfrm>
+            <a:off x="731520" y="1280160"/>
+            <a:ext cx="5212080" cy="4846320"/>
+          </a:xfrm>
+          <a:prstGeom prst="roundRect">
+            <a:avLst/>
+          </a:prstGeom>
+          <a:solidFill>
+            <a:srgbClr val="F1F5F9"/>
+          </a:solidFill>
+          <a:ln w="19050">
+            <a:solidFill>
+              <a:srgbClr val="0E7490"/>
+            </a:solidFill>
+          </a:ln>
+        </p:spPr>
+        <p:style>
+          <a:lnRef idx="1">
+            <a:schemeClr val="accent1"/>
+          </a:lnRef>
+          <a:fillRef idx="3">
+            <a:schemeClr val="accent1"/>
+          </a:fillRef>
+          <a:effectRef idx="2">
+            <a:schemeClr val="accent1"/>
+          </a:effectRef>
+          <a:fontRef idx="minor">
+            <a:schemeClr val="lt1"/>
+          </a:fontRef>
+        </p:style>
+        <p:txBody>
+          <a:bodyPr rtlCol="0" anchor="ctr"/>
+          <a:lstStyle/>
+          <a:p>
+            <a:pPr algn="ctr"/>
+          </a:p>
+        </p:txBody>
+      </p:sp>
+      <p:sp>
+        <p:nvSpPr>
+          <p:cNvPr id="7" name="TextBox 6"/>
+          <p:cNvSpPr txBox="1"/>
+          <p:nvPr/>
+        </p:nvSpPr>
+        <p:spPr>
+          <a:xfrm>
+            <a:off x="914400" y="1417320"/>
+            <a:ext cx="4846320" cy="4572000"/>
+          </a:xfrm>
+          <a:prstGeom prst="rect">
+            <a:avLst/>
+          </a:prstGeom>
+          <a:noFill/>
+        </p:spPr>
+        <p:txBody>
+          <a:bodyPr wrap="square">
+            <a:spAutoFit/>
+          </a:bodyPr>
+          <a:lstStyle/>
+          <a:p>
+            <a:pPr>
+              <a:spcAft>
+                <a:spcPts val="1200"/>
+              </a:spcAft>
+              <a:defRPr b="1" sz="1600">
+                <a:solidFill>
+                  <a:srgbClr val="0F1E4A"/>
+                </a:solidFill>
+              </a:defRPr>
+            </a:pPr>
+            <a:r>
+              <a:t>Basic Shift Keying (ASK, FSK, PSK)</a:t>
+            </a:r>
+          </a:p>
+          <a:p>
+            <a:pPr>
+              <a:spcAft>
+                <a:spcPts val="600"/>
+              </a:spcAft>
+              <a:defRPr sz="1250">
+                <a:solidFill>
+                  <a:srgbClr val="1E293B"/>
+                </a:solidFill>
+              </a:defRPr>
+            </a:pPr>
+            <a:r>
+              <a:t>• ASK (Amplitude Shift Keying): Varies carrier amplitude: Bit 1 = High amplitude $A_1$; Bit 0 = Low amplitude $A_2$ (or 0 in OOK). Susceptible to noise</a:t>
+            </a:r>
+          </a:p>
+          <a:p>
+            <a:pPr>
+              <a:spcAft>
+                <a:spcPts val="600"/>
+              </a:spcAft>
+              <a:defRPr sz="1250">
+                <a:solidFill>
+                  <a:srgbClr val="1E293B"/>
+                </a:solidFill>
+              </a:defRPr>
+            </a:pPr>
+            <a:r>
+              <a:t>• FSK (Frequency Shift Keying): Varies carrier frequency: Bit 1 = Frequency $f_1$; Bit 0 = Frequency $f_2$</a:t>
+            </a:r>
+          </a:p>
+          <a:p>
+            <a:pPr>
+              <a:spcAft>
+                <a:spcPts val="600"/>
+              </a:spcAft>
+              <a:defRPr sz="1250">
+                <a:solidFill>
+                  <a:srgbClr val="1E293B"/>
+                </a:solidFill>
+              </a:defRPr>
+            </a:pPr>
+            <a:r>
+              <a:t>• BPSK (Binary Phase Shift Keying): Varies carrier phase: Bit 0 = $0^\circ$ phase; Bit 1 = $180^\circ$ phase. Highly robust against noise</a:t>
+            </a:r>
+          </a:p>
+          <a:p>
+            <a:pPr>
+              <a:spcAft>
+                <a:spcPts val="600"/>
+              </a:spcAft>
+              <a:defRPr sz="1250">
+                <a:solidFill>
+                  <a:srgbClr val="1E293B"/>
+                </a:solidFill>
+              </a:defRPr>
+            </a:pPr>
+            <a:r>
+              <a:t>• QPSK (Quadrature PSK): Uses 4 phase angles ($45^\circ, 135^\circ, 225^\circ, 315^\circ$) to transmit 2 bits per signal baud</a:t>
+            </a:r>
+          </a:p>
+        </p:txBody>
+      </p:sp>
+      <p:sp>
+        <p:nvSpPr>
+          <p:cNvPr id="8" name="Rounded Rectangle 7"/>
+          <p:cNvSpPr/>
+          <p:nvPr/>
+        </p:nvSpPr>
+        <p:spPr>
+          <a:xfrm>
+            <a:off x="6309360" y="1280160"/>
+            <a:ext cx="5212080" cy="4846320"/>
+          </a:xfrm>
+          <a:prstGeom prst="roundRect">
+            <a:avLst/>
+          </a:prstGeom>
+          <a:solidFill>
+            <a:srgbClr val="EEF2FF"/>
+          </a:solidFill>
+          <a:ln w="19050">
+            <a:solidFill>
+              <a:srgbClr val="0F1E4A"/>
+            </a:solidFill>
+          </a:ln>
+        </p:spPr>
+        <p:style>
+          <a:lnRef idx="1">
+            <a:schemeClr val="accent1"/>
+          </a:lnRef>
+          <a:fillRef idx="3">
+            <a:schemeClr val="accent1"/>
+          </a:fillRef>
+          <a:effectRef idx="2">
+            <a:schemeClr val="accent1"/>
+          </a:effectRef>
+          <a:fontRef idx="minor">
+            <a:schemeClr val="lt1"/>
+          </a:fontRef>
+        </p:style>
+        <p:txBody>
+          <a:bodyPr rtlCol="0" anchor="ctr"/>
+          <a:lstStyle/>
+          <a:p>
+            <a:pPr algn="ctr"/>
+          </a:p>
+        </p:txBody>
+      </p:sp>
+      <p:sp>
+        <p:nvSpPr>
+          <p:cNvPr id="9" name="TextBox 8"/>
+          <p:cNvSpPr txBox="1"/>
+          <p:nvPr/>
+        </p:nvSpPr>
+        <p:spPr>
+          <a:xfrm>
+            <a:off x="6492240" y="1417320"/>
+            <a:ext cx="4846320" cy="4572000"/>
+          </a:xfrm>
+          <a:prstGeom prst="rect">
+            <a:avLst/>
+          </a:prstGeom>
+          <a:noFill/>
+        </p:spPr>
+        <p:txBody>
+          <a:bodyPr wrap="square">
+            <a:spAutoFit/>
+          </a:bodyPr>
+          <a:lstStyle/>
+          <a:p>
+            <a:pPr>
+              <a:spcAft>
+                <a:spcPts val="1200"/>
+              </a:spcAft>
+              <a:defRPr b="1" sz="1600">
+                <a:solidFill>
+                  <a:srgbClr val="0E7490"/>
+                </a:solidFill>
+              </a:defRPr>
+            </a:pPr>
+            <a:r>
+              <a:t>QAM (Quadrature Amplitude Modulation)</a:t>
+            </a:r>
+          </a:p>
+          <a:p>
+            <a:pPr>
+              <a:spcAft>
+                <a:spcPts val="600"/>
+              </a:spcAft>
+              <a:defRPr sz="1250">
+                <a:solidFill>
+                  <a:srgbClr val="1E293B"/>
+                </a:solidFill>
+              </a:defRPr>
+            </a:pPr>
+            <a:r>
+              <a:t>• Concept: Combines Amplitude Shift Keying and Phase Shift Keying to pack multiple bits per baud</a:t>
+            </a:r>
+          </a:p>
+          <a:p>
+            <a:pPr>
+              <a:spcAft>
+                <a:spcPts val="600"/>
+              </a:spcAft>
+              <a:defRPr sz="1250">
+                <a:solidFill>
+                  <a:srgbClr val="1E293B"/>
+                </a:solidFill>
+              </a:defRPr>
+            </a:pPr>
+            <a:r>
+              <a:t>• 16-QAM: 16 constellation points $\implies 4 \text{ bits per baud}$ ($2^4 = 16$)</a:t>
+            </a:r>
+          </a:p>
+          <a:p>
+            <a:pPr>
+              <a:spcAft>
+                <a:spcPts val="600"/>
+              </a:spcAft>
+              <a:defRPr sz="1250">
+                <a:solidFill>
+                  <a:srgbClr val="1E293B"/>
+                </a:solidFill>
+              </a:defRPr>
+            </a:pPr>
+            <a:r>
+              <a:t>• 64-QAM / 256-QAM: 64 points (6 bits/baud) / 256 points (8 bits/baud); used in modern 4G/5G, Wi-Fi 6, and cable modems</a:t>
+            </a:r>
+          </a:p>
+          <a:p>
+            <a:pPr>
+              <a:spcAft>
+                <a:spcPts val="600"/>
+              </a:spcAft>
+              <a:defRPr sz="1250">
+                <a:solidFill>
+                  <a:srgbClr val="1E293B"/>
+                </a:solidFill>
+              </a:defRPr>
+            </a:pPr>
+            <a:r>
+              <a:t>• Bandwidth Efficiency: Achieves massive bit rates over narrow RF channels</a:t>
+            </a:r>
+          </a:p>
+        </p:txBody>
+      </p:sp>
+      <p:sp>
+        <p:nvSpPr>
+          <p:cNvPr id="10" name="TextBox 9"/>
+          <p:cNvSpPr txBox="1"/>
+          <p:nvPr/>
+        </p:nvSpPr>
+        <p:spPr>
+          <a:xfrm>
+            <a:off x="731520" y="6309360"/>
+            <a:ext cx="10789920" cy="365760"/>
+          </a:xfrm>
+          <a:prstGeom prst="rect">
+            <a:avLst/>
+          </a:prstGeom>
+          <a:noFill/>
+        </p:spPr>
+        <p:txBody>
+          <a:bodyPr wrap="none">
+            <a:spAutoFit/>
+          </a:bodyPr>
+          <a:lstStyle/>
+          <a:p>
+            <a:pPr>
+              <a:defRPr sz="950">
+                <a:solidFill>
+                  <a:srgbClr val="64748B"/>
+                </a:solidFill>
+              </a:defRPr>
+            </a:pPr>
+            <a:r>
+              <a:t>PCCST501 Computer Networks | KTU 2024 Scheme | Prof. Anju Markose | Assistant Professor, Dept. of CSE | VJCET</a:t>
+            </a:r>
+          </a:p>
+        </p:txBody>
+      </p:sp>
+    </p:spTree>
+  </p:cSld>
+  <p:clrMapOvr>
+    <a:masterClrMapping/>
+  </p:clrMapOvr>
+</p:sld>
+</file>
+
+<file path=ppt/slides/slide17.xml><?xml version="1.0" encoding="utf-8"?>
+<p:sld xmlns:a="http://schemas.openxmlformats.org/drawingml/2006/main" xmlns:p="http://schemas.openxmlformats.org/presentationml/2006/main" xmlns:r="http://schemas.openxmlformats.org/officeDocument/2006/relationships">
+  <p:cSld>
+    <p:spTree>
+      <p:nvGrpSpPr>
+        <p:cNvPr id="1" name=""/>
+        <p:cNvGrpSpPr/>
+        <p:nvPr/>
+      </p:nvGrpSpPr>
+      <p:grpSpPr/>
+      <p:sp>
+        <p:nvSpPr>
+          <p:cNvPr id="2" name="Rectangle 1"/>
+          <p:cNvSpPr/>
+          <p:nvPr/>
+        </p:nvSpPr>
+        <p:spPr>
+          <a:xfrm>
+            <a:off x="0" y="0"/>
+            <a:ext cx="12191695" cy="1005840"/>
+          </a:xfrm>
+          <a:prstGeom prst="rect">
+            <a:avLst/>
+          </a:prstGeom>
+          <a:solidFill>
+            <a:srgbClr val="0F1E4A"/>
+          </a:solidFill>
+          <a:ln>
+            <a:noFill/>
+          </a:ln>
+        </p:spPr>
+        <p:style>
+          <a:lnRef idx="1">
+            <a:schemeClr val="accent1"/>
+          </a:lnRef>
+          <a:fillRef idx="3">
+            <a:schemeClr val="accent1"/>
+          </a:fillRef>
+          <a:effectRef idx="2">
+            <a:schemeClr val="accent1"/>
+          </a:effectRef>
+          <a:fontRef idx="minor">
+            <a:schemeClr val="lt1"/>
+          </a:fontRef>
+        </p:style>
+        <p:txBody>
+          <a:bodyPr rtlCol="0" anchor="ctr"/>
+          <a:lstStyle/>
+          <a:p>
+            <a:pPr algn="ctr"/>
+          </a:p>
+        </p:txBody>
+      </p:sp>
+      <p:sp>
+        <p:nvSpPr>
+          <p:cNvPr id="3" name="Rectangle 2"/>
+          <p:cNvSpPr/>
+          <p:nvPr/>
+        </p:nvSpPr>
+        <p:spPr>
+          <a:xfrm>
+            <a:off x="0" y="969264"/>
+            <a:ext cx="12191695" cy="36576"/>
+          </a:xfrm>
+          <a:prstGeom prst="rect">
+            <a:avLst/>
+          </a:prstGeom>
+          <a:solidFill>
+            <a:srgbClr val="D97706"/>
+          </a:solidFill>
+          <a:ln>
+            <a:noFill/>
+          </a:ln>
+        </p:spPr>
+        <p:style>
+          <a:lnRef idx="1">
+            <a:schemeClr val="accent1"/>
+          </a:lnRef>
+          <a:fillRef idx="3">
+            <a:schemeClr val="accent1"/>
+          </a:fillRef>
+          <a:effectRef idx="2">
+            <a:schemeClr val="accent1"/>
+          </a:effectRef>
+          <a:fontRef idx="minor">
+            <a:schemeClr val="lt1"/>
+          </a:fontRef>
+        </p:style>
+        <p:txBody>
+          <a:bodyPr rtlCol="0" anchor="ctr"/>
+          <a:lstStyle/>
+          <a:p>
+            <a:pPr algn="ctr"/>
+          </a:p>
+        </p:txBody>
+      </p:sp>
+      <p:sp>
+        <p:nvSpPr>
+          <p:cNvPr id="4" name="TextBox 3"/>
+          <p:cNvSpPr txBox="1"/>
+          <p:nvPr/>
+        </p:nvSpPr>
+        <p:spPr>
+          <a:xfrm>
+            <a:off x="731520" y="164592"/>
+            <a:ext cx="8412480" cy="685800"/>
+          </a:xfrm>
+          <a:prstGeom prst="rect">
+            <a:avLst/>
+          </a:prstGeom>
+          <a:noFill/>
+        </p:spPr>
+        <p:txBody>
+          <a:bodyPr wrap="none">
+            <a:spAutoFit/>
+          </a:bodyPr>
+          <a:lstStyle/>
+          <a:p>
+            <a:pPr>
+              <a:defRPr b="1" sz="2300">
+                <a:solidFill>
+                  <a:srgbClr val="F8FAFC"/>
+                </a:solidFill>
+              </a:defRPr>
+            </a:pPr>
+            <a:r>
+              <a:t>4.5.2 Multiplexing: FDM, WDM &amp; Time Division Multiplexing</a:t>
+            </a:r>
+          </a:p>
+        </p:txBody>
+      </p:sp>
+      <p:sp>
+        <p:nvSpPr>
+          <p:cNvPr id="5" name="TextBox 4"/>
+          <p:cNvSpPr txBox="1"/>
+          <p:nvPr/>
+        </p:nvSpPr>
+        <p:spPr>
+          <a:xfrm>
+            <a:off x="8229600" y="164592"/>
+            <a:ext cx="3291840" cy="685800"/>
+          </a:xfrm>
+          <a:prstGeom prst="rect">
+            <a:avLst/>
+          </a:prstGeom>
+          <a:noFill/>
+        </p:spPr>
+        <p:txBody>
+          <a:bodyPr wrap="none">
+            <a:spAutoFit/>
+          </a:bodyPr>
+          <a:lstStyle/>
+          <a:p>
+            <a:pPr algn="r">
+              <a:defRPr b="1" sz="1300">
+                <a:solidFill>
+                  <a:srgbClr val="D97706"/>
+                </a:solidFill>
+              </a:defRPr>
+            </a:pPr>
+            <a:r>
+              <a:t>M4.5 MULTIPLEXING</a:t>
+            </a:r>
+          </a:p>
+        </p:txBody>
+      </p:sp>
+      <p:sp>
+        <p:nvSpPr>
+          <p:cNvPr id="6" name="TextBox 5"/>
+          <p:cNvSpPr txBox="1"/>
+          <p:nvPr/>
+        </p:nvSpPr>
+        <p:spPr>
+          <a:xfrm>
+            <a:off x="731520" y="1280160"/>
+            <a:ext cx="6858000" cy="4937760"/>
+          </a:xfrm>
+          <a:prstGeom prst="rect">
+            <a:avLst/>
+          </a:prstGeom>
+          <a:noFill/>
+        </p:spPr>
+        <p:txBody>
+          <a:bodyPr wrap="square">
+            <a:spAutoFit/>
+          </a:bodyPr>
+          <a:lstStyle/>
+          <a:p>
+            <a:pPr>
+              <a:spcAft>
+                <a:spcPts val="200"/>
+              </a:spcAft>
+              <a:defRPr b="1" sz="1500">
+                <a:solidFill>
+                  <a:srgbClr val="0F1E4A"/>
+                </a:solidFill>
+              </a:defRPr>
+            </a:pPr>
+            <a:r>
+              <a:t>• Bandwidth Utilization Goal</a:t>
+            </a:r>
+          </a:p>
+          <a:p>
+            <a:pPr>
+              <a:spcAft>
+                <a:spcPts val="800"/>
+              </a:spcAft>
+              <a:defRPr sz="1300">
+                <a:solidFill>
+                  <a:srgbClr val="1E293B"/>
+                </a:solidFill>
+              </a:defRPr>
+            </a:pPr>
+            <a:r>
+              <a:t>   Combine multiple low-speed incoming data channels over a single high-capacity physical link.</a:t>
+            </a:r>
+          </a:p>
+          <a:p>
+            <a:pPr>
+              <a:spcAft>
+                <a:spcPts val="200"/>
+              </a:spcAft>
+              <a:defRPr b="1" sz="1500">
+                <a:solidFill>
+                  <a:srgbClr val="0F1E4A"/>
+                </a:solidFill>
+              </a:defRPr>
+            </a:pPr>
+            <a:r>
+              <a:t>• Frequency Division Multiplexing (FDM)</a:t>
+            </a:r>
+          </a:p>
+          <a:p>
+            <a:pPr>
+              <a:spcAft>
+                <a:spcPts val="800"/>
+              </a:spcAft>
+              <a:defRPr sz="1300">
+                <a:solidFill>
+                  <a:srgbClr val="1E293B"/>
+                </a:solidFill>
+              </a:defRPr>
+            </a:pPr>
+            <a:r>
+              <a:t>   Analog technique. Divides total link bandwidth into separate non-overlapping frequency carrier bands separated by Guard Bands (Used in Radio, Cable TV, ADSL).</a:t>
+            </a:r>
+          </a:p>
+          <a:p>
+            <a:pPr>
+              <a:spcAft>
+                <a:spcPts val="200"/>
+              </a:spcAft>
+              <a:defRPr b="1" sz="1500">
+                <a:solidFill>
+                  <a:srgbClr val="0F1E4A"/>
+                </a:solidFill>
+              </a:defRPr>
+            </a:pPr>
+            <a:r>
+              <a:t>• Wavelength Division Multiplexing (WDM / DWDM)</a:t>
+            </a:r>
+          </a:p>
+          <a:p>
+            <a:pPr>
+              <a:spcAft>
+                <a:spcPts val="800"/>
+              </a:spcAft>
+              <a:defRPr sz="1300">
+                <a:solidFill>
+                  <a:srgbClr val="1E293B"/>
+                </a:solidFill>
+              </a:defRPr>
+            </a:pPr>
+            <a:r>
+              <a:t>   Optical multiplexing over fiber. Multiplexes multiple laser beams of different light wavelengths (colors) into a single fiber strand (Dense WDM carries $&gt; 80$ channels of 100 Gbps each).</a:t>
+            </a:r>
+          </a:p>
+          <a:p>
+            <a:pPr>
+              <a:spcAft>
+                <a:spcPts val="200"/>
+              </a:spcAft>
+              <a:defRPr b="1" sz="1500">
+                <a:solidFill>
+                  <a:srgbClr val="0F1E4A"/>
+                </a:solidFill>
+              </a:defRPr>
+            </a:pPr>
+            <a:r>
+              <a:t>• Synchronous Time Division Multiplexing (TDM)</a:t>
+            </a:r>
+          </a:p>
+          <a:p>
+            <a:pPr>
+              <a:spcAft>
+                <a:spcPts val="800"/>
+              </a:spcAft>
+              <a:defRPr sz="1300">
+                <a:solidFill>
+                  <a:srgbClr val="1E293B"/>
+                </a:solidFill>
+              </a:defRPr>
+            </a:pPr>
+            <a:r>
+              <a:t>   Digital technique. Time divided into recurring frames; each frame contains fixed time slots pre-assigned to each input channel. Flaw: Wastes bandwidth if a channel has no data to send (idle slots).</a:t>
+            </a:r>
+          </a:p>
+          <a:p>
+            <a:pPr>
+              <a:spcAft>
+                <a:spcPts val="200"/>
+              </a:spcAft>
+              <a:defRPr b="1" sz="1500">
+                <a:solidFill>
+                  <a:srgbClr val="0F1E4A"/>
+                </a:solidFill>
+              </a:defRPr>
+            </a:pPr>
+            <a:r>
+              <a:t>• Statistical TDM (Asynchronous TDM)</a:t>
+            </a:r>
+          </a:p>
+          <a:p>
+            <a:pPr>
+              <a:spcAft>
+                <a:spcPts val="800"/>
+              </a:spcAft>
+              <a:defRPr sz="1300">
+                <a:solidFill>
+                  <a:srgbClr val="1E293B"/>
+                </a:solidFill>
+              </a:defRPr>
+            </a:pPr>
+            <a:r>
+              <a:t>   Time slots allocated dynamically on-demand only to active input channels carrying data. Eliminates wasted idle slots, dramatically increasing link utilization.</a:t>
+            </a:r>
+          </a:p>
+        </p:txBody>
+      </p:sp>
+      <p:sp>
+        <p:nvSpPr>
+          <p:cNvPr id="7" name="Rounded Rectangle 6"/>
+          <p:cNvSpPr/>
+          <p:nvPr/>
+        </p:nvSpPr>
+        <p:spPr>
+          <a:xfrm>
+            <a:off x="7955279" y="1280160"/>
+            <a:ext cx="3566160" cy="4846320"/>
+          </a:xfrm>
+          <a:prstGeom prst="roundRect">
+            <a:avLst/>
+          </a:prstGeom>
+          <a:solidFill>
+            <a:srgbClr val="F1F5F9"/>
+          </a:solidFill>
+          <a:ln w="19050">
+            <a:solidFill>
+              <a:srgbClr val="0E7490"/>
+            </a:solidFill>
+          </a:ln>
+        </p:spPr>
+        <p:style>
+          <a:lnRef idx="1">
+            <a:schemeClr val="accent1"/>
+          </a:lnRef>
+          <a:fillRef idx="3">
+            <a:schemeClr val="accent1"/>
+          </a:fillRef>
+          <a:effectRef idx="2">
+            <a:schemeClr val="accent1"/>
+          </a:effectRef>
+          <a:fontRef idx="minor">
+            <a:schemeClr val="lt1"/>
+          </a:fontRef>
+        </p:style>
+        <p:txBody>
+          <a:bodyPr rtlCol="0" anchor="ctr"/>
+          <a:lstStyle/>
+          <a:p>
+            <a:pPr algn="ctr"/>
+          </a:p>
+        </p:txBody>
+      </p:sp>
+      <p:sp>
+        <p:nvSpPr>
+          <p:cNvPr id="8" name="TextBox 7"/>
+          <p:cNvSpPr txBox="1"/>
+          <p:nvPr/>
+        </p:nvSpPr>
+        <p:spPr>
+          <a:xfrm>
+            <a:off x="8138160" y="1417320"/>
+            <a:ext cx="3200400" cy="4572000"/>
+          </a:xfrm>
+          <a:prstGeom prst="rect">
+            <a:avLst/>
+          </a:prstGeom>
+          <a:noFill/>
+        </p:spPr>
+        <p:txBody>
+          <a:bodyPr wrap="square">
+            <a:spAutoFit/>
+          </a:bodyPr>
+          <a:lstStyle/>
+          <a:p>
+            <a:pPr>
+              <a:spcAft>
+                <a:spcPts val="1000"/>
+              </a:spcAft>
+              <a:defRPr b="1" sz="1500">
+                <a:solidFill>
+                  <a:srgbClr val="0E7490"/>
+                </a:solidFill>
+              </a:defRPr>
+            </a:pPr>
+            <a:r>
+              <a:t>Multiplexing Summary</a:t>
+            </a:r>
+          </a:p>
+          <a:p>
+            <a:pPr>
+              <a:spcAft>
+                <a:spcPts val="600"/>
+              </a:spcAft>
+              <a:defRPr sz="1200">
+                <a:solidFill>
+                  <a:srgbClr val="1E293B"/>
+                </a:solidFill>
+              </a:defRPr>
+            </a:pPr>
+            <a:r>
+              <a:t>→ FDM: Analog frequency bands</a:t>
+            </a:r>
+          </a:p>
+          <a:p>
+            <a:pPr>
+              <a:spcAft>
+                <a:spcPts val="600"/>
+              </a:spcAft>
+              <a:defRPr sz="1200">
+                <a:solidFill>
+                  <a:srgbClr val="1E293B"/>
+                </a:solidFill>
+              </a:defRPr>
+            </a:pPr>
+            <a:r>
+              <a:t>→ WDM: Optical wavelengths in fiber</a:t>
+            </a:r>
+          </a:p>
+          <a:p>
+            <a:pPr>
+              <a:spcAft>
+                <a:spcPts val="600"/>
+              </a:spcAft>
+              <a:defRPr sz="1200">
+                <a:solidFill>
+                  <a:srgbClr val="1E293B"/>
+                </a:solidFill>
+              </a:defRPr>
+            </a:pPr>
+            <a:r>
+              <a:t>→ Sync TDM: Fixed pre-assigned slots</a:t>
+            </a:r>
+          </a:p>
+          <a:p>
+            <a:pPr>
+              <a:spcAft>
+                <a:spcPts val="600"/>
+              </a:spcAft>
+              <a:defRPr sz="1200">
+                <a:solidFill>
+                  <a:srgbClr val="1E293B"/>
+                </a:solidFill>
+              </a:defRPr>
+            </a:pPr>
+            <a:r>
+              <a:t>→ Stat TDM: Dynamic on-demand slots</a:t>
+            </a:r>
+          </a:p>
+          <a:p>
+            <a:pPr>
+              <a:spcAft>
+                <a:spcPts val="600"/>
+              </a:spcAft>
+              <a:defRPr sz="1200">
+                <a:solidFill>
+                  <a:srgbClr val="1E293B"/>
+                </a:solidFill>
+              </a:defRPr>
+            </a:pPr>
+            <a:r>
+              <a:t>→ Guard Bands: Prevent interference</a:t>
+            </a:r>
+          </a:p>
+        </p:txBody>
+      </p:sp>
+      <p:sp>
+        <p:nvSpPr>
+          <p:cNvPr id="9" name="TextBox 8"/>
+          <p:cNvSpPr txBox="1"/>
+          <p:nvPr/>
+        </p:nvSpPr>
+        <p:spPr>
+          <a:xfrm>
+            <a:off x="731520" y="6309360"/>
+            <a:ext cx="10789920" cy="365760"/>
+          </a:xfrm>
+          <a:prstGeom prst="rect">
+            <a:avLst/>
+          </a:prstGeom>
+          <a:noFill/>
+        </p:spPr>
+        <p:txBody>
+          <a:bodyPr wrap="none">
+            <a:spAutoFit/>
+          </a:bodyPr>
+          <a:lstStyle/>
+          <a:p>
+            <a:pPr>
+              <a:defRPr sz="950">
+                <a:solidFill>
+                  <a:srgbClr val="64748B"/>
+                </a:solidFill>
+              </a:defRPr>
+            </a:pPr>
+            <a:r>
+              <a:t>PCCST501 Computer Networks | KTU 2024 Scheme | Prof. Anju Markose | Assistant Professor, Dept. of CSE | VJCET</a:t>
+            </a:r>
+          </a:p>
+        </p:txBody>
+      </p:sp>
+    </p:spTree>
+  </p:cSld>
+  <p:clrMapOvr>
+    <a:masterClrMapping/>
+  </p:clrMapOvr>
+</p:sld>
+</file>
+
+<file path=ppt/slides/slide18.xml><?xml version="1.0" encoding="utf-8"?>
+<p:sld xmlns:a="http://schemas.openxmlformats.org/drawingml/2006/main" xmlns:p="http://schemas.openxmlformats.org/presentationml/2006/main" xmlns:r="http://schemas.openxmlformats.org/officeDocument/2006/relationships">
+  <p:cSld>
+    <p:spTree>
+      <p:nvGrpSpPr>
+        <p:cNvPr id="1" name=""/>
+        <p:cNvGrpSpPr/>
+        <p:nvPr/>
+      </p:nvGrpSpPr>
+      <p:grpSpPr/>
+      <p:sp>
+        <p:nvSpPr>
+          <p:cNvPr id="2" name="Rectangle 1"/>
+          <p:cNvSpPr/>
+          <p:nvPr/>
+        </p:nvSpPr>
+        <p:spPr>
+          <a:xfrm>
+            <a:off x="0" y="0"/>
+            <a:ext cx="12191695" cy="6858000"/>
+          </a:xfrm>
+          <a:prstGeom prst="rect">
+            <a:avLst/>
+          </a:prstGeom>
+          <a:solidFill>
+            <a:srgbClr val="0F172A"/>
+          </a:solidFill>
+          <a:ln>
+            <a:noFill/>
+          </a:ln>
+        </p:spPr>
+        <p:style>
+          <a:lnRef idx="1">
+            <a:schemeClr val="accent1"/>
+          </a:lnRef>
+          <a:fillRef idx="3">
+            <a:schemeClr val="accent1"/>
+          </a:fillRef>
+          <a:effectRef idx="2">
+            <a:schemeClr val="accent1"/>
+          </a:effectRef>
+          <a:fontRef idx="minor">
+            <a:schemeClr val="lt1"/>
+          </a:fontRef>
+        </p:style>
+        <p:txBody>
+          <a:bodyPr rtlCol="0" anchor="ctr"/>
+          <a:lstStyle/>
+          <a:p>
+            <a:pPr algn="ctr"/>
+          </a:p>
+        </p:txBody>
+      </p:sp>
+      <p:sp>
+        <p:nvSpPr>
+          <p:cNvPr id="3" name="Rectangle 2"/>
+          <p:cNvSpPr/>
+          <p:nvPr/>
+        </p:nvSpPr>
+        <p:spPr>
+          <a:xfrm>
+            <a:off x="822960" y="1188720"/>
+            <a:ext cx="164592" cy="4480560"/>
+          </a:xfrm>
+          <a:prstGeom prst="rect">
+            <a:avLst/>
+          </a:prstGeom>
+          <a:solidFill>
+            <a:srgbClr val="D97706"/>
+          </a:solidFill>
+          <a:ln>
+            <a:noFill/>
+          </a:ln>
+        </p:spPr>
+        <p:style>
+          <a:lnRef idx="1">
+            <a:schemeClr val="accent1"/>
+          </a:lnRef>
+          <a:fillRef idx="3">
+            <a:schemeClr val="accent1"/>
+          </a:fillRef>
+          <a:effectRef idx="2">
+            <a:schemeClr val="accent1"/>
+          </a:effectRef>
+          <a:fontRef idx="minor">
+            <a:schemeClr val="lt1"/>
+          </a:fontRef>
+        </p:style>
+        <p:txBody>
+          <a:bodyPr rtlCol="0" anchor="ctr"/>
+          <a:lstStyle/>
+          <a:p>
+            <a:pPr algn="ctr"/>
+          </a:p>
+        </p:txBody>
+      </p:sp>
+      <p:sp>
+        <p:nvSpPr>
+          <p:cNvPr id="4" name="TextBox 3"/>
+          <p:cNvSpPr txBox="1"/>
+          <p:nvPr/>
+        </p:nvSpPr>
+        <p:spPr>
+          <a:xfrm>
+            <a:off x="1280160" y="1097280"/>
+            <a:ext cx="10058400" cy="4663440"/>
+          </a:xfrm>
+          <a:prstGeom prst="rect">
+            <a:avLst/>
+          </a:prstGeom>
+          <a:noFill/>
+        </p:spPr>
+        <p:txBody>
+          <a:bodyPr wrap="square">
+            <a:spAutoFit/>
+          </a:bodyPr>
+          <a:lstStyle/>
+          <a:p>
+            <a:pPr>
+              <a:spcAft>
+                <a:spcPts val="1200"/>
+              </a:spcAft>
+              <a:defRPr b="1" sz="1300">
+                <a:solidFill>
+                  <a:srgbClr val="D97706"/>
+                </a:solidFill>
+              </a:defRPr>
+            </a:pPr>
+            <a:r>
+              <a:t>PCCST501 Computer Networks | KTU 2024 Scheme • MODULE 4 • M4.6</a:t>
+            </a:r>
+          </a:p>
+          <a:p>
+            <a:pPr>
+              <a:spcAft>
+                <a:spcPts val="1400"/>
+              </a:spcAft>
+              <a:defRPr b="1" sz="3200">
+                <a:solidFill>
+                  <a:srgbClr val="F8FAFC"/>
+                </a:solidFill>
+              </a:defRPr>
+            </a:pPr>
+            <a:r>
+              <a:t>Transmission Media (Guided &amp; Unguided)</a:t>
+            </a:r>
+          </a:p>
+          <a:p>
+            <a:pPr>
+              <a:spcAft>
+                <a:spcPts val="2800"/>
+              </a:spcAft>
+              <a:defRPr sz="1700">
+                <a:solidFill>
+                  <a:srgbClr val="94A3B8"/>
+                </a:solidFill>
+              </a:defRPr>
+            </a:pPr>
+            <a:r>
+              <a:t>Guided Media (Twisted Pair UTP/STP, Coaxial, Optical Fiber Single/Multi-mode TIR), Unguided Wireless &amp; Satellite Orbits</a:t>
+            </a:r>
+          </a:p>
+          <a:p>
+            <a:pPr>
+              <a:defRPr b="1" sz="1300">
+                <a:solidFill>
+                  <a:srgbClr val="E2E8F0"/>
+                </a:solidFill>
+              </a:defRPr>
+            </a:pPr>
+            <a:r>
+              <a:t>Prepared by: Prof. Anju Markose | Assistant Professor, Dept. of CSE | VJCET</a:t>
+            </a:r>
+          </a:p>
+          <a:p>
+            <a:pPr>
+              <a:defRPr sz="1100">
+                <a:solidFill>
+                  <a:srgbClr val="94A3B8"/>
+                </a:solidFill>
+              </a:defRPr>
+            </a:pPr>
+            <a:r>
+              <a:t>Viswajyothi College of Engineering and Technology (VJCET), Vazhakulam</a:t>
+            </a:r>
+          </a:p>
+        </p:txBody>
+      </p:sp>
+    </p:spTree>
+  </p:cSld>
+  <p:clrMapOvr>
+    <a:masterClrMapping/>
+  </p:clrMapOvr>
+</p:sld>
+</file>
+
+<file path=ppt/slides/slide19.xml><?xml version="1.0" encoding="utf-8"?>
+<p:sld xmlns:a="http://schemas.openxmlformats.org/drawingml/2006/main" xmlns:p="http://schemas.openxmlformats.org/presentationml/2006/main" xmlns:r="http://schemas.openxmlformats.org/officeDocument/2006/relationships">
+  <p:cSld>
+    <p:spTree>
+      <p:nvGrpSpPr>
+        <p:cNvPr id="1" name=""/>
+        <p:cNvGrpSpPr/>
+        <p:nvPr/>
+      </p:nvGrpSpPr>
+      <p:grpSpPr/>
+      <p:sp>
+        <p:nvSpPr>
+          <p:cNvPr id="2" name="Rectangle 1"/>
+          <p:cNvSpPr/>
+          <p:nvPr/>
+        </p:nvSpPr>
+        <p:spPr>
+          <a:xfrm>
+            <a:off x="0" y="0"/>
+            <a:ext cx="12191695" cy="1005840"/>
+          </a:xfrm>
+          <a:prstGeom prst="rect">
+            <a:avLst/>
+          </a:prstGeom>
+          <a:solidFill>
+            <a:srgbClr val="0F1E4A"/>
+          </a:solidFill>
+          <a:ln>
+            <a:noFill/>
+          </a:ln>
+        </p:spPr>
+        <p:style>
+          <a:lnRef idx="1">
+            <a:schemeClr val="accent1"/>
+          </a:lnRef>
+          <a:fillRef idx="3">
+            <a:schemeClr val="accent1"/>
+          </a:fillRef>
+          <a:effectRef idx="2">
+            <a:schemeClr val="accent1"/>
+          </a:effectRef>
+          <a:fontRef idx="minor">
+            <a:schemeClr val="lt1"/>
+          </a:fontRef>
+        </p:style>
+        <p:txBody>
+          <a:bodyPr rtlCol="0" anchor="ctr"/>
+          <a:lstStyle/>
+          <a:p>
+            <a:pPr algn="ctr"/>
+          </a:p>
+        </p:txBody>
+      </p:sp>
+      <p:sp>
+        <p:nvSpPr>
+          <p:cNvPr id="3" name="Rectangle 2"/>
+          <p:cNvSpPr/>
+          <p:nvPr/>
+        </p:nvSpPr>
+        <p:spPr>
+          <a:xfrm>
+            <a:off x="0" y="969264"/>
+            <a:ext cx="12191695" cy="36576"/>
+          </a:xfrm>
+          <a:prstGeom prst="rect">
+            <a:avLst/>
+          </a:prstGeom>
+          <a:solidFill>
+            <a:srgbClr val="D97706"/>
+          </a:solidFill>
+          <a:ln>
+            <a:noFill/>
+          </a:ln>
+        </p:spPr>
+        <p:style>
+          <a:lnRef idx="1">
+            <a:schemeClr val="accent1"/>
+          </a:lnRef>
+          <a:fillRef idx="3">
+            <a:schemeClr val="accent1"/>
+          </a:fillRef>
+          <a:effectRef idx="2">
+            <a:schemeClr val="accent1"/>
+          </a:effectRef>
+          <a:fontRef idx="minor">
+            <a:schemeClr val="lt1"/>
+          </a:fontRef>
+        </p:style>
+        <p:txBody>
+          <a:bodyPr rtlCol="0" anchor="ctr"/>
+          <a:lstStyle/>
+          <a:p>
+            <a:pPr algn="ctr"/>
+          </a:p>
+        </p:txBody>
+      </p:sp>
+      <p:sp>
+        <p:nvSpPr>
+          <p:cNvPr id="4" name="TextBox 3"/>
+          <p:cNvSpPr txBox="1"/>
+          <p:nvPr/>
+        </p:nvSpPr>
+        <p:spPr>
+          <a:xfrm>
+            <a:off x="731520" y="164592"/>
+            <a:ext cx="8412480" cy="685800"/>
+          </a:xfrm>
+          <a:prstGeom prst="rect">
+            <a:avLst/>
+          </a:prstGeom>
+          <a:noFill/>
+        </p:spPr>
+        <p:txBody>
+          <a:bodyPr wrap="none">
+            <a:spAutoFit/>
+          </a:bodyPr>
+          <a:lstStyle/>
+          <a:p>
+            <a:pPr>
+              <a:defRPr b="1" sz="2300">
+                <a:solidFill>
+                  <a:srgbClr val="F8FAFC"/>
+                </a:solidFill>
+              </a:defRPr>
+            </a:pPr>
+            <a:r>
+              <a:t>4.6.1 Guided Transmission Media: Copper vs Optical Fiber</a:t>
+            </a:r>
+          </a:p>
+        </p:txBody>
+      </p:sp>
+      <p:sp>
+        <p:nvSpPr>
+          <p:cNvPr id="5" name="TextBox 4"/>
+          <p:cNvSpPr txBox="1"/>
+          <p:nvPr/>
+        </p:nvSpPr>
+        <p:spPr>
+          <a:xfrm>
+            <a:off x="8229600" y="164592"/>
+            <a:ext cx="3291840" cy="685800"/>
+          </a:xfrm>
+          <a:prstGeom prst="rect">
+            <a:avLst/>
+          </a:prstGeom>
+          <a:noFill/>
+        </p:spPr>
+        <p:txBody>
+          <a:bodyPr wrap="none">
+            <a:spAutoFit/>
+          </a:bodyPr>
+          <a:lstStyle/>
+          <a:p>
+            <a:pPr algn="r">
+              <a:defRPr b="1" sz="1300">
+                <a:solidFill>
+                  <a:srgbClr val="D97706"/>
+                </a:solidFill>
+              </a:defRPr>
+            </a:pPr>
+            <a:r>
+              <a:t>M4.6 GUIDED MEDIA</a:t>
+            </a:r>
+          </a:p>
+        </p:txBody>
+      </p:sp>
+      <p:sp>
+        <p:nvSpPr>
+          <p:cNvPr id="6" name="Rounded Rectangle 5"/>
+          <p:cNvSpPr/>
+          <p:nvPr/>
+        </p:nvSpPr>
+        <p:spPr>
+          <a:xfrm>
+            <a:off x="731520" y="1280160"/>
+            <a:ext cx="5212080" cy="4846320"/>
+          </a:xfrm>
+          <a:prstGeom prst="roundRect">
+            <a:avLst/>
+          </a:prstGeom>
+          <a:solidFill>
+            <a:srgbClr val="F1F5F9"/>
+          </a:solidFill>
+          <a:ln w="19050">
+            <a:solidFill>
+              <a:srgbClr val="0E7490"/>
+            </a:solidFill>
+          </a:ln>
+        </p:spPr>
+        <p:style>
+          <a:lnRef idx="1">
+            <a:schemeClr val="accent1"/>
+          </a:lnRef>
+          <a:fillRef idx="3">
+            <a:schemeClr val="accent1"/>
+          </a:fillRef>
+          <a:effectRef idx="2">
+            <a:schemeClr val="accent1"/>
+          </a:effectRef>
+          <a:fontRef idx="minor">
+            <a:schemeClr val="lt1"/>
+          </a:fontRef>
+        </p:style>
+        <p:txBody>
+          <a:bodyPr rtlCol="0" anchor="ctr"/>
+          <a:lstStyle/>
+          <a:p>
+            <a:pPr algn="ctr"/>
+          </a:p>
+        </p:txBody>
+      </p:sp>
+      <p:sp>
+        <p:nvSpPr>
+          <p:cNvPr id="7" name="TextBox 6"/>
+          <p:cNvSpPr txBox="1"/>
+          <p:nvPr/>
+        </p:nvSpPr>
+        <p:spPr>
+          <a:xfrm>
+            <a:off x="914400" y="1417320"/>
+            <a:ext cx="4846320" cy="4572000"/>
+          </a:xfrm>
+          <a:prstGeom prst="rect">
+            <a:avLst/>
+          </a:prstGeom>
+          <a:noFill/>
+        </p:spPr>
+        <p:txBody>
+          <a:bodyPr wrap="square">
+            <a:spAutoFit/>
+          </a:bodyPr>
+          <a:lstStyle/>
+          <a:p>
+            <a:pPr>
+              <a:spcAft>
+                <a:spcPts val="1200"/>
+              </a:spcAft>
+              <a:defRPr b="1" sz="1600">
+                <a:solidFill>
+                  <a:srgbClr val="0F1E4A"/>
+                </a:solidFill>
+              </a:defRPr>
+            </a:pPr>
+            <a:r>
+              <a:t>Twisted Pair &amp; Coaxial Cable (Copper)</a:t>
+            </a:r>
+          </a:p>
+          <a:p>
+            <a:pPr>
+              <a:spcAft>
+                <a:spcPts val="600"/>
+              </a:spcAft>
+              <a:defRPr sz="1250">
+                <a:solidFill>
+                  <a:srgbClr val="1E293B"/>
+                </a:solidFill>
+              </a:defRPr>
+            </a:pPr>
+            <a:r>
+              <a:t>• Unshielded Twisted Pair (UTP): Pairs twisted to cancel electromagnetic interference (EMI) and crosstalk. Cat 5e (1 Gbps / 100m), Cat 6/6A (10 Gbps / 55-100m). RJ-45 connector</a:t>
+            </a:r>
+          </a:p>
+          <a:p>
+            <a:pPr>
+              <a:spcAft>
+                <a:spcPts val="600"/>
+              </a:spcAft>
+              <a:defRPr sz="1250">
+                <a:solidFill>
+                  <a:srgbClr val="1E293B"/>
+                </a:solidFill>
+              </a:defRPr>
+            </a:pPr>
+            <a:r>
+              <a:t>• Shielded Twisted Pair (STP): Metal foil braid per pair for harsh industrial environments</a:t>
+            </a:r>
+          </a:p>
+          <a:p>
+            <a:pPr>
+              <a:spcAft>
+                <a:spcPts val="600"/>
+              </a:spcAft>
+              <a:defRPr sz="1250">
+                <a:solidFill>
+                  <a:srgbClr val="1E293B"/>
+                </a:solidFill>
+              </a:defRPr>
+            </a:pPr>
+            <a:r>
+              <a:t>• Coaxial Cable: Central copper conductor surrounded by dielectric insulation, metallic braided shield, and jacket. 50$\Omega$ Baseband / 75$\Omega$ Broadband Cable TV</a:t>
+            </a:r>
+          </a:p>
+        </p:txBody>
+      </p:sp>
+      <p:sp>
+        <p:nvSpPr>
+          <p:cNvPr id="8" name="Rounded Rectangle 7"/>
+          <p:cNvSpPr/>
+          <p:nvPr/>
+        </p:nvSpPr>
+        <p:spPr>
+          <a:xfrm>
+            <a:off x="6309360" y="1280160"/>
+            <a:ext cx="5212080" cy="4846320"/>
+          </a:xfrm>
+          <a:prstGeom prst="roundRect">
+            <a:avLst/>
+          </a:prstGeom>
+          <a:solidFill>
+            <a:srgbClr val="EEF2FF"/>
+          </a:solidFill>
+          <a:ln w="19050">
+            <a:solidFill>
+              <a:srgbClr val="0F1E4A"/>
+            </a:solidFill>
+          </a:ln>
+        </p:spPr>
+        <p:style>
+          <a:lnRef idx="1">
+            <a:schemeClr val="accent1"/>
+          </a:lnRef>
+          <a:fillRef idx="3">
+            <a:schemeClr val="accent1"/>
+          </a:fillRef>
+          <a:effectRef idx="2">
+            <a:schemeClr val="accent1"/>
+          </a:effectRef>
+          <a:fontRef idx="minor">
+            <a:schemeClr val="lt1"/>
+          </a:fontRef>
+        </p:style>
+        <p:txBody>
+          <a:bodyPr rtlCol="0" anchor="ctr"/>
+          <a:lstStyle/>
+          <a:p>
+            <a:pPr algn="ctr"/>
+          </a:p>
+        </p:txBody>
+      </p:sp>
+      <p:sp>
+        <p:nvSpPr>
+          <p:cNvPr id="9" name="TextBox 8"/>
+          <p:cNvSpPr txBox="1"/>
+          <p:nvPr/>
+        </p:nvSpPr>
+        <p:spPr>
+          <a:xfrm>
+            <a:off x="6492240" y="1417320"/>
+            <a:ext cx="4846320" cy="4572000"/>
+          </a:xfrm>
+          <a:prstGeom prst="rect">
+            <a:avLst/>
+          </a:prstGeom>
+          <a:noFill/>
+        </p:spPr>
+        <p:txBody>
+          <a:bodyPr wrap="square">
+            <a:spAutoFit/>
+          </a:bodyPr>
+          <a:lstStyle/>
+          <a:p>
+            <a:pPr>
+              <a:spcAft>
+                <a:spcPts val="1200"/>
+              </a:spcAft>
+              <a:defRPr b="1" sz="1600">
+                <a:solidFill>
+                  <a:srgbClr val="0E7490"/>
+                </a:solidFill>
+              </a:defRPr>
+            </a:pPr>
+            <a:r>
+              <a:t>Optical Fiber (Glass / Silica Core)</a:t>
+            </a:r>
+          </a:p>
+          <a:p>
+            <a:pPr>
+              <a:spcAft>
+                <a:spcPts val="600"/>
+              </a:spcAft>
+              <a:defRPr sz="1250">
+                <a:solidFill>
+                  <a:srgbClr val="1E293B"/>
+                </a:solidFill>
+              </a:defRPr>
+            </a:pPr>
+            <a:r>
+              <a:t>• Propagation Principle: Total Internal Reflection (TIR) when light angle exceeds critical angle (Core refractive index $n_1 &gt;$ Cladding $n_2$)</a:t>
+            </a:r>
+          </a:p>
+          <a:p>
+            <a:pPr>
+              <a:spcAft>
+                <a:spcPts val="600"/>
+              </a:spcAft>
+              <a:defRPr sz="1250">
+                <a:solidFill>
+                  <a:srgbClr val="1E293B"/>
+                </a:solidFill>
+              </a:defRPr>
+            </a:pPr>
+            <a:r>
+              <a:t>• Step-Index vs Graded-Index: Step-Index: Constant core index. Graded-Index: Parabolic index profile reduces modal dispersion</a:t>
+            </a:r>
+          </a:p>
+          <a:p>
+            <a:pPr>
+              <a:spcAft>
+                <a:spcPts val="600"/>
+              </a:spcAft>
+              <a:defRPr sz="1250">
+                <a:solidFill>
+                  <a:srgbClr val="1E293B"/>
+                </a:solidFill>
+              </a:defRPr>
+            </a:pPr>
+            <a:r>
+              <a:t>• Single-Mode Fiber (SMF): Tiny core (8-10 $\mu$m); zero modal dispersion; laser source; reach &gt; 40 km</a:t>
+            </a:r>
+          </a:p>
+          <a:p>
+            <a:pPr>
+              <a:spcAft>
+                <a:spcPts val="600"/>
+              </a:spcAft>
+              <a:defRPr sz="1250">
+                <a:solidFill>
+                  <a:srgbClr val="1E293B"/>
+                </a:solidFill>
+              </a:defRPr>
+            </a:pPr>
+            <a:r>
+              <a:t>• Multi-Mode Fiber (MMF): Larger core (50-62.5 $\mu$m); LED source; short reach (&lt; 2 km) inside LANs/data centers</a:t>
+            </a:r>
+          </a:p>
+          <a:p>
+            <a:pPr>
+              <a:spcAft>
+                <a:spcPts val="600"/>
+              </a:spcAft>
+              <a:defRPr sz="1250">
+                <a:solidFill>
+                  <a:srgbClr val="1E293B"/>
+                </a:solidFill>
+              </a:defRPr>
+            </a:pPr>
+            <a:r>
+              <a:t>• Immense Advantages: Immense bandwidth, zero electromagnetic interference (EMI), complete electrical isolation, low attenuation</a:t>
+            </a:r>
+          </a:p>
+        </p:txBody>
+      </p:sp>
+      <p:sp>
+        <p:nvSpPr>
+          <p:cNvPr id="10" name="TextBox 9"/>
+          <p:cNvSpPr txBox="1"/>
+          <p:nvPr/>
+        </p:nvSpPr>
+        <p:spPr>
+          <a:xfrm>
+            <a:off x="731520" y="6309360"/>
+            <a:ext cx="10789920" cy="365760"/>
+          </a:xfrm>
+          <a:prstGeom prst="rect">
+            <a:avLst/>
+          </a:prstGeom>
+          <a:noFill/>
+        </p:spPr>
+        <p:txBody>
+          <a:bodyPr wrap="none">
+            <a:spAutoFit/>
+          </a:bodyPr>
+          <a:lstStyle/>
+          <a:p>
+            <a:pPr>
+              <a:defRPr sz="950">
+                <a:solidFill>
+                  <a:srgbClr val="64748B"/>
+                </a:solidFill>
+              </a:defRPr>
+            </a:pPr>
+            <a:r>
+              <a:t>PCCST501 Computer Networks | KTU 2024 Scheme | Prof. Anju Markose | Assistant Professor, Dept. of CSE | VJCET</a:t>
             </a:r>
           </a:p>
         </p:txBody>
@@ -3287,13 +7500,13 @@
         <p:spPr>
           <a:xfrm>
             <a:off x="0" y="0"/>
-            <a:ext cx="12191695" cy="1005840"/>
+            <a:ext cx="12191695" cy="6858000"/>
           </a:xfrm>
           <a:prstGeom prst="rect">
             <a:avLst/>
           </a:prstGeom>
           <a:solidFill>
-            <a:srgbClr val="1E3A8A"/>
+            <a:srgbClr val="0F172A"/>
           </a:solidFill>
           <a:ln>
             <a:noFill/>
@@ -3323,14 +7536,253 @@
       </p:sp>
       <p:sp>
         <p:nvSpPr>
-          <p:cNvPr id="3" name="TextBox 2"/>
+          <p:cNvPr id="3" name="Rectangle 2"/>
+          <p:cNvSpPr/>
+          <p:nvPr/>
+        </p:nvSpPr>
+        <p:spPr>
+          <a:xfrm>
+            <a:off x="822960" y="1188720"/>
+            <a:ext cx="164592" cy="4480560"/>
+          </a:xfrm>
+          <a:prstGeom prst="rect">
+            <a:avLst/>
+          </a:prstGeom>
+          <a:solidFill>
+            <a:srgbClr val="D97706"/>
+          </a:solidFill>
+          <a:ln>
+            <a:noFill/>
+          </a:ln>
+        </p:spPr>
+        <p:style>
+          <a:lnRef idx="1">
+            <a:schemeClr val="accent1"/>
+          </a:lnRef>
+          <a:fillRef idx="3">
+            <a:schemeClr val="accent1"/>
+          </a:fillRef>
+          <a:effectRef idx="2">
+            <a:schemeClr val="accent1"/>
+          </a:effectRef>
+          <a:fontRef idx="minor">
+            <a:schemeClr val="lt1"/>
+          </a:fontRef>
+        </p:style>
+        <p:txBody>
+          <a:bodyPr rtlCol="0" anchor="ctr"/>
+          <a:lstStyle/>
+          <a:p>
+            <a:pPr algn="ctr"/>
+          </a:p>
+        </p:txBody>
+      </p:sp>
+      <p:sp>
+        <p:nvSpPr>
+          <p:cNvPr id="4" name="TextBox 3"/>
           <p:cNvSpPr txBox="1"/>
           <p:nvPr/>
         </p:nvSpPr>
         <p:spPr>
           <a:xfrm>
-            <a:off x="731520" y="137160"/>
-            <a:ext cx="8686800" cy="731520"/>
+            <a:off x="1280160" y="1097280"/>
+            <a:ext cx="10058400" cy="4663440"/>
+          </a:xfrm>
+          <a:prstGeom prst="rect">
+            <a:avLst/>
+          </a:prstGeom>
+          <a:noFill/>
+        </p:spPr>
+        <p:txBody>
+          <a:bodyPr wrap="square">
+            <a:spAutoFit/>
+          </a:bodyPr>
+          <a:lstStyle/>
+          <a:p>
+            <a:pPr>
+              <a:spcAft>
+                <a:spcPts val="1200"/>
+              </a:spcAft>
+              <a:defRPr b="1" sz="1300">
+                <a:solidFill>
+                  <a:srgbClr val="D97706"/>
+                </a:solidFill>
+              </a:defRPr>
+            </a:pPr>
+            <a:r>
+              <a:t>PCCST501 Computer Networks | KTU 2024 Scheme • MODULE 4 • M4.1</a:t>
+            </a:r>
+          </a:p>
+          <a:p>
+            <a:pPr>
+              <a:spcAft>
+                <a:spcPts val="1400"/>
+              </a:spcAft>
+              <a:defRPr b="1" sz="3200">
+                <a:solidFill>
+                  <a:srgbClr val="F8FAFC"/>
+                </a:solidFill>
+              </a:defRPr>
+            </a:pPr>
+            <a:r>
+              <a:t>Network Management &amp; SNMP Architecture</a:t>
+            </a:r>
+          </a:p>
+          <a:p>
+            <a:pPr>
+              <a:spcAft>
+                <a:spcPts val="2800"/>
+              </a:spcAft>
+              <a:defRPr sz="1700">
+                <a:solidFill>
+                  <a:srgbClr val="94A3B8"/>
+                </a:solidFill>
+              </a:defRPr>
+            </a:pPr>
+            <a:r>
+              <a:t>Framework Components (NMS, Agent, MIB), SNMP Protocol Operations (UDP 161/162), Evolution: SNMPv1 vs SNMPv2c vs SNMPv3</a:t>
+            </a:r>
+          </a:p>
+          <a:p>
+            <a:pPr>
+              <a:defRPr b="1" sz="1300">
+                <a:solidFill>
+                  <a:srgbClr val="E2E8F0"/>
+                </a:solidFill>
+              </a:defRPr>
+            </a:pPr>
+            <a:r>
+              <a:t>Prepared by: Prof. Anju Markose | Assistant Professor, Dept. of CSE | VJCET</a:t>
+            </a:r>
+          </a:p>
+          <a:p>
+            <a:pPr>
+              <a:defRPr sz="1100">
+                <a:solidFill>
+                  <a:srgbClr val="94A3B8"/>
+                </a:solidFill>
+              </a:defRPr>
+            </a:pPr>
+            <a:r>
+              <a:t>Viswajyothi College of Engineering and Technology (VJCET), Vazhakulam</a:t>
+            </a:r>
+          </a:p>
+        </p:txBody>
+      </p:sp>
+    </p:spTree>
+  </p:cSld>
+  <p:clrMapOvr>
+    <a:masterClrMapping/>
+  </p:clrMapOvr>
+</p:sld>
+</file>
+
+<file path=ppt/slides/slide20.xml><?xml version="1.0" encoding="utf-8"?>
+<p:sld xmlns:a="http://schemas.openxmlformats.org/drawingml/2006/main" xmlns:p="http://schemas.openxmlformats.org/presentationml/2006/main" xmlns:r="http://schemas.openxmlformats.org/officeDocument/2006/relationships">
+  <p:cSld>
+    <p:spTree>
+      <p:nvGrpSpPr>
+        <p:cNvPr id="1" name=""/>
+        <p:cNvGrpSpPr/>
+        <p:nvPr/>
+      </p:nvGrpSpPr>
+      <p:grpSpPr/>
+      <p:sp>
+        <p:nvSpPr>
+          <p:cNvPr id="2" name="Rectangle 1"/>
+          <p:cNvSpPr/>
+          <p:nvPr/>
+        </p:nvSpPr>
+        <p:spPr>
+          <a:xfrm>
+            <a:off x="0" y="0"/>
+            <a:ext cx="12191695" cy="1005840"/>
+          </a:xfrm>
+          <a:prstGeom prst="rect">
+            <a:avLst/>
+          </a:prstGeom>
+          <a:solidFill>
+            <a:srgbClr val="0F1E4A"/>
+          </a:solidFill>
+          <a:ln>
+            <a:noFill/>
+          </a:ln>
+        </p:spPr>
+        <p:style>
+          <a:lnRef idx="1">
+            <a:schemeClr val="accent1"/>
+          </a:lnRef>
+          <a:fillRef idx="3">
+            <a:schemeClr val="accent1"/>
+          </a:fillRef>
+          <a:effectRef idx="2">
+            <a:schemeClr val="accent1"/>
+          </a:effectRef>
+          <a:fontRef idx="minor">
+            <a:schemeClr val="lt1"/>
+          </a:fontRef>
+        </p:style>
+        <p:txBody>
+          <a:bodyPr rtlCol="0" anchor="ctr"/>
+          <a:lstStyle/>
+          <a:p>
+            <a:pPr algn="ctr"/>
+          </a:p>
+        </p:txBody>
+      </p:sp>
+      <p:sp>
+        <p:nvSpPr>
+          <p:cNvPr id="3" name="Rectangle 2"/>
+          <p:cNvSpPr/>
+          <p:nvPr/>
+        </p:nvSpPr>
+        <p:spPr>
+          <a:xfrm>
+            <a:off x="0" y="969264"/>
+            <a:ext cx="12191695" cy="36576"/>
+          </a:xfrm>
+          <a:prstGeom prst="rect">
+            <a:avLst/>
+          </a:prstGeom>
+          <a:solidFill>
+            <a:srgbClr val="D97706"/>
+          </a:solidFill>
+          <a:ln>
+            <a:noFill/>
+          </a:ln>
+        </p:spPr>
+        <p:style>
+          <a:lnRef idx="1">
+            <a:schemeClr val="accent1"/>
+          </a:lnRef>
+          <a:fillRef idx="3">
+            <a:schemeClr val="accent1"/>
+          </a:fillRef>
+          <a:effectRef idx="2">
+            <a:schemeClr val="accent1"/>
+          </a:effectRef>
+          <a:fontRef idx="minor">
+            <a:schemeClr val="lt1"/>
+          </a:fontRef>
+        </p:style>
+        <p:txBody>
+          <a:bodyPr rtlCol="0" anchor="ctr"/>
+          <a:lstStyle/>
+          <a:p>
+            <a:pPr algn="ctr"/>
+          </a:p>
+        </p:txBody>
+      </p:sp>
+      <p:sp>
+        <p:nvSpPr>
+          <p:cNvPr id="4" name="TextBox 3"/>
+          <p:cNvSpPr txBox="1"/>
+          <p:nvPr/>
+        </p:nvSpPr>
+        <p:spPr>
+          <a:xfrm>
+            <a:off x="731520" y="164592"/>
+            <a:ext cx="8412480" cy="685800"/>
           </a:xfrm>
           <a:prstGeom prst="rect">
             <a:avLst/>
@@ -3344,28 +7796,28 @@
           <a:lstStyle/>
           <a:p>
             <a:pPr>
-              <a:defRPr b="1" sz="2400">
+              <a:defRPr b="1" sz="2300">
                 <a:solidFill>
                   <a:srgbClr val="F8FAFC"/>
                 </a:solidFill>
               </a:defRPr>
             </a:pPr>
             <a:r>
-              <a:t>4.1 Network Management: SNMP Architecture</a:t>
-            </a:r>
-          </a:p>
-        </p:txBody>
-      </p:sp>
-      <p:sp>
-        <p:nvSpPr>
-          <p:cNvPr id="4" name="TextBox 3"/>
+              <a:t>4.6.2 Unguided Media (Wireless) &amp; Satellite Orbits</a:t>
+            </a:r>
+          </a:p>
+        </p:txBody>
+      </p:sp>
+      <p:sp>
+        <p:nvSpPr>
+          <p:cNvPr id="5" name="TextBox 4"/>
           <p:cNvSpPr txBox="1"/>
           <p:nvPr/>
         </p:nvSpPr>
         <p:spPr>
           <a:xfrm>
-            <a:off x="8686800" y="137160"/>
-            <a:ext cx="2926080" cy="731520"/>
+            <a:off x="8229600" y="164592"/>
+            <a:ext cx="3291840" cy="685800"/>
           </a:xfrm>
           <a:prstGeom prst="rect">
             <a:avLst/>
@@ -3381,26 +7833,26 @@
             <a:pPr algn="r">
               <a:defRPr b="1" sz="1300">
                 <a:solidFill>
-                  <a:srgbClr val="F59E0B"/>
-                </a:solidFill>
-              </a:defRPr>
-            </a:pPr>
-            <a:r>
-              <a:t>MODULE 4</a:t>
-            </a:r>
-          </a:p>
-        </p:txBody>
-      </p:sp>
-      <p:sp>
-        <p:nvSpPr>
-          <p:cNvPr id="5" name="TextBox 4"/>
+                  <a:srgbClr val="D97706"/>
+                </a:solidFill>
+              </a:defRPr>
+            </a:pPr>
+            <a:r>
+              <a:t>M4.6 UNGUIDED &amp; SATELLITES</a:t>
+            </a:r>
+          </a:p>
+        </p:txBody>
+      </p:sp>
+      <p:sp>
+        <p:nvSpPr>
+          <p:cNvPr id="6" name="TextBox 5"/>
           <p:cNvSpPr txBox="1"/>
           <p:nvPr/>
         </p:nvSpPr>
         <p:spPr>
           <a:xfrm>
             <a:off x="731520" y="1280160"/>
-            <a:ext cx="6858000" cy="5029200"/>
+            <a:ext cx="6858000" cy="4937760"/>
           </a:xfrm>
           <a:prstGeom prst="rect">
             <a:avLst/>
@@ -3415,134 +7867,194 @@
           <a:p>
             <a:pPr>
               <a:spcAft>
-                <a:spcPts val="400"/>
-              </a:spcAft>
-              <a:defRPr b="1" sz="1600">
-                <a:solidFill>
-                  <a:srgbClr val="1E3A8A"/>
-                </a:solidFill>
-              </a:defRPr>
-            </a:pPr>
-            <a:r>
-              <a:t>• Network Management Framework: </a:t>
-            </a:r>
-          </a:p>
-          <a:p>
-            <a:pPr>
-              <a:spcAft>
-                <a:spcPts val="1000"/>
-              </a:spcAft>
-              <a:defRPr sz="1400">
-                <a:solidFill>
-                  <a:srgbClr val="1E293B"/>
-                </a:solidFill>
-              </a:defRPr>
-            </a:pPr>
-            <a:r>
-              <a:t>   Managing Entity (Manager / NMS), Managed Device (Agent), Management Information Base (MIB), Protocol (SNMP).</a:t>
-            </a:r>
-          </a:p>
-          <a:p>
-            <a:pPr>
-              <a:spcAft>
-                <a:spcPts val="400"/>
-              </a:spcAft>
-              <a:defRPr b="1" sz="1600">
-                <a:solidFill>
-                  <a:srgbClr val="1E3A8A"/>
-                </a:solidFill>
-              </a:defRPr>
-            </a:pPr>
-            <a:r>
-              <a:t>• SNMP Operations (UDP Port 161/162): </a:t>
-            </a:r>
-          </a:p>
-          <a:p>
-            <a:pPr>
-              <a:spcAft>
-                <a:spcPts val="1000"/>
-              </a:spcAft>
-              <a:defRPr sz="1400">
-                <a:solidFill>
-                  <a:srgbClr val="1E293B"/>
-                </a:solidFill>
-              </a:defRPr>
-            </a:pPr>
-            <a:r>
-              <a:t>   `GetRequest`, `GetNextRequest`, `GetBulkRequest` (fetch MIB data), `SetRequest` (configure device), `Response`, `Trap` (unsolicited alert), `InformRequest`.</a:t>
-            </a:r>
-          </a:p>
-          <a:p>
-            <a:pPr>
-              <a:spcAft>
-                <a:spcPts val="400"/>
-              </a:spcAft>
-              <a:defRPr b="1" sz="1600">
-                <a:solidFill>
-                  <a:srgbClr val="1E3A8A"/>
-                </a:solidFill>
-              </a:defRPr>
-            </a:pPr>
-            <a:r>
-              <a:t>• SNMP Versions: </a:t>
-            </a:r>
-          </a:p>
-          <a:p>
-            <a:pPr>
-              <a:spcAft>
-                <a:spcPts val="1000"/>
-              </a:spcAft>
-              <a:defRPr sz="1400">
-                <a:solidFill>
-                  <a:srgbClr val="1E293B"/>
-                </a:solidFill>
-              </a:defRPr>
-            </a:pPr>
-            <a:r>
-              <a:t>   SNMPv1 (Community strings in plaintext), SNMPv2c (GetBulkRequest, 64-bit counters), SNMPv3 (USM Security: Auth with MD5/SHA, Encryption with DES/AES, VACM Access Control).</a:t>
-            </a:r>
-          </a:p>
-          <a:p>
-            <a:pPr>
-              <a:spcAft>
-                <a:spcPts val="400"/>
-              </a:spcAft>
-              <a:defRPr b="1" sz="1600">
-                <a:solidFill>
-                  <a:srgbClr val="1E3A8A"/>
-                </a:solidFill>
-              </a:defRPr>
-            </a:pPr>
-            <a:r>
-              <a:t>• Structure of Management Information (SMI): </a:t>
-            </a:r>
-          </a:p>
-          <a:p>
-            <a:pPr>
-              <a:spcAft>
-                <a:spcPts val="1000"/>
-              </a:spcAft>
-              <a:defRPr sz="1400">
-                <a:solidFill>
-                  <a:srgbClr val="1E293B"/>
-                </a:solidFill>
-              </a:defRPr>
-            </a:pPr>
-            <a:r>
-              <a:t>   Defines rules for naming objects, data types, and constructing MIB tables.</a:t>
-            </a:r>
-          </a:p>
-        </p:txBody>
-      </p:sp>
-      <p:sp>
-        <p:nvSpPr>
-          <p:cNvPr id="6" name="Rounded Rectangle 5"/>
+                <a:spcPts val="200"/>
+              </a:spcAft>
+              <a:defRPr b="1" sz="1500">
+                <a:solidFill>
+                  <a:srgbClr val="0F1E4A"/>
+                </a:solidFill>
+              </a:defRPr>
+            </a:pPr>
+            <a:r>
+              <a:t>• Radio Waves (3 kHz to 1 GHz)</a:t>
+            </a:r>
+          </a:p>
+          <a:p>
+            <a:pPr>
+              <a:spcAft>
+                <a:spcPts val="800"/>
+              </a:spcAft>
+              <a:defRPr sz="1300">
+                <a:solidFill>
+                  <a:srgbClr val="1E293B"/>
+                </a:solidFill>
+              </a:defRPr>
+            </a:pPr>
+            <a:r>
+              <a:t>   Omnidirectional propagation (signals travel in all directions). Penetrates building walls easily. Used for AM/FM radio, cordless phones, and VHF television.</a:t>
+            </a:r>
+          </a:p>
+          <a:p>
+            <a:pPr>
+              <a:spcAft>
+                <a:spcPts val="200"/>
+              </a:spcAft>
+              <a:defRPr b="1" sz="1500">
+                <a:solidFill>
+                  <a:srgbClr val="0F1E4A"/>
+                </a:solidFill>
+              </a:defRPr>
+            </a:pPr>
+            <a:r>
+              <a:t>• Microwaves (1 GHz to 300 GHz)</a:t>
+            </a:r>
+          </a:p>
+          <a:p>
+            <a:pPr>
+              <a:spcAft>
+                <a:spcPts val="800"/>
+              </a:spcAft>
+              <a:defRPr sz="1300">
+                <a:solidFill>
+                  <a:srgbClr val="1E293B"/>
+                </a:solidFill>
+              </a:defRPr>
+            </a:pPr>
+            <a:r>
+              <a:t>   Directional line-of-sight propagation using parabolic dish antennas. Cannot penetrate walls effectively; subject to rain attenuation (Used for terrestrial towers, radar, satellite).</a:t>
+            </a:r>
+          </a:p>
+          <a:p>
+            <a:pPr>
+              <a:spcAft>
+                <a:spcPts val="200"/>
+              </a:spcAft>
+              <a:defRPr b="1" sz="1500">
+                <a:solidFill>
+                  <a:srgbClr val="0F1E4A"/>
+                </a:solidFill>
+              </a:defRPr>
+            </a:pPr>
+            <a:r>
+              <a:t>• Infrared (300 GHz to 400 THz)</a:t>
+            </a:r>
+          </a:p>
+          <a:p>
+            <a:pPr>
+              <a:spcAft>
+                <a:spcPts val="800"/>
+              </a:spcAft>
+              <a:defRPr sz="1300">
+                <a:solidFill>
+                  <a:srgbClr val="1E293B"/>
+                </a:solidFill>
+              </a:defRPr>
+            </a:pPr>
+            <a:r>
+              <a:t>   High-frequency line-of-sight; cannot penetrate solid walls (prevents eavesdropping). Used for short-range TV remotes and wireless peripherals.</a:t>
+            </a:r>
+          </a:p>
+          <a:p>
+            <a:pPr>
+              <a:spcAft>
+                <a:spcPts val="200"/>
+              </a:spcAft>
+              <a:defRPr b="1" sz="1500">
+                <a:solidFill>
+                  <a:srgbClr val="0F1E4A"/>
+                </a:solidFill>
+              </a:defRPr>
+            </a:pPr>
+            <a:r>
+              <a:t>• Geostationary Earth Orbit (GEO ~35,786 km)</a:t>
+            </a:r>
+          </a:p>
+          <a:p>
+            <a:pPr>
+              <a:spcAft>
+                <a:spcPts val="800"/>
+              </a:spcAft>
+              <a:defRPr sz="1300">
+                <a:solidFill>
+                  <a:srgbClr val="1E293B"/>
+                </a:solidFill>
+              </a:defRPr>
+            </a:pPr>
+            <a:r>
+              <a:t>   Orbital period matches Earth's rotation (24 hrs); fixed position above equator. High propagation delay (~250 ms one-way RTT $\approx 500$ ms).</a:t>
+            </a:r>
+          </a:p>
+          <a:p>
+            <a:pPr>
+              <a:spcAft>
+                <a:spcPts val="200"/>
+              </a:spcAft>
+              <a:defRPr b="1" sz="1500">
+                <a:solidFill>
+                  <a:srgbClr val="0F1E4A"/>
+                </a:solidFill>
+              </a:defRPr>
+            </a:pPr>
+            <a:r>
+              <a:t>• Medium Earth Orbit (MEO ~2,000 to 20,000 km)</a:t>
+            </a:r>
+          </a:p>
+          <a:p>
+            <a:pPr>
+              <a:spcAft>
+                <a:spcPts val="800"/>
+              </a:spcAft>
+              <a:defRPr sz="1300">
+                <a:solidFill>
+                  <a:srgbClr val="1E293B"/>
+                </a:solidFill>
+              </a:defRPr>
+            </a:pPr>
+            <a:r>
+              <a:t>   Used by GPS constellations (24 satellites at ~20,200 km).</a:t>
+            </a:r>
+          </a:p>
+          <a:p>
+            <a:pPr>
+              <a:spcAft>
+                <a:spcPts val="200"/>
+              </a:spcAft>
+              <a:defRPr b="1" sz="1500">
+                <a:solidFill>
+                  <a:srgbClr val="0F1E4A"/>
+                </a:solidFill>
+              </a:defRPr>
+            </a:pPr>
+            <a:r>
+              <a:t>• Low Earth Orbit (LEO ~500 to 1,500 km)</a:t>
+            </a:r>
+          </a:p>
+          <a:p>
+            <a:pPr>
+              <a:spcAft>
+                <a:spcPts val="800"/>
+              </a:spcAft>
+              <a:defRPr sz="1300">
+                <a:solidFill>
+                  <a:srgbClr val="1E293B"/>
+                </a:solidFill>
+              </a:defRPr>
+            </a:pPr>
+            <a:r>
+              <a:t>   Low propagation delay (~20-40 ms RTT); requires mega-constellations of thousands of satellites (e.g. Starlink, OneWeb).</a:t>
+            </a:r>
+          </a:p>
+        </p:txBody>
+      </p:sp>
+      <p:sp>
+        <p:nvSpPr>
+          <p:cNvPr id="7" name="Rounded Rectangle 6"/>
           <p:cNvSpPr/>
           <p:nvPr/>
         </p:nvSpPr>
         <p:spPr>
           <a:xfrm>
-            <a:off x="7955279" y="1371600"/>
+            <a:off x="7955279" y="1280160"/>
             <a:ext cx="3566160" cy="4846320"/>
           </a:xfrm>
           <a:prstGeom prst="roundRect">
@@ -3581,14 +8093,14 @@
       </p:sp>
       <p:sp>
         <p:nvSpPr>
-          <p:cNvPr id="7" name="TextBox 6"/>
+          <p:cNvPr id="8" name="TextBox 7"/>
           <p:cNvSpPr txBox="1"/>
           <p:nvPr/>
         </p:nvSpPr>
         <p:spPr>
           <a:xfrm>
-            <a:off x="8138160" y="1554480"/>
-            <a:ext cx="3200400" cy="4480560"/>
+            <a:off x="8138160" y="1417320"/>
+            <a:ext cx="3200400" cy="4572000"/>
           </a:xfrm>
           <a:prstGeom prst="rect">
             <a:avLst/>
@@ -3603,68 +8115,83 @@
           <a:p>
             <a:pPr>
               <a:spcAft>
-                <a:spcPts val="1200"/>
-              </a:spcAft>
-              <a:defRPr b="1" sz="1600">
+                <a:spcPts val="1000"/>
+              </a:spcAft>
+              <a:defRPr b="1" sz="1500">
                 <a:solidFill>
                   <a:srgbClr val="0E7490"/>
                 </a:solidFill>
               </a:defRPr>
             </a:pPr>
             <a:r>
-              <a:t>SNMP Ports</a:t>
-            </a:r>
-          </a:p>
-          <a:p>
-            <a:pPr>
-              <a:spcAft>
-                <a:spcPts val="800"/>
-              </a:spcAft>
-              <a:defRPr sz="1300">
-                <a:solidFill>
-                  <a:srgbClr val="1E293B"/>
-                </a:solidFill>
-              </a:defRPr>
-            </a:pPr>
-            <a:r>
-              <a:t>→ Port 161 UDP: Manager to Agent (Get/Set)</a:t>
-            </a:r>
-          </a:p>
-          <a:p>
-            <a:pPr>
-              <a:spcAft>
-                <a:spcPts val="800"/>
-              </a:spcAft>
-              <a:defRPr sz="1300">
-                <a:solidFill>
-                  <a:srgbClr val="1E293B"/>
-                </a:solidFill>
-              </a:defRPr>
-            </a:pPr>
-            <a:r>
-              <a:t>→ Port 162 UDP: Agent to Manager (Trap/Inform)</a:t>
-            </a:r>
-          </a:p>
-          <a:p>
-            <a:pPr>
-              <a:spcAft>
-                <a:spcPts val="800"/>
-              </a:spcAft>
-              <a:defRPr sz="1300">
-                <a:solidFill>
-                  <a:srgbClr val="1E293B"/>
-                </a:solidFill>
-              </a:defRPr>
-            </a:pPr>
-            <a:r>
-              <a:t>→ SNMPv3 provides Confidentiality, Integrity, Authentication</a:t>
-            </a:r>
-          </a:p>
-        </p:txBody>
-      </p:sp>
-      <p:sp>
-        <p:nvSpPr>
-          <p:cNvPr id="8" name="TextBox 7"/>
+              <a:t>Satellite Orbits</a:t>
+            </a:r>
+          </a:p>
+          <a:p>
+            <a:pPr>
+              <a:spcAft>
+                <a:spcPts val="600"/>
+              </a:spcAft>
+              <a:defRPr sz="1200">
+                <a:solidFill>
+                  <a:srgbClr val="1E293B"/>
+                </a:solidFill>
+              </a:defRPr>
+            </a:pPr>
+            <a:r>
+              <a:t>→ GEO: 35,786 km (High delay ~500ms)</a:t>
+            </a:r>
+          </a:p>
+          <a:p>
+            <a:pPr>
+              <a:spcAft>
+                <a:spcPts val="600"/>
+              </a:spcAft>
+              <a:defRPr sz="1200">
+                <a:solidFill>
+                  <a:srgbClr val="1E293B"/>
+                </a:solidFill>
+              </a:defRPr>
+            </a:pPr>
+            <a:r>
+              <a:t>→ MEO: 20,200 km (GPS navigation)</a:t>
+            </a:r>
+          </a:p>
+          <a:p>
+            <a:pPr>
+              <a:spcAft>
+                <a:spcPts val="600"/>
+              </a:spcAft>
+              <a:defRPr sz="1200">
+                <a:solidFill>
+                  <a:srgbClr val="1E293B"/>
+                </a:solidFill>
+              </a:defRPr>
+            </a:pPr>
+            <a:r>
+              <a:t>→ LEO: 500-1500 km (Low latency broadband)</a:t>
+            </a:r>
+          </a:p>
+          <a:p>
+            <a:pPr>
+              <a:spcAft>
+                <a:spcPts val="600"/>
+              </a:spcAft>
+              <a:defRPr sz="1200">
+                <a:solidFill>
+                  <a:srgbClr val="1E293B"/>
+                </a:solidFill>
+              </a:defRPr>
+            </a:pPr>
+            <a:r>
+              <a:t>→ All KTU CO5 Topics Covered</a:t>
+            </a:r>
+          </a:p>
+        </p:txBody>
+      </p:sp>
+      <p:sp>
+        <p:nvSpPr>
+          <p:cNvPr id="9" name="TextBox 8"/>
           <p:cNvSpPr txBox="1"/>
           <p:nvPr/>
         </p:nvSpPr>
@@ -3685,14 +8212,14 @@
           <a:lstStyle/>
           <a:p>
             <a:pPr>
-              <a:defRPr sz="1000">
+              <a:defRPr sz="950">
                 <a:solidFill>
                   <a:srgbClr val="64748B"/>
                 </a:solidFill>
               </a:defRPr>
             </a:pPr>
             <a:r>
-              <a:t>PCCST501 Computer Networks | VJCET Dept of CSE | Prepared by Prof. Anju Markose</a:t>
+              <a:t>PCCST501 Computer Networks | KTU 2024 Scheme | Prof. Anju Markose | Assistant Professor, Dept. of CSE | VJCET</a:t>
             </a:r>
           </a:p>
         </p:txBody>
@@ -3730,7 +8257,7 @@
             <a:avLst/>
           </a:prstGeom>
           <a:solidFill>
-            <a:srgbClr val="1E3A8A"/>
+            <a:srgbClr val="0F1E4A"/>
           </a:solidFill>
           <a:ln>
             <a:noFill/>
@@ -3760,14 +8287,57 @@
       </p:sp>
       <p:sp>
         <p:nvSpPr>
-          <p:cNvPr id="3" name="TextBox 2"/>
+          <p:cNvPr id="3" name="Rectangle 2"/>
+          <p:cNvSpPr/>
+          <p:nvPr/>
+        </p:nvSpPr>
+        <p:spPr>
+          <a:xfrm>
+            <a:off x="0" y="969264"/>
+            <a:ext cx="12191695" cy="36576"/>
+          </a:xfrm>
+          <a:prstGeom prst="rect">
+            <a:avLst/>
+          </a:prstGeom>
+          <a:solidFill>
+            <a:srgbClr val="D97706"/>
+          </a:solidFill>
+          <a:ln>
+            <a:noFill/>
+          </a:ln>
+        </p:spPr>
+        <p:style>
+          <a:lnRef idx="1">
+            <a:schemeClr val="accent1"/>
+          </a:lnRef>
+          <a:fillRef idx="3">
+            <a:schemeClr val="accent1"/>
+          </a:fillRef>
+          <a:effectRef idx="2">
+            <a:schemeClr val="accent1"/>
+          </a:effectRef>
+          <a:fontRef idx="minor">
+            <a:schemeClr val="lt1"/>
+          </a:fontRef>
+        </p:style>
+        <p:txBody>
+          <a:bodyPr rtlCol="0" anchor="ctr"/>
+          <a:lstStyle/>
+          <a:p>
+            <a:pPr algn="ctr"/>
+          </a:p>
+        </p:txBody>
+      </p:sp>
+      <p:sp>
+        <p:nvSpPr>
+          <p:cNvPr id="4" name="TextBox 3"/>
           <p:cNvSpPr txBox="1"/>
           <p:nvPr/>
         </p:nvSpPr>
         <p:spPr>
           <a:xfrm>
-            <a:off x="731520" y="137160"/>
-            <a:ext cx="8686800" cy="731520"/>
+            <a:off x="731520" y="164592"/>
+            <a:ext cx="8412480" cy="685800"/>
           </a:xfrm>
           <a:prstGeom prst="rect">
             <a:avLst/>
@@ -3781,28 +8351,28 @@
           <a:lstStyle/>
           <a:p>
             <a:pPr>
-              <a:defRPr b="1" sz="2400">
+              <a:defRPr b="1" sz="2300">
                 <a:solidFill>
                   <a:srgbClr val="F8FAFC"/>
                 </a:solidFill>
               </a:defRPr>
             </a:pPr>
             <a:r>
-              <a:t>4.2 Abstract Syntax Notation One (ASN.1) &amp; MIB</a:t>
-            </a:r>
-          </a:p>
-        </p:txBody>
-      </p:sp>
-      <p:sp>
-        <p:nvSpPr>
-          <p:cNvPr id="4" name="TextBox 3"/>
+              <a:t>4.1.1 Network Management Framework Components</a:t>
+            </a:r>
+          </a:p>
+        </p:txBody>
+      </p:sp>
+      <p:sp>
+        <p:nvSpPr>
+          <p:cNvPr id="5" name="TextBox 4"/>
           <p:cNvSpPr txBox="1"/>
           <p:nvPr/>
         </p:nvSpPr>
         <p:spPr>
           <a:xfrm>
-            <a:off x="8686800" y="137160"/>
-            <a:ext cx="2926080" cy="731520"/>
+            <a:off x="8229600" y="164592"/>
+            <a:ext cx="3291840" cy="685800"/>
           </a:xfrm>
           <a:prstGeom prst="rect">
             <a:avLst/>
@@ -3818,26 +8388,26 @@
             <a:pPr algn="r">
               <a:defRPr b="1" sz="1300">
                 <a:solidFill>
-                  <a:srgbClr val="F59E0B"/>
-                </a:solidFill>
-              </a:defRPr>
-            </a:pPr>
-            <a:r>
-              <a:t>MODULE 4</a:t>
-            </a:r>
-          </a:p>
-        </p:txBody>
-      </p:sp>
-      <p:sp>
-        <p:nvSpPr>
-          <p:cNvPr id="5" name="TextBox 4"/>
+                  <a:srgbClr val="D97706"/>
+                </a:solidFill>
+              </a:defRPr>
+            </a:pPr>
+            <a:r>
+              <a:t>M4.1 SNMP FRAMEWORK</a:t>
+            </a:r>
+          </a:p>
+        </p:txBody>
+      </p:sp>
+      <p:sp>
+        <p:nvSpPr>
+          <p:cNvPr id="6" name="TextBox 5"/>
           <p:cNvSpPr txBox="1"/>
           <p:nvPr/>
         </p:nvSpPr>
         <p:spPr>
           <a:xfrm>
             <a:off x="731520" y="1280160"/>
-            <a:ext cx="6858000" cy="5029200"/>
+            <a:ext cx="6858000" cy="4937760"/>
           </a:xfrm>
           <a:prstGeom prst="rect">
             <a:avLst/>
@@ -3852,164 +8422,164 @@
           <a:p>
             <a:pPr>
               <a:spcAft>
-                <a:spcPts val="400"/>
-              </a:spcAft>
-              <a:defRPr b="1" sz="1600">
-                <a:solidFill>
-                  <a:srgbClr val="1E3A8A"/>
-                </a:solidFill>
-              </a:defRPr>
-            </a:pPr>
-            <a:r>
-              <a:t>• Role of ASN.1: </a:t>
-            </a:r>
-          </a:p>
-          <a:p>
-            <a:pPr>
-              <a:spcAft>
-                <a:spcPts val="1000"/>
-              </a:spcAft>
-              <a:defRPr sz="1400">
-                <a:solidFill>
-                  <a:srgbClr val="1E293B"/>
-                </a:solidFill>
-              </a:defRPr>
-            </a:pPr>
-            <a:r>
-              <a:t>   Standard formal language to define data types and structures independently of hardware architecture.</a:t>
-            </a:r>
-          </a:p>
-          <a:p>
-            <a:pPr>
-              <a:spcAft>
-                <a:spcPts val="400"/>
-              </a:spcAft>
-              <a:defRPr b="1" sz="1600">
-                <a:solidFill>
-                  <a:srgbClr val="1E3A8A"/>
-                </a:solidFill>
-              </a:defRPr>
-            </a:pPr>
-            <a:r>
-              <a:t>• Basic ASN.1 Data Types: </a:t>
-            </a:r>
-          </a:p>
-          <a:p>
-            <a:pPr>
-              <a:spcAft>
-                <a:spcPts val="1000"/>
-              </a:spcAft>
-              <a:defRPr sz="1400">
-                <a:solidFill>
-                  <a:srgbClr val="1E293B"/>
-                </a:solidFill>
-              </a:defRPr>
-            </a:pPr>
-            <a:r>
-              <a:t>   Primitive: `INTEGER`, `OCTET STRING`, `OBJECT IDENTIFIER`, `BOOLEAN`, `NULL`. Constructed: `SEQUENCE`, `SEQUENCE OF`, `CHOICE`.</a:t>
-            </a:r>
-          </a:p>
-          <a:p>
-            <a:pPr>
-              <a:spcAft>
-                <a:spcPts val="400"/>
-              </a:spcAft>
-              <a:defRPr b="1" sz="1600">
-                <a:solidFill>
-                  <a:srgbClr val="1E3A8A"/>
-                </a:solidFill>
-              </a:defRPr>
-            </a:pPr>
-            <a:r>
-              <a:t>• Basic Encoding Rules (BER): </a:t>
-            </a:r>
-          </a:p>
-          <a:p>
-            <a:pPr>
-              <a:spcAft>
-                <a:spcPts val="1000"/>
-              </a:spcAft>
-              <a:defRPr sz="1400">
-                <a:solidFill>
-                  <a:srgbClr val="1E293B"/>
-                </a:solidFill>
-              </a:defRPr>
-            </a:pPr>
-            <a:r>
-              <a:t>   TLV (Type-Length-Value) format for serializing ASN.1 data onto network wire.</a:t>
-            </a:r>
-          </a:p>
-          <a:p>
-            <a:pPr>
-              <a:spcAft>
-                <a:spcPts val="400"/>
-              </a:spcAft>
-              <a:defRPr b="1" sz="1600">
-                <a:solidFill>
-                  <a:srgbClr val="1E3A8A"/>
-                </a:solidFill>
-              </a:defRPr>
-            </a:pPr>
-            <a:r>
-              <a:t>• Management Information Base (MIB-2): </a:t>
-            </a:r>
-          </a:p>
-          <a:p>
-            <a:pPr>
-              <a:spcAft>
-                <a:spcPts val="1000"/>
-              </a:spcAft>
-              <a:defRPr sz="1400">
-                <a:solidFill>
-                  <a:srgbClr val="1E293B"/>
-                </a:solidFill>
-              </a:defRPr>
-            </a:pPr>
-            <a:r>
-              <a:t>   Hierarchical tree structure of manageable objects. Standard root: `iso.org.dod.internet.mgmt.mib-2` (`1.3.6.1.2.1`).</a:t>
-            </a:r>
-          </a:p>
-          <a:p>
-            <a:pPr>
-              <a:spcAft>
-                <a:spcPts val="400"/>
-              </a:spcAft>
-              <a:defRPr b="1" sz="1600">
-                <a:solidFill>
-                  <a:srgbClr val="1E3A8A"/>
-                </a:solidFill>
-              </a:defRPr>
-            </a:pPr>
-            <a:r>
-              <a:t>• Object Identifier (OID): </a:t>
-            </a:r>
-          </a:p>
-          <a:p>
-            <a:pPr>
-              <a:spcAft>
-                <a:spcPts val="1000"/>
-              </a:spcAft>
-              <a:defRPr sz="1400">
-                <a:solidFill>
-                  <a:srgbClr val="1E293B"/>
-                </a:solidFill>
-              </a:defRPr>
-            </a:pPr>
-            <a:r>
-              <a:t>   Dotted numerical path locating node in MIB tree. E.g., `sysDescr` = `1.3.6.1.2.1.1.1`.</a:t>
-            </a:r>
-          </a:p>
-        </p:txBody>
-      </p:sp>
-      <p:sp>
-        <p:nvSpPr>
-          <p:cNvPr id="6" name="Rounded Rectangle 5"/>
+                <a:spcPts val="200"/>
+              </a:spcAft>
+              <a:defRPr b="1" sz="1500">
+                <a:solidFill>
+                  <a:srgbClr val="0F1E4A"/>
+                </a:solidFill>
+              </a:defRPr>
+            </a:pPr>
+            <a:r>
+              <a:t>• Network Management Framework</a:t>
+            </a:r>
+          </a:p>
+          <a:p>
+            <a:pPr>
+              <a:spcAft>
+                <a:spcPts val="800"/>
+              </a:spcAft>
+              <a:defRPr sz="1300">
+                <a:solidFill>
+                  <a:srgbClr val="1E293B"/>
+                </a:solidFill>
+              </a:defRPr>
+            </a:pPr>
+            <a:r>
+              <a:t>   Consists of 4 fundamental components: Managing Entity, Managed Devices, Management Agents, and Management Information Base.</a:t>
+            </a:r>
+          </a:p>
+          <a:p>
+            <a:pPr>
+              <a:spcAft>
+                <a:spcPts val="200"/>
+              </a:spcAft>
+              <a:defRPr b="1" sz="1500">
+                <a:solidFill>
+                  <a:srgbClr val="0F1E4A"/>
+                </a:solidFill>
+              </a:defRPr>
+            </a:pPr>
+            <a:r>
+              <a:t>• Managing Entity (NMS - Network Management System)</a:t>
+            </a:r>
+          </a:p>
+          <a:p>
+            <a:pPr>
+              <a:spcAft>
+                <a:spcPts val="800"/>
+              </a:spcAft>
+              <a:defRPr sz="1300">
+                <a:solidFill>
+                  <a:srgbClr val="1E293B"/>
+                </a:solidFill>
+              </a:defRPr>
+            </a:pPr>
+            <a:r>
+              <a:t>   Central workstation executing network management applications. Polls agents, receives alerts, and presents graphical dashboards.</a:t>
+            </a:r>
+          </a:p>
+          <a:p>
+            <a:pPr>
+              <a:spcAft>
+                <a:spcPts val="200"/>
+              </a:spcAft>
+              <a:defRPr b="1" sz="1500">
+                <a:solidFill>
+                  <a:srgbClr val="0F1E4A"/>
+                </a:solidFill>
+              </a:defRPr>
+            </a:pPr>
+            <a:r>
+              <a:t>• Managed Device &amp; Agent</a:t>
+            </a:r>
+          </a:p>
+          <a:p>
+            <a:pPr>
+              <a:spcAft>
+                <a:spcPts val="800"/>
+              </a:spcAft>
+              <a:defRPr sz="1300">
+                <a:solidFill>
+                  <a:srgbClr val="1E293B"/>
+                </a:solidFill>
+              </a:defRPr>
+            </a:pPr>
+            <a:r>
+              <a:t>   Routers, switches, servers running an SNMP Management Agent software module that collects local operational metrics and executes configuration commands.</a:t>
+            </a:r>
+          </a:p>
+          <a:p>
+            <a:pPr>
+              <a:spcAft>
+                <a:spcPts val="200"/>
+              </a:spcAft>
+              <a:defRPr b="1" sz="1500">
+                <a:solidFill>
+                  <a:srgbClr val="0F1E4A"/>
+                </a:solidFill>
+              </a:defRPr>
+            </a:pPr>
+            <a:r>
+              <a:t>• Management Information Base (MIB)</a:t>
+            </a:r>
+          </a:p>
+          <a:p>
+            <a:pPr>
+              <a:spcAft>
+                <a:spcPts val="800"/>
+              </a:spcAft>
+              <a:defRPr sz="1300">
+                <a:solidFill>
+                  <a:srgbClr val="1E293B"/>
+                </a:solidFill>
+              </a:defRPr>
+            </a:pPr>
+            <a:r>
+              <a:t>   Hierarchical structured collection of managed object variables maintained inside each device (e.g., packets transmitted, CPU utilization, interface status).</a:t>
+            </a:r>
+          </a:p>
+          <a:p>
+            <a:pPr>
+              <a:spcAft>
+                <a:spcPts val="200"/>
+              </a:spcAft>
+              <a:defRPr b="1" sz="1500">
+                <a:solidFill>
+                  <a:srgbClr val="0F1E4A"/>
+                </a:solidFill>
+              </a:defRPr>
+            </a:pPr>
+            <a:r>
+              <a:t>• UDP Port Protocol Transport</a:t>
+            </a:r>
+          </a:p>
+          <a:p>
+            <a:pPr>
+              <a:spcAft>
+                <a:spcPts val="800"/>
+              </a:spcAft>
+              <a:defRPr sz="1300">
+                <a:solidFill>
+                  <a:srgbClr val="1E293B"/>
+                </a:solidFill>
+              </a:defRPr>
+            </a:pPr>
+            <a:r>
+              <a:t>   SNMP Manager sends requests to Agent on UDP Port 161; Agent sends unsolicited alerts (Traps) to Manager on UDP Port 162.</a:t>
+            </a:r>
+          </a:p>
+        </p:txBody>
+      </p:sp>
+      <p:sp>
+        <p:nvSpPr>
+          <p:cNvPr id="7" name="Rounded Rectangle 6"/>
           <p:cNvSpPr/>
           <p:nvPr/>
         </p:nvSpPr>
         <p:spPr>
           <a:xfrm>
-            <a:off x="7955279" y="1371600"/>
+            <a:off x="7955279" y="1280160"/>
             <a:ext cx="3566160" cy="4846320"/>
           </a:xfrm>
           <a:prstGeom prst="roundRect">
@@ -4048,14 +8618,14 @@
       </p:sp>
       <p:sp>
         <p:nvSpPr>
-          <p:cNvPr id="7" name="TextBox 6"/>
+          <p:cNvPr id="8" name="TextBox 7"/>
           <p:cNvSpPr txBox="1"/>
           <p:nvPr/>
         </p:nvSpPr>
         <p:spPr>
           <a:xfrm>
-            <a:off x="8138160" y="1554480"/>
-            <a:ext cx="3200400" cy="4480560"/>
+            <a:off x="8138160" y="1417320"/>
+            <a:ext cx="3200400" cy="4572000"/>
           </a:xfrm>
           <a:prstGeom prst="rect">
             <a:avLst/>
@@ -4070,83 +8640,98 @@
           <a:p>
             <a:pPr>
               <a:spcAft>
-                <a:spcPts val="1200"/>
-              </a:spcAft>
-              <a:defRPr b="1" sz="1600">
+                <a:spcPts val="1000"/>
+              </a:spcAft>
+              <a:defRPr b="1" sz="1500">
                 <a:solidFill>
                   <a:srgbClr val="0E7490"/>
                 </a:solidFill>
               </a:defRPr>
             </a:pPr>
             <a:r>
-              <a:t>BER TLV Structure</a:t>
-            </a:r>
-          </a:p>
-          <a:p>
-            <a:pPr>
-              <a:spcAft>
-                <a:spcPts val="800"/>
-              </a:spcAft>
-              <a:defRPr sz="1300">
-                <a:solidFill>
-                  <a:srgbClr val="1E293B"/>
-                </a:solidFill>
-              </a:defRPr>
-            </a:pPr>
-            <a:r>
-              <a:t>→ Tag (Type): 1 byte identifier</a:t>
-            </a:r>
-          </a:p>
-          <a:p>
-            <a:pPr>
-              <a:spcAft>
-                <a:spcPts val="800"/>
-              </a:spcAft>
-              <a:defRPr sz="1300">
-                <a:solidFill>
-                  <a:srgbClr val="1E293B"/>
-                </a:solidFill>
-              </a:defRPr>
-            </a:pPr>
-            <a:r>
-              <a:t>→ Length: 1 or more bytes (value length)</a:t>
-            </a:r>
-          </a:p>
-          <a:p>
-            <a:pPr>
-              <a:spcAft>
-                <a:spcPts val="800"/>
-              </a:spcAft>
-              <a:defRPr sz="1300">
-                <a:solidFill>
-                  <a:srgbClr val="1E293B"/>
-                </a:solidFill>
-              </a:defRPr>
-            </a:pPr>
-            <a:r>
-              <a:t>→ Value: Actual payload data bytes</a:t>
-            </a:r>
-          </a:p>
-          <a:p>
-            <a:pPr>
-              <a:spcAft>
-                <a:spcPts val="800"/>
-              </a:spcAft>
-              <a:defRPr sz="1300">
-                <a:solidFill>
-                  <a:srgbClr val="1E293B"/>
-                </a:solidFill>
-              </a:defRPr>
-            </a:pPr>
-            <a:r>
-              <a:t>→ Example: INTEGER 5 -&gt; 02 01 05</a:t>
-            </a:r>
-          </a:p>
-        </p:txBody>
-      </p:sp>
-      <p:sp>
-        <p:nvSpPr>
-          <p:cNvPr id="8" name="TextBox 7"/>
+              <a:t>SNMP Core Elements</a:t>
+            </a:r>
+          </a:p>
+          <a:p>
+            <a:pPr>
+              <a:spcAft>
+                <a:spcPts val="600"/>
+              </a:spcAft>
+              <a:defRPr sz="1200">
+                <a:solidFill>
+                  <a:srgbClr val="1E293B"/>
+                </a:solidFill>
+              </a:defRPr>
+            </a:pPr>
+            <a:r>
+              <a:t>→ NMS: Central manager console</a:t>
+            </a:r>
+          </a:p>
+          <a:p>
+            <a:pPr>
+              <a:spcAft>
+                <a:spcPts val="600"/>
+              </a:spcAft>
+              <a:defRPr sz="1200">
+                <a:solidFill>
+                  <a:srgbClr val="1E293B"/>
+                </a:solidFill>
+              </a:defRPr>
+            </a:pPr>
+            <a:r>
+              <a:t>→ Agent: Software on managed node</a:t>
+            </a:r>
+          </a:p>
+          <a:p>
+            <a:pPr>
+              <a:spcAft>
+                <a:spcPts val="600"/>
+              </a:spcAft>
+              <a:defRPr sz="1200">
+                <a:solidFill>
+                  <a:srgbClr val="1E293B"/>
+                </a:solidFill>
+              </a:defRPr>
+            </a:pPr>
+            <a:r>
+              <a:t>→ MIB: Device database variables</a:t>
+            </a:r>
+          </a:p>
+          <a:p>
+            <a:pPr>
+              <a:spcAft>
+                <a:spcPts val="600"/>
+              </a:spcAft>
+              <a:defRPr sz="1200">
+                <a:solidFill>
+                  <a:srgbClr val="1E293B"/>
+                </a:solidFill>
+              </a:defRPr>
+            </a:pPr>
+            <a:r>
+              <a:t>→ Port 161 UDP: Requests (Get/Set)</a:t>
+            </a:r>
+          </a:p>
+          <a:p>
+            <a:pPr>
+              <a:spcAft>
+                <a:spcPts val="600"/>
+              </a:spcAft>
+              <a:defRPr sz="1200">
+                <a:solidFill>
+                  <a:srgbClr val="1E293B"/>
+                </a:solidFill>
+              </a:defRPr>
+            </a:pPr>
+            <a:r>
+              <a:t>→ Port 162 UDP: Alerts (Traps/Inform)</a:t>
+            </a:r>
+          </a:p>
+        </p:txBody>
+      </p:sp>
+      <p:sp>
+        <p:nvSpPr>
+          <p:cNvPr id="9" name="TextBox 8"/>
           <p:cNvSpPr txBox="1"/>
           <p:nvPr/>
         </p:nvSpPr>
@@ -4167,14 +8752,14 @@
           <a:lstStyle/>
           <a:p>
             <a:pPr>
-              <a:defRPr sz="1000">
+              <a:defRPr sz="950">
                 <a:solidFill>
                   <a:srgbClr val="64748B"/>
                 </a:solidFill>
               </a:defRPr>
             </a:pPr>
             <a:r>
-              <a:t>PCCST501 Computer Networks | VJCET Dept of CSE | Prepared by Prof. Anju Markose</a:t>
+              <a:t>PCCST501 Computer Networks | KTU 2024 Scheme | Prof. Anju Markose | Assistant Professor, Dept. of CSE | VJCET</a:t>
             </a:r>
           </a:p>
         </p:txBody>
@@ -4212,7 +8797,7 @@
             <a:avLst/>
           </a:prstGeom>
           <a:solidFill>
-            <a:srgbClr val="1E3A8A"/>
+            <a:srgbClr val="0F1E4A"/>
           </a:solidFill>
           <a:ln>
             <a:noFill/>
@@ -4242,14 +8827,57 @@
       </p:sp>
       <p:sp>
         <p:nvSpPr>
-          <p:cNvPr id="3" name="TextBox 2"/>
+          <p:cNvPr id="3" name="Rectangle 2"/>
+          <p:cNvSpPr/>
+          <p:nvPr/>
+        </p:nvSpPr>
+        <p:spPr>
+          <a:xfrm>
+            <a:off x="0" y="969264"/>
+            <a:ext cx="12191695" cy="36576"/>
+          </a:xfrm>
+          <a:prstGeom prst="rect">
+            <a:avLst/>
+          </a:prstGeom>
+          <a:solidFill>
+            <a:srgbClr val="D97706"/>
+          </a:solidFill>
+          <a:ln>
+            <a:noFill/>
+          </a:ln>
+        </p:spPr>
+        <p:style>
+          <a:lnRef idx="1">
+            <a:schemeClr val="accent1"/>
+          </a:lnRef>
+          <a:fillRef idx="3">
+            <a:schemeClr val="accent1"/>
+          </a:fillRef>
+          <a:effectRef idx="2">
+            <a:schemeClr val="accent1"/>
+          </a:effectRef>
+          <a:fontRef idx="minor">
+            <a:schemeClr val="lt1"/>
+          </a:fontRef>
+        </p:style>
+        <p:txBody>
+          <a:bodyPr rtlCol="0" anchor="ctr"/>
+          <a:lstStyle/>
+          <a:p>
+            <a:pPr algn="ctr"/>
+          </a:p>
+        </p:txBody>
+      </p:sp>
+      <p:sp>
+        <p:nvSpPr>
+          <p:cNvPr id="4" name="TextBox 3"/>
           <p:cNvSpPr txBox="1"/>
           <p:nvPr/>
         </p:nvSpPr>
         <p:spPr>
           <a:xfrm>
-            <a:off x="731520" y="137160"/>
-            <a:ext cx="8686800" cy="731520"/>
+            <a:off x="731520" y="164592"/>
+            <a:ext cx="8412480" cy="685800"/>
           </a:xfrm>
           <a:prstGeom prst="rect">
             <a:avLst/>
@@ -4263,28 +8891,28 @@
           <a:lstStyle/>
           <a:p>
             <a:pPr>
-              <a:defRPr b="1" sz="2400">
+              <a:defRPr b="1" sz="2300">
                 <a:solidFill>
                   <a:srgbClr val="F8FAFC"/>
                 </a:solidFill>
               </a:defRPr>
             </a:pPr>
             <a:r>
-              <a:t>4.3 Physical Layer: Data, Signals &amp; Capacity Limits</a:t>
-            </a:r>
-          </a:p>
-        </p:txBody>
-      </p:sp>
-      <p:sp>
-        <p:nvSpPr>
-          <p:cNvPr id="4" name="TextBox 3"/>
+              <a:t>4.1.2 SNMP Protocol Operations</a:t>
+            </a:r>
+          </a:p>
+        </p:txBody>
+      </p:sp>
+      <p:sp>
+        <p:nvSpPr>
+          <p:cNvPr id="5" name="TextBox 4"/>
           <p:cNvSpPr txBox="1"/>
           <p:nvPr/>
         </p:nvSpPr>
         <p:spPr>
           <a:xfrm>
-            <a:off x="8686800" y="137160"/>
-            <a:ext cx="2926080" cy="731520"/>
+            <a:off x="8229600" y="164592"/>
+            <a:ext cx="3291840" cy="685800"/>
           </a:xfrm>
           <a:prstGeom prst="rect">
             <a:avLst/>
@@ -4300,26 +8928,26 @@
             <a:pPr algn="r">
               <a:defRPr b="1" sz="1300">
                 <a:solidFill>
-                  <a:srgbClr val="F59E0B"/>
-                </a:solidFill>
-              </a:defRPr>
-            </a:pPr>
-            <a:r>
-              <a:t>MODULE 4</a:t>
-            </a:r>
-          </a:p>
-        </p:txBody>
-      </p:sp>
-      <p:sp>
-        <p:nvSpPr>
-          <p:cNvPr id="5" name="TextBox 4"/>
+                  <a:srgbClr val="D97706"/>
+                </a:solidFill>
+              </a:defRPr>
+            </a:pPr>
+            <a:r>
+              <a:t>M4.1 SNMP OPERATIONS</a:t>
+            </a:r>
+          </a:p>
+        </p:txBody>
+      </p:sp>
+      <p:sp>
+        <p:nvSpPr>
+          <p:cNvPr id="6" name="TextBox 5"/>
           <p:cNvSpPr txBox="1"/>
           <p:nvPr/>
         </p:nvSpPr>
         <p:spPr>
           <a:xfrm>
             <a:off x="731520" y="1280160"/>
-            <a:ext cx="6858000" cy="5029200"/>
+            <a:ext cx="6858000" cy="4937760"/>
           </a:xfrm>
           <a:prstGeom prst="rect">
             <a:avLst/>
@@ -4334,164 +8962,224 @@
           <a:p>
             <a:pPr>
               <a:spcAft>
-                <a:spcPts val="400"/>
-              </a:spcAft>
-              <a:defRPr b="1" sz="1600">
-                <a:solidFill>
-                  <a:srgbClr val="1E3A8A"/>
-                </a:solidFill>
-              </a:defRPr>
-            </a:pPr>
-            <a:r>
-              <a:t>• Analog vs Digital Signals: </a:t>
-            </a:r>
-          </a:p>
-          <a:p>
-            <a:pPr>
-              <a:spcAft>
-                <a:spcPts val="1000"/>
-              </a:spcAft>
-              <a:defRPr sz="1400">
-                <a:solidFill>
-                  <a:srgbClr val="1E293B"/>
-                </a:solidFill>
-              </a:defRPr>
-            </a:pPr>
-            <a:r>
-              <a:t>   Continuous amplitude values over time vs discrete finite levels (binary 0 and 1).</a:t>
-            </a:r>
-          </a:p>
-          <a:p>
-            <a:pPr>
-              <a:spcAft>
-                <a:spcPts val="400"/>
-              </a:spcAft>
-              <a:defRPr b="1" sz="1600">
-                <a:solidFill>
-                  <a:srgbClr val="1E3A8A"/>
-                </a:solidFill>
-              </a:defRPr>
-            </a:pPr>
-            <a:r>
-              <a:t>• Time Domain vs Frequency Domain: </a:t>
-            </a:r>
-          </a:p>
-          <a:p>
-            <a:pPr>
-              <a:spcAft>
-                <a:spcPts val="1000"/>
-              </a:spcAft>
-              <a:defRPr sz="1400">
-                <a:solidFill>
-                  <a:srgbClr val="1E293B"/>
-                </a:solidFill>
-              </a:defRPr>
-            </a:pPr>
-            <a:r>
-              <a:t>   Fourier Analysis: any composite periodic signal can be decomposed into an infinite sum of sine waves.</a:t>
-            </a:r>
-          </a:p>
-          <a:p>
-            <a:pPr>
-              <a:spcAft>
-                <a:spcPts val="400"/>
-              </a:spcAft>
-              <a:defRPr b="1" sz="1600">
-                <a:solidFill>
-                  <a:srgbClr val="1E3A8A"/>
-                </a:solidFill>
-              </a:defRPr>
-            </a:pPr>
-            <a:r>
-              <a:t>• Transmission Impairments: </a:t>
-            </a:r>
-          </a:p>
-          <a:p>
-            <a:pPr>
-              <a:spcAft>
-                <a:spcPts val="1000"/>
-              </a:spcAft>
-              <a:defRPr sz="1400">
-                <a:solidFill>
-                  <a:srgbClr val="1E293B"/>
-                </a:solidFill>
-              </a:defRPr>
-            </a:pPr>
-            <a:r>
-              <a:t>   Attenuation (loss of energy, dB formula $10 \log_{10}(P_2/P_1)$), Distortion (phase shifting of harmonics), Noise (Thermal, Induced, Crosstalk, Impulse).</a:t>
-            </a:r>
-          </a:p>
-          <a:p>
-            <a:pPr>
-              <a:spcAft>
-                <a:spcPts val="400"/>
-              </a:spcAft>
-              <a:defRPr b="1" sz="1600">
-                <a:solidFill>
-                  <a:srgbClr val="1E3A8A"/>
-                </a:solidFill>
-              </a:defRPr>
-            </a:pPr>
-            <a:r>
-              <a:t>• Nyquist Bit Rate (Noiseless Channel): </a:t>
-            </a:r>
-          </a:p>
-          <a:p>
-            <a:pPr>
-              <a:spcAft>
-                <a:spcPts val="1000"/>
-              </a:spcAft>
-              <a:defRPr sz="1400">
-                <a:solidFill>
-                  <a:srgbClr val="1E293B"/>
-                </a:solidFill>
-              </a:defRPr>
-            </a:pPr>
-            <a:r>
-              <a:t>   $C = 2 	imes B 	imes \log_2(L)$ bps, where $B$ = Bandwidth in Hz, $L$ = number of signal levels.</a:t>
-            </a:r>
-          </a:p>
-          <a:p>
-            <a:pPr>
-              <a:spcAft>
-                <a:spcPts val="400"/>
-              </a:spcAft>
-              <a:defRPr b="1" sz="1600">
-                <a:solidFill>
-                  <a:srgbClr val="1E3A8A"/>
-                </a:solidFill>
-              </a:defRPr>
-            </a:pPr>
-            <a:r>
-              <a:t>• Shannon Capacity Formula (Noisy Channel): </a:t>
-            </a:r>
-          </a:p>
-          <a:p>
-            <a:pPr>
-              <a:spcAft>
-                <a:spcPts val="1000"/>
-              </a:spcAft>
-              <a:defRPr sz="1400">
-                <a:solidFill>
-                  <a:srgbClr val="1E293B"/>
-                </a:solidFill>
-              </a:defRPr>
-            </a:pPr>
-            <a:r>
-              <a:t>   $C = B 	imes \log_2(1 + 	ext{SNR})$ bps, where SNR is signal-to-noise power ratio in linear scale.</a:t>
-            </a:r>
-          </a:p>
-        </p:txBody>
-      </p:sp>
-      <p:sp>
-        <p:nvSpPr>
-          <p:cNvPr id="6" name="Rounded Rectangle 5"/>
+                <a:spcPts val="200"/>
+              </a:spcAft>
+              <a:defRPr b="1" sz="1500">
+                <a:solidFill>
+                  <a:srgbClr val="0F1E4A"/>
+                </a:solidFill>
+              </a:defRPr>
+            </a:pPr>
+            <a:r>
+              <a:t>• `GetRequest`</a:t>
+            </a:r>
+          </a:p>
+          <a:p>
+            <a:pPr>
+              <a:spcAft>
+                <a:spcPts val="800"/>
+              </a:spcAft>
+              <a:defRPr sz="1300">
+                <a:solidFill>
+                  <a:srgbClr val="1E293B"/>
+                </a:solidFill>
+              </a:defRPr>
+            </a:pPr>
+            <a:r>
+              <a:t>   Manager requests value of one or more specific MIB variables by OID from Agent.</a:t>
+            </a:r>
+          </a:p>
+          <a:p>
+            <a:pPr>
+              <a:spcAft>
+                <a:spcPts val="200"/>
+              </a:spcAft>
+              <a:defRPr b="1" sz="1500">
+                <a:solidFill>
+                  <a:srgbClr val="0F1E4A"/>
+                </a:solidFill>
+              </a:defRPr>
+            </a:pPr>
+            <a:r>
+              <a:t>• `GetNextRequest`</a:t>
+            </a:r>
+          </a:p>
+          <a:p>
+            <a:pPr>
+              <a:spcAft>
+                <a:spcPts val="800"/>
+              </a:spcAft>
+              <a:defRPr sz="1300">
+                <a:solidFill>
+                  <a:srgbClr val="1E293B"/>
+                </a:solidFill>
+              </a:defRPr>
+            </a:pPr>
+            <a:r>
+              <a:t>   Manager requests value of lexicographically next object in MIB tree (used for table traversal / walk).</a:t>
+            </a:r>
+          </a:p>
+          <a:p>
+            <a:pPr>
+              <a:spcAft>
+                <a:spcPts val="200"/>
+              </a:spcAft>
+              <a:defRPr b="1" sz="1500">
+                <a:solidFill>
+                  <a:srgbClr val="0F1E4A"/>
+                </a:solidFill>
+              </a:defRPr>
+            </a:pPr>
+            <a:r>
+              <a:t>• `GetBulkRequest` (SNMPv2/v3)</a:t>
+            </a:r>
+          </a:p>
+          <a:p>
+            <a:pPr>
+              <a:spcAft>
+                <a:spcPts val="800"/>
+              </a:spcAft>
+              <a:defRPr sz="1300">
+                <a:solidFill>
+                  <a:srgbClr val="1E293B"/>
+                </a:solidFill>
+              </a:defRPr>
+            </a:pPr>
+            <a:r>
+              <a:t>   Manager efficiently fetches large blocks of tabular data in a single PDU response, minimizing network roundtrips.</a:t>
+            </a:r>
+          </a:p>
+          <a:p>
+            <a:pPr>
+              <a:spcAft>
+                <a:spcPts val="200"/>
+              </a:spcAft>
+              <a:defRPr b="1" sz="1500">
+                <a:solidFill>
+                  <a:srgbClr val="0F1E4A"/>
+                </a:solidFill>
+              </a:defRPr>
+            </a:pPr>
+            <a:r>
+              <a:t>• `SetRequest`</a:t>
+            </a:r>
+          </a:p>
+          <a:p>
+            <a:pPr>
+              <a:spcAft>
+                <a:spcPts val="800"/>
+              </a:spcAft>
+              <a:defRPr sz="1300">
+                <a:solidFill>
+                  <a:srgbClr val="1E293B"/>
+                </a:solidFill>
+              </a:defRPr>
+            </a:pPr>
+            <a:r>
+              <a:t>   Manager writes a new value to a MIB variable to reconfigure device state (e.g. enable/disable an interface).</a:t>
+            </a:r>
+          </a:p>
+          <a:p>
+            <a:pPr>
+              <a:spcAft>
+                <a:spcPts val="200"/>
+              </a:spcAft>
+              <a:defRPr b="1" sz="1500">
+                <a:solidFill>
+                  <a:srgbClr val="0F1E4A"/>
+                </a:solidFill>
+              </a:defRPr>
+            </a:pPr>
+            <a:r>
+              <a:t>• `Response`</a:t>
+            </a:r>
+          </a:p>
+          <a:p>
+            <a:pPr>
+              <a:spcAft>
+                <a:spcPts val="800"/>
+              </a:spcAft>
+              <a:defRPr sz="1300">
+                <a:solidFill>
+                  <a:srgbClr val="1E293B"/>
+                </a:solidFill>
+              </a:defRPr>
+            </a:pPr>
+            <a:r>
+              <a:t>   Agent replies to Manager with requested data values or error status.</a:t>
+            </a:r>
+          </a:p>
+          <a:p>
+            <a:pPr>
+              <a:spcAft>
+                <a:spcPts val="200"/>
+              </a:spcAft>
+              <a:defRPr b="1" sz="1500">
+                <a:solidFill>
+                  <a:srgbClr val="0F1E4A"/>
+                </a:solidFill>
+              </a:defRPr>
+            </a:pPr>
+            <a:r>
+              <a:t>• `Trap` (Unsolicited Alert)</a:t>
+            </a:r>
+          </a:p>
+          <a:p>
+            <a:pPr>
+              <a:spcAft>
+                <a:spcPts val="800"/>
+              </a:spcAft>
+              <a:defRPr sz="1300">
+                <a:solidFill>
+                  <a:srgbClr val="1E293B"/>
+                </a:solidFill>
+              </a:defRPr>
+            </a:pPr>
+            <a:r>
+              <a:t>   Agent proactively sends alert to NMS reporting an asynchronous critical event (e.g. link down, power supply failure, authentication failure). Unacknowledged.</a:t>
+            </a:r>
+          </a:p>
+          <a:p>
+            <a:pPr>
+              <a:spcAft>
+                <a:spcPts val="200"/>
+              </a:spcAft>
+              <a:defRPr b="1" sz="1500">
+                <a:solidFill>
+                  <a:srgbClr val="0F1E4A"/>
+                </a:solidFill>
+              </a:defRPr>
+            </a:pPr>
+            <a:r>
+              <a:t>• `InformRequest` (SNMPv2/v3)</a:t>
+            </a:r>
+          </a:p>
+          <a:p>
+            <a:pPr>
+              <a:spcAft>
+                <a:spcPts val="800"/>
+              </a:spcAft>
+              <a:defRPr sz="1300">
+                <a:solidFill>
+                  <a:srgbClr val="1E293B"/>
+                </a:solidFill>
+              </a:defRPr>
+            </a:pPr>
+            <a:r>
+              <a:t>   Manager-to-Manager or Agent-to-Manager acknowledged trap.</a:t>
+            </a:r>
+          </a:p>
+        </p:txBody>
+      </p:sp>
+      <p:sp>
+        <p:nvSpPr>
+          <p:cNvPr id="7" name="Rounded Rectangle 6"/>
           <p:cNvSpPr/>
           <p:nvPr/>
         </p:nvSpPr>
         <p:spPr>
           <a:xfrm>
-            <a:off x="7955279" y="1371600"/>
+            <a:off x="7955279" y="1280160"/>
             <a:ext cx="3566160" cy="4846320"/>
           </a:xfrm>
           <a:prstGeom prst="roundRect">
@@ -4530,14 +9218,14 @@
       </p:sp>
       <p:sp>
         <p:nvSpPr>
-          <p:cNvPr id="7" name="TextBox 6"/>
+          <p:cNvPr id="8" name="TextBox 7"/>
           <p:cNvSpPr txBox="1"/>
           <p:nvPr/>
         </p:nvSpPr>
         <p:spPr>
           <a:xfrm>
-            <a:off x="8138160" y="1554480"/>
-            <a:ext cx="3200400" cy="4480560"/>
+            <a:off x="8138160" y="1417320"/>
+            <a:ext cx="3200400" cy="4572000"/>
           </a:xfrm>
           <a:prstGeom prst="rect">
             <a:avLst/>
@@ -4552,83 +9240,113 @@
           <a:p>
             <a:pPr>
               <a:spcAft>
-                <a:spcPts val="1200"/>
-              </a:spcAft>
-              <a:defRPr b="1" sz="1600">
+                <a:spcPts val="1000"/>
+              </a:spcAft>
+              <a:defRPr b="1" sz="1500">
                 <a:solidFill>
                   <a:srgbClr val="0E7490"/>
                 </a:solidFill>
               </a:defRPr>
             </a:pPr>
             <a:r>
-              <a:t>Capacity Formulas</a:t>
-            </a:r>
-          </a:p>
-          <a:p>
-            <a:pPr>
-              <a:spcAft>
-                <a:spcPts val="800"/>
-              </a:spcAft>
-              <a:defRPr sz="1300">
-                <a:solidFill>
-                  <a:srgbClr val="1E293B"/>
-                </a:solidFill>
-              </a:defRPr>
-            </a:pPr>
-            <a:r>
-              <a:t>→ Nyquist: Max rate for noiseless channel</a:t>
-            </a:r>
-          </a:p>
-          <a:p>
-            <a:pPr>
-              <a:spcAft>
-                <a:spcPts val="800"/>
-              </a:spcAft>
-              <a:defRPr sz="1300">
-                <a:solidFill>
-                  <a:srgbClr val="1E293B"/>
-                </a:solidFill>
-              </a:defRPr>
-            </a:pPr>
-            <a:r>
-              <a:t>→ Shannon: Theoretical upper bound with noise</a:t>
-            </a:r>
-          </a:p>
-          <a:p>
-            <a:pPr>
-              <a:spcAft>
-                <a:spcPts val="800"/>
-              </a:spcAft>
-              <a:defRPr sz="1300">
-                <a:solidFill>
-                  <a:srgbClr val="1E293B"/>
-                </a:solidFill>
-              </a:defRPr>
-            </a:pPr>
-            <a:r>
-              <a:t>→ SNR(dB) = 10 * log10(SNR_linear)</a:t>
-            </a:r>
-          </a:p>
-          <a:p>
-            <a:pPr>
-              <a:spcAft>
-                <a:spcPts val="800"/>
-              </a:spcAft>
-              <a:defRPr sz="1300">
-                <a:solidFill>
-                  <a:srgbClr val="1E293B"/>
-                </a:solidFill>
-              </a:defRPr>
-            </a:pPr>
-            <a:r>
-              <a:t>→ If SNR(dB)=30dB, SNR_linear=1000</a:t>
-            </a:r>
-          </a:p>
-        </p:txBody>
-      </p:sp>
-      <p:sp>
-        <p:nvSpPr>
-          <p:cNvPr id="8" name="TextBox 7"/>
+              <a:t>Operation Summary</a:t>
+            </a:r>
+          </a:p>
+          <a:p>
+            <a:pPr>
+              <a:spcAft>
+                <a:spcPts val="600"/>
+              </a:spcAft>
+              <a:defRPr sz="1200">
+                <a:solidFill>
+                  <a:srgbClr val="1E293B"/>
+                </a:solidFill>
+              </a:defRPr>
+            </a:pPr>
+            <a:r>
+              <a:t>→ GetRequest: Fetch variable</a:t>
+            </a:r>
+          </a:p>
+          <a:p>
+            <a:pPr>
+              <a:spcAft>
+                <a:spcPts val="600"/>
+              </a:spcAft>
+              <a:defRPr sz="1200">
+                <a:solidFill>
+                  <a:srgbClr val="1E293B"/>
+                </a:solidFill>
+              </a:defRPr>
+            </a:pPr>
+            <a:r>
+              <a:t>→ GetNextRequest: Tree traversal</a:t>
+            </a:r>
+          </a:p>
+          <a:p>
+            <a:pPr>
+              <a:spcAft>
+                <a:spcPts val="600"/>
+              </a:spcAft>
+              <a:defRPr sz="1200">
+                <a:solidFill>
+                  <a:srgbClr val="1E293B"/>
+                </a:solidFill>
+              </a:defRPr>
+            </a:pPr>
+            <a:r>
+              <a:t>→ GetBulkRequest: Table retrieval</a:t>
+            </a:r>
+          </a:p>
+          <a:p>
+            <a:pPr>
+              <a:spcAft>
+                <a:spcPts val="600"/>
+              </a:spcAft>
+              <a:defRPr sz="1200">
+                <a:solidFill>
+                  <a:srgbClr val="1E293B"/>
+                </a:solidFill>
+              </a:defRPr>
+            </a:pPr>
+            <a:r>
+              <a:t>→ SetRequest: Modify configuration</a:t>
+            </a:r>
+          </a:p>
+          <a:p>
+            <a:pPr>
+              <a:spcAft>
+                <a:spcPts val="600"/>
+              </a:spcAft>
+              <a:defRPr sz="1200">
+                <a:solidFill>
+                  <a:srgbClr val="1E293B"/>
+                </a:solidFill>
+              </a:defRPr>
+            </a:pPr>
+            <a:r>
+              <a:t>→ Trap: Unsolicited async event</a:t>
+            </a:r>
+          </a:p>
+          <a:p>
+            <a:pPr>
+              <a:spcAft>
+                <a:spcPts val="600"/>
+              </a:spcAft>
+              <a:defRPr sz="1200">
+                <a:solidFill>
+                  <a:srgbClr val="1E293B"/>
+                </a:solidFill>
+              </a:defRPr>
+            </a:pPr>
+            <a:r>
+              <a:t>→ InformRequest: Acknowledged trap</a:t>
+            </a:r>
+          </a:p>
+        </p:txBody>
+      </p:sp>
+      <p:sp>
+        <p:nvSpPr>
+          <p:cNvPr id="9" name="TextBox 8"/>
           <p:cNvSpPr txBox="1"/>
           <p:nvPr/>
         </p:nvSpPr>
@@ -4649,14 +9367,14 @@
           <a:lstStyle/>
           <a:p>
             <a:pPr>
-              <a:defRPr sz="1000">
+              <a:defRPr sz="950">
                 <a:solidFill>
                   <a:srgbClr val="64748B"/>
                 </a:solidFill>
               </a:defRPr>
             </a:pPr>
             <a:r>
-              <a:t>PCCST501 Computer Networks | VJCET Dept of CSE | Prepared by Prof. Anju Markose</a:t>
+              <a:t>PCCST501 Computer Networks | KTU 2024 Scheme | Prof. Anju Markose | Assistant Professor, Dept. of CSE | VJCET</a:t>
             </a:r>
           </a:p>
         </p:txBody>
@@ -4694,7 +9412,7 @@
             <a:avLst/>
           </a:prstGeom>
           <a:solidFill>
-            <a:srgbClr val="1E3A8A"/>
+            <a:srgbClr val="0F1E4A"/>
           </a:solidFill>
           <a:ln>
             <a:noFill/>
@@ -4724,14 +9442,57 @@
       </p:sp>
       <p:sp>
         <p:nvSpPr>
-          <p:cNvPr id="3" name="TextBox 2"/>
+          <p:cNvPr id="3" name="Rectangle 2"/>
+          <p:cNvSpPr/>
+          <p:nvPr/>
+        </p:nvSpPr>
+        <p:spPr>
+          <a:xfrm>
+            <a:off x="0" y="969264"/>
+            <a:ext cx="12191695" cy="36576"/>
+          </a:xfrm>
+          <a:prstGeom prst="rect">
+            <a:avLst/>
+          </a:prstGeom>
+          <a:solidFill>
+            <a:srgbClr val="D97706"/>
+          </a:solidFill>
+          <a:ln>
+            <a:noFill/>
+          </a:ln>
+        </p:spPr>
+        <p:style>
+          <a:lnRef idx="1">
+            <a:schemeClr val="accent1"/>
+          </a:lnRef>
+          <a:fillRef idx="3">
+            <a:schemeClr val="accent1"/>
+          </a:fillRef>
+          <a:effectRef idx="2">
+            <a:schemeClr val="accent1"/>
+          </a:effectRef>
+          <a:fontRef idx="minor">
+            <a:schemeClr val="lt1"/>
+          </a:fontRef>
+        </p:style>
+        <p:txBody>
+          <a:bodyPr rtlCol="0" anchor="ctr"/>
+          <a:lstStyle/>
+          <a:p>
+            <a:pPr algn="ctr"/>
+          </a:p>
+        </p:txBody>
+      </p:sp>
+      <p:sp>
+        <p:nvSpPr>
+          <p:cNvPr id="4" name="TextBox 3"/>
           <p:cNvSpPr txBox="1"/>
           <p:nvPr/>
         </p:nvSpPr>
         <p:spPr>
           <a:xfrm>
-            <a:off x="731520" y="137160"/>
-            <a:ext cx="8686800" cy="731520"/>
+            <a:off x="731520" y="164592"/>
+            <a:ext cx="8412480" cy="685800"/>
           </a:xfrm>
           <a:prstGeom prst="rect">
             <a:avLst/>
@@ -4745,28 +9506,28 @@
           <a:lstStyle/>
           <a:p>
             <a:pPr>
-              <a:defRPr b="1" sz="2400">
+              <a:defRPr b="1" sz="2300">
                 <a:solidFill>
                   <a:srgbClr val="F8FAFC"/>
                 </a:solidFill>
               </a:defRPr>
             </a:pPr>
             <a:r>
-              <a:t>4.4 Digital Transmission: Line Coding Techniques</a:t>
-            </a:r>
-          </a:p>
-        </p:txBody>
-      </p:sp>
-      <p:sp>
-        <p:nvSpPr>
-          <p:cNvPr id="4" name="TextBox 3"/>
+              <a:t>4.1.3 Evolution of SNMP: SNMPv1 vs SNMPv2c vs SNMPv3</a:t>
+            </a:r>
+          </a:p>
+        </p:txBody>
+      </p:sp>
+      <p:sp>
+        <p:nvSpPr>
+          <p:cNvPr id="5" name="TextBox 4"/>
           <p:cNvSpPr txBox="1"/>
           <p:nvPr/>
         </p:nvSpPr>
         <p:spPr>
           <a:xfrm>
-            <a:off x="8686800" y="137160"/>
-            <a:ext cx="2926080" cy="731520"/>
+            <a:off x="8229600" y="164592"/>
+            <a:ext cx="3291840" cy="685800"/>
           </a:xfrm>
           <a:prstGeom prst="rect">
             <a:avLst/>
@@ -4782,155 +9543,12 @@
             <a:pPr algn="r">
               <a:defRPr b="1" sz="1300">
                 <a:solidFill>
-                  <a:srgbClr val="F59E0B"/>
-                </a:solidFill>
-              </a:defRPr>
-            </a:pPr>
-            <a:r>
-              <a:t>MODULE 4</a:t>
-            </a:r>
-          </a:p>
-        </p:txBody>
-      </p:sp>
-      <p:sp>
-        <p:nvSpPr>
-          <p:cNvPr id="5" name="TextBox 4"/>
-          <p:cNvSpPr txBox="1"/>
-          <p:nvPr/>
-        </p:nvSpPr>
-        <p:spPr>
-          <a:xfrm>
-            <a:off x="731520" y="1280160"/>
-            <a:ext cx="6858000" cy="5029200"/>
-          </a:xfrm>
-          <a:prstGeom prst="rect">
-            <a:avLst/>
-          </a:prstGeom>
-          <a:noFill/>
-        </p:spPr>
-        <p:txBody>
-          <a:bodyPr wrap="square">
-            <a:spAutoFit/>
-          </a:bodyPr>
-          <a:lstStyle/>
-          <a:p>
-            <a:pPr>
-              <a:spcAft>
-                <a:spcPts val="400"/>
-              </a:spcAft>
-              <a:defRPr b="1" sz="1600">
-                <a:solidFill>
-                  <a:srgbClr val="1E3A8A"/>
-                </a:solidFill>
-              </a:defRPr>
-            </a:pPr>
-            <a:r>
-              <a:t>• Line Coding Concept: </a:t>
-            </a:r>
-          </a:p>
-          <a:p>
-            <a:pPr>
-              <a:spcAft>
-                <a:spcPts val="1000"/>
-              </a:spcAft>
-              <a:defRPr sz="1400">
-                <a:solidFill>
-                  <a:srgbClr val="1E293B"/>
-                </a:solidFill>
-              </a:defRPr>
-            </a:pPr>
-            <a:r>
-              <a:t>   Converting sequence of binary digits into discrete digital voltage signals.</a:t>
-            </a:r>
-          </a:p>
-          <a:p>
-            <a:pPr>
-              <a:spcAft>
-                <a:spcPts val="400"/>
-              </a:spcAft>
-              <a:defRPr b="1" sz="1600">
-                <a:solidFill>
-                  <a:srgbClr val="1E3A8A"/>
-                </a:solidFill>
-              </a:defRPr>
-            </a:pPr>
-            <a:r>
-              <a:t>• Unipolar &amp; Polar NRZ: </a:t>
-            </a:r>
-          </a:p>
-          <a:p>
-            <a:pPr>
-              <a:spcAft>
-                <a:spcPts val="1000"/>
-              </a:spcAft>
-              <a:defRPr sz="1400">
-                <a:solidFill>
-                  <a:srgbClr val="1E293B"/>
-                </a:solidFill>
-              </a:defRPr>
-            </a:pPr>
-            <a:r>
-              <a:t>   NRZ-L (Level): Positive for 0, Negative for 1. NRZ-I (Invert): Transition at beginning of bit for 1, no transition for 0 (DC component &amp; sync issues).</a:t>
-            </a:r>
-          </a:p>
-          <a:p>
-            <a:pPr>
-              <a:spcAft>
-                <a:spcPts val="400"/>
-              </a:spcAft>
-              <a:defRPr b="1" sz="1600">
-                <a:solidFill>
-                  <a:srgbClr val="1E3A8A"/>
-                </a:solidFill>
-              </a:defRPr>
-            </a:pPr>
-            <a:r>
-              <a:t>• Biphase Coding (Self-Synchronizing): </a:t>
-            </a:r>
-          </a:p>
-          <a:p>
-            <a:pPr>
-              <a:spcAft>
-                <a:spcPts val="1000"/>
-              </a:spcAft>
-              <a:defRPr sz="1400">
-                <a:solidFill>
-                  <a:srgbClr val="1E293B"/>
-                </a:solidFill>
-              </a:defRPr>
-            </a:pPr>
-            <a:r>
-              <a:t>   Manchester (0 = High-to-Low transition, 1 = Low-to-High transition, used in 802.3 Ethernet); Differential Manchester (transition at start for 0).</a:t>
-            </a:r>
-          </a:p>
-          <a:p>
-            <a:pPr>
-              <a:spcAft>
-                <a:spcPts val="400"/>
-              </a:spcAft>
-              <a:defRPr b="1" sz="1600">
-                <a:solidFill>
-                  <a:srgbClr val="1E3A8A"/>
-                </a:solidFill>
-              </a:defRPr>
-            </a:pPr>
-            <a:r>
-              <a:t>• Bipolar &amp; Block Coding: </a:t>
-            </a:r>
-          </a:p>
-          <a:p>
-            <a:pPr>
-              <a:spcAft>
-                <a:spcPts val="1000"/>
-              </a:spcAft>
-              <a:defRPr sz="1400">
-                <a:solidFill>
-                  <a:srgbClr val="1E293B"/>
-                </a:solidFill>
-              </a:defRPr>
-            </a:pPr>
-            <a:r>
-              <a:t>   AMI (Alternate Mark Inversion: 0=0V, 1=alternating +V/-V); 4B/5B block coding eliminates long runs of consecutive zeros.</a:t>
+                  <a:srgbClr val="D97706"/>
+                </a:solidFill>
+              </a:defRPr>
+            </a:pPr>
+            <a:r>
+              <a:t>M4.1 SNMP EVOLUTION</a:t>
             </a:r>
           </a:p>
         </p:txBody>
@@ -4943,8 +9561,8 @@
         </p:nvSpPr>
         <p:spPr>
           <a:xfrm>
-            <a:off x="7955279" y="1371600"/>
-            <a:ext cx="3566160" cy="4846320"/>
+            <a:off x="731520" y="1280160"/>
+            <a:ext cx="5212080" cy="4846320"/>
           </a:xfrm>
           <a:prstGeom prst="roundRect">
             <a:avLst/>
@@ -4988,8 +9606,8 @@
         </p:nvSpPr>
         <p:spPr>
           <a:xfrm>
-            <a:off x="8138160" y="1554480"/>
-            <a:ext cx="3200400" cy="4480560"/>
+            <a:off x="914400" y="1417320"/>
+            <a:ext cx="4846320" cy="4572000"/>
           </a:xfrm>
           <a:prstGeom prst="rect">
             <a:avLst/>
@@ -5008,79 +9626,192 @@
               </a:spcAft>
               <a:defRPr b="1" sz="1600">
                 <a:solidFill>
+                  <a:srgbClr val="0F1E4A"/>
+                </a:solidFill>
+              </a:defRPr>
+            </a:pPr>
+            <a:r>
+              <a:t>SNMPv1 &amp; SNMPv2c (Legacy)</a:t>
+            </a:r>
+          </a:p>
+          <a:p>
+            <a:pPr>
+              <a:spcAft>
+                <a:spcPts val="600"/>
+              </a:spcAft>
+              <a:defRPr sz="1250">
+                <a:solidFill>
+                  <a:srgbClr val="1E293B"/>
+                </a:solidFill>
+              </a:defRPr>
+            </a:pPr>
+            <a:r>
+              <a:t>• Authentication: Plaintext Community Strings (`public` for read, `private` for write) transmitted in cleartext</a:t>
+            </a:r>
+          </a:p>
+          <a:p>
+            <a:pPr>
+              <a:spcAft>
+                <a:spcPts val="600"/>
+              </a:spcAft>
+              <a:defRPr sz="1250">
+                <a:solidFill>
+                  <a:srgbClr val="1E293B"/>
+                </a:solidFill>
+              </a:defRPr>
+            </a:pPr>
+            <a:r>
+              <a:t>• Security: Vulnerable to packet sniffing, replay attacks, and unauthorized configuration modification</a:t>
+            </a:r>
+          </a:p>
+          <a:p>
+            <a:pPr>
+              <a:spcAft>
+                <a:spcPts val="600"/>
+              </a:spcAft>
+              <a:defRPr sz="1250">
+                <a:solidFill>
+                  <a:srgbClr val="1E293B"/>
+                </a:solidFill>
+              </a:defRPr>
+            </a:pPr>
+            <a:r>
+              <a:t>• Data Types: v1: 32-bit counters only (rollover in 34s on 1 Gbps links!). v2c: Added 64-bit counters (`Counter64`) &amp; `GetBulkRequest`</a:t>
+            </a:r>
+          </a:p>
+        </p:txBody>
+      </p:sp>
+      <p:sp>
+        <p:nvSpPr>
+          <p:cNvPr id="8" name="Rounded Rectangle 7"/>
+          <p:cNvSpPr/>
+          <p:nvPr/>
+        </p:nvSpPr>
+        <p:spPr>
+          <a:xfrm>
+            <a:off x="6309360" y="1280160"/>
+            <a:ext cx="5212080" cy="4846320"/>
+          </a:xfrm>
+          <a:prstGeom prst="roundRect">
+            <a:avLst/>
+          </a:prstGeom>
+          <a:solidFill>
+            <a:srgbClr val="EEF2FF"/>
+          </a:solidFill>
+          <a:ln w="19050">
+            <a:solidFill>
+              <a:srgbClr val="0F1E4A"/>
+            </a:solidFill>
+          </a:ln>
+        </p:spPr>
+        <p:style>
+          <a:lnRef idx="1">
+            <a:schemeClr val="accent1"/>
+          </a:lnRef>
+          <a:fillRef idx="3">
+            <a:schemeClr val="accent1"/>
+          </a:fillRef>
+          <a:effectRef idx="2">
+            <a:schemeClr val="accent1"/>
+          </a:effectRef>
+          <a:fontRef idx="minor">
+            <a:schemeClr val="lt1"/>
+          </a:fontRef>
+        </p:style>
+        <p:txBody>
+          <a:bodyPr rtlCol="0" anchor="ctr"/>
+          <a:lstStyle/>
+          <a:p>
+            <a:pPr algn="ctr"/>
+          </a:p>
+        </p:txBody>
+      </p:sp>
+      <p:sp>
+        <p:nvSpPr>
+          <p:cNvPr id="9" name="TextBox 8"/>
+          <p:cNvSpPr txBox="1"/>
+          <p:nvPr/>
+        </p:nvSpPr>
+        <p:spPr>
+          <a:xfrm>
+            <a:off x="6492240" y="1417320"/>
+            <a:ext cx="4846320" cy="4572000"/>
+          </a:xfrm>
+          <a:prstGeom prst="rect">
+            <a:avLst/>
+          </a:prstGeom>
+          <a:noFill/>
+        </p:spPr>
+        <p:txBody>
+          <a:bodyPr wrap="square">
+            <a:spAutoFit/>
+          </a:bodyPr>
+          <a:lstStyle/>
+          <a:p>
+            <a:pPr>
+              <a:spcAft>
+                <a:spcPts val="1200"/>
+              </a:spcAft>
+              <a:defRPr b="1" sz="1600">
+                <a:solidFill>
                   <a:srgbClr val="0E7490"/>
                 </a:solidFill>
               </a:defRPr>
             </a:pPr>
             <a:r>
-              <a:t>Line Coding Summary</a:t>
-            </a:r>
-          </a:p>
-          <a:p>
-            <a:pPr>
-              <a:spcAft>
-                <a:spcPts val="800"/>
-              </a:spcAft>
-              <a:defRPr sz="1300">
-                <a:solidFill>
-                  <a:srgbClr val="1E293B"/>
-                </a:solidFill>
-              </a:defRPr>
-            </a:pPr>
-            <a:r>
-              <a:t>→ NRZ: Simple, poor sync, DC bias</a:t>
-            </a:r>
-          </a:p>
-          <a:p>
-            <a:pPr>
-              <a:spcAft>
-                <a:spcPts val="800"/>
-              </a:spcAft>
-              <a:defRPr sz="1300">
-                <a:solidFill>
-                  <a:srgbClr val="1E293B"/>
-                </a:solidFill>
-              </a:defRPr>
-            </a:pPr>
-            <a:r>
-              <a:t>→ Manchester: Perfect sync, double bandwidth</a:t>
-            </a:r>
-          </a:p>
-          <a:p>
-            <a:pPr>
-              <a:spcAft>
-                <a:spcPts val="800"/>
-              </a:spcAft>
-              <a:defRPr sz="1300">
-                <a:solidFill>
-                  <a:srgbClr val="1E293B"/>
-                </a:solidFill>
-              </a:defRPr>
-            </a:pPr>
-            <a:r>
-              <a:t>→ AMI: Zero DC bias, loss of sync on 0s</a:t>
-            </a:r>
-          </a:p>
-          <a:p>
-            <a:pPr>
-              <a:spcAft>
-                <a:spcPts val="800"/>
-              </a:spcAft>
-              <a:defRPr sz="1300">
-                <a:solidFill>
-                  <a:srgbClr val="1E293B"/>
-                </a:solidFill>
-              </a:defRPr>
-            </a:pPr>
-            <a:r>
-              <a:t>→ B8ZS / HDB3: Scrambling solves long 0s</a:t>
-            </a:r>
-          </a:p>
-        </p:txBody>
-      </p:sp>
-      <p:sp>
-        <p:nvSpPr>
-          <p:cNvPr id="8" name="TextBox 7"/>
+              <a:t>SNMPv3 (Modern Standard - RFC 3411)</a:t>
+            </a:r>
+          </a:p>
+          <a:p>
+            <a:pPr>
+              <a:spcAft>
+                <a:spcPts val="600"/>
+              </a:spcAft>
+              <a:defRPr sz="1250">
+                <a:solidFill>
+                  <a:srgbClr val="1E293B"/>
+                </a:solidFill>
+              </a:defRPr>
+            </a:pPr>
+            <a:r>
+              <a:t>• User-based Security Model (USM): Provides Message Integrity (HMAC-MD5/SHA) and Confidentiality (DES/AES-128/256 payload encryption)</a:t>
+            </a:r>
+          </a:p>
+          <a:p>
+            <a:pPr>
+              <a:spcAft>
+                <a:spcPts val="600"/>
+              </a:spcAft>
+              <a:defRPr sz="1250">
+                <a:solidFill>
+                  <a:srgbClr val="1E293B"/>
+                </a:solidFill>
+              </a:defRPr>
+            </a:pPr>
+            <a:r>
+              <a:t>• View-based Access Control (VACM): Defines granular read/write access permissions per user group for specific MIB subtrees</a:t>
+            </a:r>
+          </a:p>
+          <a:p>
+            <a:pPr>
+              <a:spcAft>
+                <a:spcPts val="600"/>
+              </a:spcAft>
+              <a:defRPr sz="1250">
+                <a:solidFill>
+                  <a:srgbClr val="1E293B"/>
+                </a:solidFill>
+              </a:defRPr>
+            </a:pPr>
+            <a:r>
+              <a:t>• Anti-Replay: Timestamps and boot counters prevent replaying captured SNMP packets</a:t>
+            </a:r>
+          </a:p>
+        </p:txBody>
+      </p:sp>
+      <p:sp>
+        <p:nvSpPr>
+          <p:cNvPr id="10" name="TextBox 9"/>
           <p:cNvSpPr txBox="1"/>
           <p:nvPr/>
         </p:nvSpPr>
@@ -5101,14 +9832,14 @@
           <a:lstStyle/>
           <a:p>
             <a:pPr>
-              <a:defRPr sz="1000">
+              <a:defRPr sz="950">
                 <a:solidFill>
                   <a:srgbClr val="64748B"/>
                 </a:solidFill>
               </a:defRPr>
             </a:pPr>
             <a:r>
-              <a:t>PCCST501 Computer Networks | VJCET Dept of CSE | Prepared by Prof. Anju Markose</a:t>
+              <a:t>PCCST501 Computer Networks | KTU 2024 Scheme | Prof. Anju Markose | Assistant Professor, Dept. of CSE | VJCET</a:t>
             </a:r>
           </a:p>
         </p:txBody>
@@ -5140,13 +9871,13 @@
         <p:spPr>
           <a:xfrm>
             <a:off x="0" y="0"/>
-            <a:ext cx="12191695" cy="1005840"/>
+            <a:ext cx="12191695" cy="6858000"/>
           </a:xfrm>
           <a:prstGeom prst="rect">
             <a:avLst/>
           </a:prstGeom>
           <a:solidFill>
-            <a:srgbClr val="1E3A8A"/>
+            <a:srgbClr val="0F172A"/>
           </a:solidFill>
           <a:ln>
             <a:noFill/>
@@ -5176,268 +9907,23 @@
       </p:sp>
       <p:sp>
         <p:nvSpPr>
-          <p:cNvPr id="3" name="TextBox 2"/>
-          <p:cNvSpPr txBox="1"/>
-          <p:nvPr/>
-        </p:nvSpPr>
-        <p:spPr>
-          <a:xfrm>
-            <a:off x="731520" y="137160"/>
-            <a:ext cx="8686800" cy="731520"/>
+          <p:cNvPr id="3" name="Rectangle 2"/>
+          <p:cNvSpPr/>
+          <p:nvPr/>
+        </p:nvSpPr>
+        <p:spPr>
+          <a:xfrm>
+            <a:off x="822960" y="1188720"/>
+            <a:ext cx="164592" cy="4480560"/>
           </a:xfrm>
           <a:prstGeom prst="rect">
             <a:avLst/>
           </a:prstGeom>
-          <a:noFill/>
-        </p:spPr>
-        <p:txBody>
-          <a:bodyPr wrap="none">
-            <a:spAutoFit/>
-          </a:bodyPr>
-          <a:lstStyle/>
-          <a:p>
-            <a:pPr>
-              <a:defRPr b="1" sz="2400">
-                <a:solidFill>
-                  <a:srgbClr val="F8FAFC"/>
-                </a:solidFill>
-              </a:defRPr>
-            </a:pPr>
-            <a:r>
-              <a:t>4.5 Analog Transmission &amp; Bandwidth Utilization</a:t>
-            </a:r>
-          </a:p>
-        </p:txBody>
-      </p:sp>
-      <p:sp>
-        <p:nvSpPr>
-          <p:cNvPr id="4" name="TextBox 3"/>
-          <p:cNvSpPr txBox="1"/>
-          <p:nvPr/>
-        </p:nvSpPr>
-        <p:spPr>
-          <a:xfrm>
-            <a:off x="8686800" y="137160"/>
-            <a:ext cx="2926080" cy="731520"/>
-          </a:xfrm>
-          <a:prstGeom prst="rect">
-            <a:avLst/>
-          </a:prstGeom>
-          <a:noFill/>
-        </p:spPr>
-        <p:txBody>
-          <a:bodyPr wrap="none">
-            <a:spAutoFit/>
-          </a:bodyPr>
-          <a:lstStyle/>
-          <a:p>
-            <a:pPr algn="r">
-              <a:defRPr b="1" sz="1300">
-                <a:solidFill>
-                  <a:srgbClr val="F59E0B"/>
-                </a:solidFill>
-              </a:defRPr>
-            </a:pPr>
-            <a:r>
-              <a:t>MODULE 4</a:t>
-            </a:r>
-          </a:p>
-        </p:txBody>
-      </p:sp>
-      <p:sp>
-        <p:nvSpPr>
-          <p:cNvPr id="5" name="TextBox 4"/>
-          <p:cNvSpPr txBox="1"/>
-          <p:nvPr/>
-        </p:nvSpPr>
-        <p:spPr>
-          <a:xfrm>
-            <a:off x="731520" y="1280160"/>
-            <a:ext cx="6858000" cy="5029200"/>
-          </a:xfrm>
-          <a:prstGeom prst="rect">
-            <a:avLst/>
-          </a:prstGeom>
-          <a:noFill/>
-        </p:spPr>
-        <p:txBody>
-          <a:bodyPr wrap="square">
-            <a:spAutoFit/>
-          </a:bodyPr>
-          <a:lstStyle/>
-          <a:p>
-            <a:pPr>
-              <a:spcAft>
-                <a:spcPts val="400"/>
-              </a:spcAft>
-              <a:defRPr b="1" sz="1600">
-                <a:solidFill>
-                  <a:srgbClr val="1E3A8A"/>
-                </a:solidFill>
-              </a:defRPr>
-            </a:pPr>
-            <a:r>
-              <a:t>• Digital-to-Analog Modulation: </a:t>
-            </a:r>
-          </a:p>
-          <a:p>
-            <a:pPr>
-              <a:spcAft>
-                <a:spcPts val="1000"/>
-              </a:spcAft>
-              <a:defRPr sz="1400">
-                <a:solidFill>
-                  <a:srgbClr val="1E293B"/>
-                </a:solidFill>
-              </a:defRPr>
-            </a:pPr>
-            <a:r>
-              <a:t>   Amplitude Shift Keying (ASK), Frequency Shift Keying (FSK), Phase Shift Keying (BPSK, QPSK).</a:t>
-            </a:r>
-          </a:p>
-          <a:p>
-            <a:pPr>
-              <a:spcAft>
-                <a:spcPts val="400"/>
-              </a:spcAft>
-              <a:defRPr b="1" sz="1600">
-                <a:solidFill>
-                  <a:srgbClr val="1E3A8A"/>
-                </a:solidFill>
-              </a:defRPr>
-            </a:pPr>
-            <a:r>
-              <a:t>• Quadrature Amplitude Modulation (QAM): </a:t>
-            </a:r>
-          </a:p>
-          <a:p>
-            <a:pPr>
-              <a:spcAft>
-                <a:spcPts val="1000"/>
-              </a:spcAft>
-              <a:defRPr sz="1400">
-                <a:solidFill>
-                  <a:srgbClr val="1E293B"/>
-                </a:solidFill>
-              </a:defRPr>
-            </a:pPr>
-            <a:r>
-              <a:t>   Combines ASK and PSK to transmit multiple bits per baud (e.g., 16-QAM sends 4 bits/baud, 64-QAM sends 6 bits/baud).</a:t>
-            </a:r>
-          </a:p>
-          <a:p>
-            <a:pPr>
-              <a:spcAft>
-                <a:spcPts val="400"/>
-              </a:spcAft>
-              <a:defRPr b="1" sz="1600">
-                <a:solidFill>
-                  <a:srgbClr val="1E3A8A"/>
-                </a:solidFill>
-              </a:defRPr>
-            </a:pPr>
-            <a:r>
-              <a:t>• Frequency Division Multiplexing (FDM): </a:t>
-            </a:r>
-          </a:p>
-          <a:p>
-            <a:pPr>
-              <a:spcAft>
-                <a:spcPts val="1000"/>
-              </a:spcAft>
-              <a:defRPr sz="1400">
-                <a:solidFill>
-                  <a:srgbClr val="1E293B"/>
-                </a:solidFill>
-              </a:defRPr>
-            </a:pPr>
-            <a:r>
-              <a:t>   Analog technique; divides total bandwidth into non-overlapping frequency bands separated by guard bands.</a:t>
-            </a:r>
-          </a:p>
-          <a:p>
-            <a:pPr>
-              <a:spcAft>
-                <a:spcPts val="400"/>
-              </a:spcAft>
-              <a:defRPr b="1" sz="1600">
-                <a:solidFill>
-                  <a:srgbClr val="1E3A8A"/>
-                </a:solidFill>
-              </a:defRPr>
-            </a:pPr>
-            <a:r>
-              <a:t>• Wavelength Division Multiplexing (WDM): </a:t>
-            </a:r>
-          </a:p>
-          <a:p>
-            <a:pPr>
-              <a:spcAft>
-                <a:spcPts val="1000"/>
-              </a:spcAft>
-              <a:defRPr sz="1400">
-                <a:solidFill>
-                  <a:srgbClr val="1E293B"/>
-                </a:solidFill>
-              </a:defRPr>
-            </a:pPr>
-            <a:r>
-              <a:t>   Optical multiplexing of multiple light wavelengths over a single optical fiber strand.</a:t>
-            </a:r>
-          </a:p>
-          <a:p>
-            <a:pPr>
-              <a:spcAft>
-                <a:spcPts val="400"/>
-              </a:spcAft>
-              <a:defRPr b="1" sz="1600">
-                <a:solidFill>
-                  <a:srgbClr val="1E3A8A"/>
-                </a:solidFill>
-              </a:defRPr>
-            </a:pPr>
-            <a:r>
-              <a:t>• Time Division Multiplexing (TDM): </a:t>
-            </a:r>
-          </a:p>
-          <a:p>
-            <a:pPr>
-              <a:spcAft>
-                <a:spcPts val="1000"/>
-              </a:spcAft>
-              <a:defRPr sz="1400">
-                <a:solidFill>
-                  <a:srgbClr val="1E293B"/>
-                </a:solidFill>
-              </a:defRPr>
-            </a:pPr>
-            <a:r>
-              <a:t>   Digital technique; Synchronous TDM assigns fixed time slots per channel; Statistical TDM assigns slots dynamically on-demand.</a:t>
-            </a:r>
-          </a:p>
-        </p:txBody>
-      </p:sp>
-      <p:sp>
-        <p:nvSpPr>
-          <p:cNvPr id="6" name="Rounded Rectangle 5"/>
-          <p:cNvSpPr/>
-          <p:nvPr/>
-        </p:nvSpPr>
-        <p:spPr>
-          <a:xfrm>
-            <a:off x="7955279" y="1371600"/>
-            <a:ext cx="3566160" cy="4846320"/>
-          </a:xfrm>
-          <a:prstGeom prst="roundRect">
-            <a:avLst/>
-          </a:prstGeom>
           <a:solidFill>
-            <a:srgbClr val="F1F5F9"/>
+            <a:srgbClr val="D97706"/>
           </a:solidFill>
-          <a:ln w="19050">
-            <a:solidFill>
-              <a:srgbClr val="0E7490"/>
-            </a:solidFill>
+          <a:ln>
+            <a:noFill/>
           </a:ln>
         </p:spPr>
         <p:style>
@@ -5464,14 +9950,14 @@
       </p:sp>
       <p:sp>
         <p:nvSpPr>
-          <p:cNvPr id="7" name="TextBox 6"/>
+          <p:cNvPr id="4" name="TextBox 3"/>
           <p:cNvSpPr txBox="1"/>
           <p:nvPr/>
         </p:nvSpPr>
         <p:spPr>
           <a:xfrm>
-            <a:off x="8138160" y="1554480"/>
-            <a:ext cx="3200400" cy="4480560"/>
+            <a:off x="1280160" y="1097280"/>
+            <a:ext cx="10058400" cy="4663440"/>
           </a:xfrm>
           <a:prstGeom prst="rect">
             <a:avLst/>
@@ -5488,109 +9974,68 @@
               <a:spcAft>
                 <a:spcPts val="1200"/>
               </a:spcAft>
-              <a:defRPr b="1" sz="1600">
-                <a:solidFill>
-                  <a:srgbClr val="0E7490"/>
-                </a:solidFill>
-              </a:defRPr>
-            </a:pPr>
-            <a:r>
-              <a:t>Multiplexing Methods</a:t>
-            </a:r>
-          </a:p>
-          <a:p>
-            <a:pPr>
-              <a:spcAft>
-                <a:spcPts val="800"/>
-              </a:spcAft>
-              <a:defRPr sz="1300">
-                <a:solidFill>
-                  <a:srgbClr val="1E293B"/>
-                </a:solidFill>
-              </a:defRPr>
-            </a:pPr>
-            <a:r>
-              <a:t>→ FDM: Analog, frequency bands (Radio/TV)</a:t>
-            </a:r>
-          </a:p>
-          <a:p>
-            <a:pPr>
-              <a:spcAft>
-                <a:spcPts val="800"/>
-              </a:spcAft>
-              <a:defRPr sz="1300">
-                <a:solidFill>
-                  <a:srgbClr val="1E293B"/>
-                </a:solidFill>
-              </a:defRPr>
-            </a:pPr>
-            <a:r>
-              <a:t>→ WDM: Optical spectrum in glass fiber</a:t>
-            </a:r>
-          </a:p>
-          <a:p>
-            <a:pPr>
-              <a:spcAft>
-                <a:spcPts val="800"/>
-              </a:spcAft>
-              <a:defRPr sz="1300">
-                <a:solidFill>
-                  <a:srgbClr val="1E293B"/>
-                </a:solidFill>
-              </a:defRPr>
-            </a:pPr>
-            <a:r>
-              <a:t>→ TDM: Digital time slots (T1/E1 lines)</a:t>
-            </a:r>
-          </a:p>
-          <a:p>
-            <a:pPr>
-              <a:spcAft>
-                <a:spcPts val="800"/>
-              </a:spcAft>
-              <a:defRPr sz="1300">
-                <a:solidFill>
-                  <a:srgbClr val="1E293B"/>
-                </a:solidFill>
-              </a:defRPr>
-            </a:pPr>
-            <a:r>
-              <a:t>→ Statistical TDM: Eliminates idle slots</a:t>
-            </a:r>
-          </a:p>
-        </p:txBody>
-      </p:sp>
-      <p:sp>
-        <p:nvSpPr>
-          <p:cNvPr id="8" name="TextBox 7"/>
-          <p:cNvSpPr txBox="1"/>
-          <p:nvPr/>
-        </p:nvSpPr>
-        <p:spPr>
-          <a:xfrm>
-            <a:off x="731520" y="6309360"/>
-            <a:ext cx="10789920" cy="365760"/>
-          </a:xfrm>
-          <a:prstGeom prst="rect">
-            <a:avLst/>
-          </a:prstGeom>
-          <a:noFill/>
-        </p:spPr>
-        <p:txBody>
-          <a:bodyPr wrap="none">
-            <a:spAutoFit/>
-          </a:bodyPr>
-          <a:lstStyle/>
-          <a:p>
-            <a:pPr>
-              <a:defRPr sz="1000">
-                <a:solidFill>
-                  <a:srgbClr val="64748B"/>
-                </a:solidFill>
-              </a:defRPr>
-            </a:pPr>
-            <a:r>
-              <a:t>PCCST501 Computer Networks | VJCET Dept of CSE | Prepared by Prof. Anju Markose</a:t>
+              <a:defRPr b="1" sz="1300">
+                <a:solidFill>
+                  <a:srgbClr val="D97706"/>
+                </a:solidFill>
+              </a:defRPr>
+            </a:pPr>
+            <a:r>
+              <a:t>PCCST501 Computer Networks | KTU 2024 Scheme • MODULE 4 • M4.2</a:t>
+            </a:r>
+          </a:p>
+          <a:p>
+            <a:pPr>
+              <a:spcAft>
+                <a:spcPts val="1400"/>
+              </a:spcAft>
+              <a:defRPr b="1" sz="3200">
+                <a:solidFill>
+                  <a:srgbClr val="F8FAFC"/>
+                </a:solidFill>
+              </a:defRPr>
+            </a:pPr>
+            <a:r>
+              <a:t>Abstract Syntax Notation One (ASN.1) &amp; MIB-2</a:t>
+            </a:r>
+          </a:p>
+          <a:p>
+            <a:pPr>
+              <a:spcAft>
+                <a:spcPts val="2800"/>
+              </a:spcAft>
+              <a:defRPr sz="1700">
+                <a:solidFill>
+                  <a:srgbClr val="94A3B8"/>
+                </a:solidFill>
+              </a:defRPr>
+            </a:pPr>
+            <a:r>
+              <a:t>ASN.1 Data Types, Basic Encoding Rules (BER) Tag-Length-Value Format, MIB-2 Tree Hierarchy &amp; OID Structure</a:t>
+            </a:r>
+          </a:p>
+          <a:p>
+            <a:pPr>
+              <a:defRPr b="1" sz="1300">
+                <a:solidFill>
+                  <a:srgbClr val="E2E8F0"/>
+                </a:solidFill>
+              </a:defRPr>
+            </a:pPr>
+            <a:r>
+              <a:t>Prepared by: Prof. Anju Markose | Assistant Professor, Dept. of CSE | VJCET</a:t>
+            </a:r>
+          </a:p>
+          <a:p>
+            <a:pPr>
+              <a:defRPr sz="1100">
+                <a:solidFill>
+                  <a:srgbClr val="94A3B8"/>
+                </a:solidFill>
+              </a:defRPr>
+            </a:pPr>
+            <a:r>
+              <a:t>Viswajyothi College of Engineering and Technology (VJCET), Vazhakulam</a:t>
             </a:r>
           </a:p>
         </p:txBody>
@@ -5628,7 +10073,7 @@
             <a:avLst/>
           </a:prstGeom>
           <a:solidFill>
-            <a:srgbClr val="1E3A8A"/>
+            <a:srgbClr val="0F1E4A"/>
           </a:solidFill>
           <a:ln>
             <a:noFill/>
@@ -5658,14 +10103,57 @@
       </p:sp>
       <p:sp>
         <p:nvSpPr>
-          <p:cNvPr id="3" name="TextBox 2"/>
+          <p:cNvPr id="3" name="Rectangle 2"/>
+          <p:cNvSpPr/>
+          <p:nvPr/>
+        </p:nvSpPr>
+        <p:spPr>
+          <a:xfrm>
+            <a:off x="0" y="969264"/>
+            <a:ext cx="12191695" cy="36576"/>
+          </a:xfrm>
+          <a:prstGeom prst="rect">
+            <a:avLst/>
+          </a:prstGeom>
+          <a:solidFill>
+            <a:srgbClr val="D97706"/>
+          </a:solidFill>
+          <a:ln>
+            <a:noFill/>
+          </a:ln>
+        </p:spPr>
+        <p:style>
+          <a:lnRef idx="1">
+            <a:schemeClr val="accent1"/>
+          </a:lnRef>
+          <a:fillRef idx="3">
+            <a:schemeClr val="accent1"/>
+          </a:fillRef>
+          <a:effectRef idx="2">
+            <a:schemeClr val="accent1"/>
+          </a:effectRef>
+          <a:fontRef idx="minor">
+            <a:schemeClr val="lt1"/>
+          </a:fontRef>
+        </p:style>
+        <p:txBody>
+          <a:bodyPr rtlCol="0" anchor="ctr"/>
+          <a:lstStyle/>
+          <a:p>
+            <a:pPr algn="ctr"/>
+          </a:p>
+        </p:txBody>
+      </p:sp>
+      <p:sp>
+        <p:nvSpPr>
+          <p:cNvPr id="4" name="TextBox 3"/>
           <p:cNvSpPr txBox="1"/>
           <p:nvPr/>
         </p:nvSpPr>
         <p:spPr>
           <a:xfrm>
-            <a:off x="731520" y="137160"/>
-            <a:ext cx="8686800" cy="731520"/>
+            <a:off x="731520" y="164592"/>
+            <a:ext cx="8412480" cy="685800"/>
           </a:xfrm>
           <a:prstGeom prst="rect">
             <a:avLst/>
@@ -5679,28 +10167,28 @@
           <a:lstStyle/>
           <a:p>
             <a:pPr>
-              <a:defRPr b="1" sz="2400">
+              <a:defRPr b="1" sz="2300">
                 <a:solidFill>
                   <a:srgbClr val="F8FAFC"/>
                 </a:solidFill>
               </a:defRPr>
             </a:pPr>
             <a:r>
-              <a:t>4.6 Transmission Media (Guided &amp; Unguided)</a:t>
-            </a:r>
-          </a:p>
-        </p:txBody>
-      </p:sp>
-      <p:sp>
-        <p:nvSpPr>
-          <p:cNvPr id="4" name="TextBox 3"/>
+              <a:t>4.2.1 ASN.1 Data Types &amp; BER Wire Encoding</a:t>
+            </a:r>
+          </a:p>
+        </p:txBody>
+      </p:sp>
+      <p:sp>
+        <p:nvSpPr>
+          <p:cNvPr id="5" name="TextBox 4"/>
           <p:cNvSpPr txBox="1"/>
           <p:nvPr/>
         </p:nvSpPr>
         <p:spPr>
           <a:xfrm>
-            <a:off x="8686800" y="137160"/>
-            <a:ext cx="2926080" cy="731520"/>
+            <a:off x="8229600" y="164592"/>
+            <a:ext cx="3291840" cy="685800"/>
           </a:xfrm>
           <a:prstGeom prst="rect">
             <a:avLst/>
@@ -5716,26 +10204,26 @@
             <a:pPr algn="r">
               <a:defRPr b="1" sz="1300">
                 <a:solidFill>
-                  <a:srgbClr val="F59E0B"/>
-                </a:solidFill>
-              </a:defRPr>
-            </a:pPr>
-            <a:r>
-              <a:t>MODULE 4</a:t>
-            </a:r>
-          </a:p>
-        </p:txBody>
-      </p:sp>
-      <p:sp>
-        <p:nvSpPr>
-          <p:cNvPr id="5" name="TextBox 4"/>
+                  <a:srgbClr val="D97706"/>
+                </a:solidFill>
+              </a:defRPr>
+            </a:pPr>
+            <a:r>
+              <a:t>M4.2 ASN.1 &amp; BER</a:t>
+            </a:r>
+          </a:p>
+        </p:txBody>
+      </p:sp>
+      <p:sp>
+        <p:nvSpPr>
+          <p:cNvPr id="6" name="TextBox 5"/>
           <p:cNvSpPr txBox="1"/>
           <p:nvPr/>
         </p:nvSpPr>
         <p:spPr>
           <a:xfrm>
             <a:off x="731520" y="1280160"/>
-            <a:ext cx="6858000" cy="5029200"/>
+            <a:ext cx="6858000" cy="4937760"/>
           </a:xfrm>
           <a:prstGeom prst="rect">
             <a:avLst/>
@@ -5750,104 +10238,164 @@
           <a:p>
             <a:pPr>
               <a:spcAft>
-                <a:spcPts val="400"/>
-              </a:spcAft>
-              <a:defRPr b="1" sz="1600">
-                <a:solidFill>
-                  <a:srgbClr val="1E3A8A"/>
-                </a:solidFill>
-              </a:defRPr>
-            </a:pPr>
-            <a:r>
-              <a:t>• Guided Media (Physical Conductors): </a:t>
-            </a:r>
-          </a:p>
-          <a:p>
-            <a:pPr>
-              <a:spcAft>
-                <a:spcPts val="1000"/>
-              </a:spcAft>
-              <a:defRPr sz="1400">
-                <a:solidFill>
-                  <a:srgbClr val="1E293B"/>
-                </a:solidFill>
-              </a:defRPr>
-            </a:pPr>
-            <a:r>
-              <a:t>   Twisted Pair (UTP Cat 5e/6, STP - twists cancel electromagnetic interference), Coaxial Cable (copper core with braided shield), Optical Fiber (light propagation by Total Internal Reflection; Single-mode vs Multi-mode).</a:t>
-            </a:r>
-          </a:p>
-          <a:p>
-            <a:pPr>
-              <a:spcAft>
-                <a:spcPts val="400"/>
-              </a:spcAft>
-              <a:defRPr b="1" sz="1600">
-                <a:solidFill>
-                  <a:srgbClr val="1E3A8A"/>
-                </a:solidFill>
-              </a:defRPr>
-            </a:pPr>
-            <a:r>
-              <a:t>• Unguided Media (Wireless Propagation): </a:t>
-            </a:r>
-          </a:p>
-          <a:p>
-            <a:pPr>
-              <a:spcAft>
-                <a:spcPts val="1000"/>
-              </a:spcAft>
-              <a:defRPr sz="1400">
-                <a:solidFill>
-                  <a:srgbClr val="1E293B"/>
-                </a:solidFill>
-              </a:defRPr>
-            </a:pPr>
-            <a:r>
-              <a:t>   Radio Waves (3 kHz - 1 GHz, omnidirectional, penetrate walls), Microwaves (1 GHz - 300 GHz, line-of-sight, parabolic dish), Infrared (300 GHz - 400 THz, short range, cannot penetrate walls).</a:t>
-            </a:r>
-          </a:p>
-          <a:p>
-            <a:pPr>
-              <a:spcAft>
-                <a:spcPts val="400"/>
-              </a:spcAft>
-              <a:defRPr b="1" sz="1600">
-                <a:solidFill>
-                  <a:srgbClr val="1E3A8A"/>
-                </a:solidFill>
-              </a:defRPr>
-            </a:pPr>
-            <a:r>
-              <a:t>• Satellite Communication: </a:t>
-            </a:r>
-          </a:p>
-          <a:p>
-            <a:pPr>
-              <a:spcAft>
-                <a:spcPts val="1000"/>
-              </a:spcAft>
-              <a:defRPr sz="1400">
-                <a:solidFill>
-                  <a:srgbClr val="1E293B"/>
-                </a:solidFill>
-              </a:defRPr>
-            </a:pPr>
-            <a:r>
-              <a:t>   Geostationary Earth Orbit (GEO ~36,000 km), Medium Earth Orbit (MEO: GPS), Low Earth Orbit (LEO: Starlink, low propagation delay).</a:t>
-            </a:r>
-          </a:p>
-        </p:txBody>
-      </p:sp>
-      <p:sp>
-        <p:nvSpPr>
-          <p:cNvPr id="6" name="Rounded Rectangle 5"/>
+                <a:spcPts val="200"/>
+              </a:spcAft>
+              <a:defRPr b="1" sz="1500">
+                <a:solidFill>
+                  <a:srgbClr val="0F1E4A"/>
+                </a:solidFill>
+              </a:defRPr>
+            </a:pPr>
+            <a:r>
+              <a:t>• Role of ASN.1</a:t>
+            </a:r>
+          </a:p>
+          <a:p>
+            <a:pPr>
+              <a:spcAft>
+                <a:spcPts val="800"/>
+              </a:spcAft>
+              <a:defRPr sz="1300">
+                <a:solidFill>
+                  <a:srgbClr val="1E293B"/>
+                </a:solidFill>
+              </a:defRPr>
+            </a:pPr>
+            <a:r>
+              <a:t>   A formal, machine-independent language for specifying data types and structured messages independently of operating system hardware or byte-ordering conventions.</a:t>
+            </a:r>
+          </a:p>
+          <a:p>
+            <a:pPr>
+              <a:spcAft>
+                <a:spcPts val="200"/>
+              </a:spcAft>
+              <a:defRPr b="1" sz="1500">
+                <a:solidFill>
+                  <a:srgbClr val="0F1E4A"/>
+                </a:solidFill>
+              </a:defRPr>
+            </a:pPr>
+            <a:r>
+              <a:t>• Primitive ASN.1 Data Types</a:t>
+            </a:r>
+          </a:p>
+          <a:p>
+            <a:pPr>
+              <a:spcAft>
+                <a:spcPts val="800"/>
+              </a:spcAft>
+              <a:defRPr sz="1300">
+                <a:solidFill>
+                  <a:srgbClr val="1E293B"/>
+                </a:solidFill>
+              </a:defRPr>
+            </a:pPr>
+            <a:r>
+              <a:t>   `INTEGER` (signed integer), `OCTET STRING` (byte sequence), `OBJECT IDENTIFIER` (dotted OID path), `BOOLEAN` (True/False), `NULL` (empty placeholder).</a:t>
+            </a:r>
+          </a:p>
+          <a:p>
+            <a:pPr>
+              <a:spcAft>
+                <a:spcPts val="200"/>
+              </a:spcAft>
+              <a:defRPr b="1" sz="1500">
+                <a:solidFill>
+                  <a:srgbClr val="0F1E4A"/>
+                </a:solidFill>
+              </a:defRPr>
+            </a:pPr>
+            <a:r>
+              <a:t>• Constructed ASN.1 Data Types</a:t>
+            </a:r>
+          </a:p>
+          <a:p>
+            <a:pPr>
+              <a:spcAft>
+                <a:spcPts val="800"/>
+              </a:spcAft>
+              <a:defRPr sz="1300">
+                <a:solidFill>
+                  <a:srgbClr val="1E293B"/>
+                </a:solidFill>
+              </a:defRPr>
+            </a:pPr>
+            <a:r>
+              <a:t>   `SEQUENCE` (ordered list of different types - like a C struct), `SEQUENCE OF` (ordered list of same type - like an array).</a:t>
+            </a:r>
+          </a:p>
+          <a:p>
+            <a:pPr>
+              <a:spcAft>
+                <a:spcPts val="200"/>
+              </a:spcAft>
+              <a:defRPr b="1" sz="1500">
+                <a:solidFill>
+                  <a:srgbClr val="0F1E4A"/>
+                </a:solidFill>
+              </a:defRPr>
+            </a:pPr>
+            <a:r>
+              <a:t>• Basic Encoding Rules (BER - TLV Format)</a:t>
+            </a:r>
+          </a:p>
+          <a:p>
+            <a:pPr>
+              <a:spcAft>
+                <a:spcPts val="800"/>
+              </a:spcAft>
+              <a:defRPr sz="1300">
+                <a:solidFill>
+                  <a:srgbClr val="1E293B"/>
+                </a:solidFill>
+              </a:defRPr>
+            </a:pPr>
+            <a:r>
+              <a:t>   Serializes ASN.1 objects into wire bytes as `[Tag | Length | Value]`.</a:t>
+            </a:r>
+          </a:p>
+          <a:p>
+            <a:pPr>
+              <a:spcAft>
+                <a:spcPts val="200"/>
+              </a:spcAft>
+              <a:defRPr b="1" sz="1500">
+                <a:solidFill>
+                  <a:srgbClr val="0F1E4A"/>
+                </a:solidFill>
+              </a:defRPr>
+            </a:pPr>
+            <a:r>
+              <a:t>• BER Example</a:t>
+            </a:r>
+          </a:p>
+          <a:p>
+            <a:pPr>
+              <a:spcAft>
+                <a:spcPts val="800"/>
+              </a:spcAft>
+              <a:defRPr sz="1300">
+                <a:solidFill>
+                  <a:srgbClr val="1E293B"/>
+                </a:solidFill>
+              </a:defRPr>
+            </a:pPr>
+            <a:r>
+              <a:t>   Tag specifies data type (e.g. `0x02` for INTEGER), Length specifies payload byte count (e.g. `0x01`), Value contains actual data (e.g. `0x05` $\implies$ `02 01 05` encodes integer 5).</a:t>
+            </a:r>
+          </a:p>
+        </p:txBody>
+      </p:sp>
+      <p:sp>
+        <p:nvSpPr>
+          <p:cNvPr id="7" name="Rounded Rectangle 6"/>
           <p:cNvSpPr/>
           <p:nvPr/>
         </p:nvSpPr>
         <p:spPr>
           <a:xfrm>
-            <a:off x="7955279" y="1371600"/>
+            <a:off x="7955279" y="1280160"/>
             <a:ext cx="3566160" cy="4846320"/>
           </a:xfrm>
           <a:prstGeom prst="roundRect">
@@ -5886,14 +10434,14 @@
       </p:sp>
       <p:sp>
         <p:nvSpPr>
-          <p:cNvPr id="7" name="TextBox 6"/>
+          <p:cNvPr id="8" name="TextBox 7"/>
           <p:cNvSpPr txBox="1"/>
           <p:nvPr/>
         </p:nvSpPr>
         <p:spPr>
           <a:xfrm>
-            <a:off x="8138160" y="1554480"/>
-            <a:ext cx="3200400" cy="4480560"/>
+            <a:off x="8138160" y="1417320"/>
+            <a:ext cx="3200400" cy="4572000"/>
           </a:xfrm>
           <a:prstGeom prst="rect">
             <a:avLst/>
@@ -5908,68 +10456,98 @@
           <a:p>
             <a:pPr>
               <a:spcAft>
-                <a:spcPts val="1200"/>
-              </a:spcAft>
-              <a:defRPr b="1" sz="1600">
+                <a:spcPts val="1000"/>
+              </a:spcAft>
+              <a:defRPr b="1" sz="1500">
                 <a:solidFill>
                   <a:srgbClr val="0E7490"/>
                 </a:solidFill>
               </a:defRPr>
             </a:pPr>
             <a:r>
-              <a:t>Media Comparison</a:t>
-            </a:r>
-          </a:p>
-          <a:p>
-            <a:pPr>
-              <a:spcAft>
-                <a:spcPts val="800"/>
-              </a:spcAft>
-              <a:defRPr sz="1300">
-                <a:solidFill>
-                  <a:srgbClr val="1E293B"/>
-                </a:solidFill>
-              </a:defRPr>
-            </a:pPr>
-            <a:r>
-              <a:t>→ UTP: Inexpensive, easy install, 100m limit</a:t>
-            </a:r>
-          </a:p>
-          <a:p>
-            <a:pPr>
-              <a:spcAft>
-                <a:spcPts val="800"/>
-              </a:spcAft>
-              <a:defRPr sz="1300">
-                <a:solidFill>
-                  <a:srgbClr val="1E293B"/>
-                </a:solidFill>
-              </a:defRPr>
-            </a:pPr>
-            <a:r>
-              <a:t>→ Fiber: Immense bandwidth, immune to EMI, long distance</a:t>
-            </a:r>
-          </a:p>
-          <a:p>
-            <a:pPr>
-              <a:spcAft>
-                <a:spcPts val="800"/>
-              </a:spcAft>
-              <a:defRPr sz="1300">
-                <a:solidFill>
-                  <a:srgbClr val="1E293B"/>
-                </a:solidFill>
-              </a:defRPr>
-            </a:pPr>
-            <a:r>
-              <a:t>→ Radio/Microwave: High mobility, path loss / fading</a:t>
-            </a:r>
-          </a:p>
-        </p:txBody>
-      </p:sp>
-      <p:sp>
-        <p:nvSpPr>
-          <p:cNvPr id="8" name="TextBox 7"/>
+              <a:t>BER TLV Structure</a:t>
+            </a:r>
+          </a:p>
+          <a:p>
+            <a:pPr>
+              <a:spcAft>
+                <a:spcPts val="600"/>
+              </a:spcAft>
+              <a:defRPr sz="1200">
+                <a:solidFill>
+                  <a:srgbClr val="1E293B"/>
+                </a:solidFill>
+              </a:defRPr>
+            </a:pPr>
+            <a:r>
+              <a:t>→ Tag (Type): 1 Byte identifier</a:t>
+            </a:r>
+          </a:p>
+          <a:p>
+            <a:pPr>
+              <a:spcAft>
+                <a:spcPts val="600"/>
+              </a:spcAft>
+              <a:defRPr sz="1200">
+                <a:solidFill>
+                  <a:srgbClr val="1E293B"/>
+                </a:solidFill>
+              </a:defRPr>
+            </a:pPr>
+            <a:r>
+              <a:t>→ Length: Byte count of Value</a:t>
+            </a:r>
+          </a:p>
+          <a:p>
+            <a:pPr>
+              <a:spcAft>
+                <a:spcPts val="600"/>
+              </a:spcAft>
+              <a:defRPr sz="1200">
+                <a:solidFill>
+                  <a:srgbClr val="1E293B"/>
+                </a:solidFill>
+              </a:defRPr>
+            </a:pPr>
+            <a:r>
+              <a:t>→ Value: Actual binary payload</a:t>
+            </a:r>
+          </a:p>
+          <a:p>
+            <a:pPr>
+              <a:spcAft>
+                <a:spcPts val="600"/>
+              </a:spcAft>
+              <a:defRPr sz="1200">
+                <a:solidFill>
+                  <a:srgbClr val="1E293B"/>
+                </a:solidFill>
+              </a:defRPr>
+            </a:pPr>
+            <a:r>
+              <a:t>→ 02 01 05: INTEGER 5</a:t>
+            </a:r>
+          </a:p>
+          <a:p>
+            <a:pPr>
+              <a:spcAft>
+                <a:spcPts val="600"/>
+              </a:spcAft>
+              <a:defRPr sz="1200">
+                <a:solidFill>
+                  <a:srgbClr val="1E293B"/>
+                </a:solidFill>
+              </a:defRPr>
+            </a:pPr>
+            <a:r>
+              <a:t>→ 04 03 41 42 43: OCTET STRING 'ABC'</a:t>
+            </a:r>
+          </a:p>
+        </p:txBody>
+      </p:sp>
+      <p:sp>
+        <p:nvSpPr>
+          <p:cNvPr id="9" name="TextBox 8"/>
           <p:cNvSpPr txBox="1"/>
           <p:nvPr/>
         </p:nvSpPr>
@@ -5990,14 +10568,750 @@
           <a:lstStyle/>
           <a:p>
             <a:pPr>
-              <a:defRPr sz="1000">
+              <a:defRPr sz="950">
                 <a:solidFill>
                   <a:srgbClr val="64748B"/>
                 </a:solidFill>
               </a:defRPr>
             </a:pPr>
             <a:r>
-              <a:t>PCCST501 Computer Networks | VJCET Dept of CSE | Prepared by Prof. Anju Markose</a:t>
+              <a:t>PCCST501 Computer Networks | KTU 2024 Scheme | Prof. Anju Markose | Assistant Professor, Dept. of CSE | VJCET</a:t>
+            </a:r>
+          </a:p>
+        </p:txBody>
+      </p:sp>
+    </p:spTree>
+  </p:cSld>
+  <p:clrMapOvr>
+    <a:masterClrMapping/>
+  </p:clrMapOvr>
+</p:sld>
+</file>
+
+<file path=ppt/slides/slide8.xml><?xml version="1.0" encoding="utf-8"?>
+<p:sld xmlns:a="http://schemas.openxmlformats.org/drawingml/2006/main" xmlns:p="http://schemas.openxmlformats.org/presentationml/2006/main" xmlns:r="http://schemas.openxmlformats.org/officeDocument/2006/relationships">
+  <p:cSld>
+    <p:spTree>
+      <p:nvGrpSpPr>
+        <p:cNvPr id="1" name=""/>
+        <p:cNvGrpSpPr/>
+        <p:nvPr/>
+      </p:nvGrpSpPr>
+      <p:grpSpPr/>
+      <p:sp>
+        <p:nvSpPr>
+          <p:cNvPr id="2" name="Rectangle 1"/>
+          <p:cNvSpPr/>
+          <p:nvPr/>
+        </p:nvSpPr>
+        <p:spPr>
+          <a:xfrm>
+            <a:off x="0" y="0"/>
+            <a:ext cx="12191695" cy="1005840"/>
+          </a:xfrm>
+          <a:prstGeom prst="rect">
+            <a:avLst/>
+          </a:prstGeom>
+          <a:solidFill>
+            <a:srgbClr val="0F1E4A"/>
+          </a:solidFill>
+          <a:ln>
+            <a:noFill/>
+          </a:ln>
+        </p:spPr>
+        <p:style>
+          <a:lnRef idx="1">
+            <a:schemeClr val="accent1"/>
+          </a:lnRef>
+          <a:fillRef idx="3">
+            <a:schemeClr val="accent1"/>
+          </a:fillRef>
+          <a:effectRef idx="2">
+            <a:schemeClr val="accent1"/>
+          </a:effectRef>
+          <a:fontRef idx="minor">
+            <a:schemeClr val="lt1"/>
+          </a:fontRef>
+        </p:style>
+        <p:txBody>
+          <a:bodyPr rtlCol="0" anchor="ctr"/>
+          <a:lstStyle/>
+          <a:p>
+            <a:pPr algn="ctr"/>
+          </a:p>
+        </p:txBody>
+      </p:sp>
+      <p:sp>
+        <p:nvSpPr>
+          <p:cNvPr id="3" name="Rectangle 2"/>
+          <p:cNvSpPr/>
+          <p:nvPr/>
+        </p:nvSpPr>
+        <p:spPr>
+          <a:xfrm>
+            <a:off x="0" y="969264"/>
+            <a:ext cx="12191695" cy="36576"/>
+          </a:xfrm>
+          <a:prstGeom prst="rect">
+            <a:avLst/>
+          </a:prstGeom>
+          <a:solidFill>
+            <a:srgbClr val="D97706"/>
+          </a:solidFill>
+          <a:ln>
+            <a:noFill/>
+          </a:ln>
+        </p:spPr>
+        <p:style>
+          <a:lnRef idx="1">
+            <a:schemeClr val="accent1"/>
+          </a:lnRef>
+          <a:fillRef idx="3">
+            <a:schemeClr val="accent1"/>
+          </a:fillRef>
+          <a:effectRef idx="2">
+            <a:schemeClr val="accent1"/>
+          </a:effectRef>
+          <a:fontRef idx="minor">
+            <a:schemeClr val="lt1"/>
+          </a:fontRef>
+        </p:style>
+        <p:txBody>
+          <a:bodyPr rtlCol="0" anchor="ctr"/>
+          <a:lstStyle/>
+          <a:p>
+            <a:pPr algn="ctr"/>
+          </a:p>
+        </p:txBody>
+      </p:sp>
+      <p:sp>
+        <p:nvSpPr>
+          <p:cNvPr id="4" name="TextBox 3"/>
+          <p:cNvSpPr txBox="1"/>
+          <p:nvPr/>
+        </p:nvSpPr>
+        <p:spPr>
+          <a:xfrm>
+            <a:off x="731520" y="164592"/>
+            <a:ext cx="8412480" cy="685800"/>
+          </a:xfrm>
+          <a:prstGeom prst="rect">
+            <a:avLst/>
+          </a:prstGeom>
+          <a:noFill/>
+        </p:spPr>
+        <p:txBody>
+          <a:bodyPr wrap="none">
+            <a:spAutoFit/>
+          </a:bodyPr>
+          <a:lstStyle/>
+          <a:p>
+            <a:pPr>
+              <a:defRPr b="1" sz="2300">
+                <a:solidFill>
+                  <a:srgbClr val="F8FAFC"/>
+                </a:solidFill>
+              </a:defRPr>
+            </a:pPr>
+            <a:r>
+              <a:t>4.2.2 Management Information Base (MIB-2) Tree &amp; OIDs</a:t>
+            </a:r>
+          </a:p>
+        </p:txBody>
+      </p:sp>
+      <p:sp>
+        <p:nvSpPr>
+          <p:cNvPr id="5" name="TextBox 4"/>
+          <p:cNvSpPr txBox="1"/>
+          <p:nvPr/>
+        </p:nvSpPr>
+        <p:spPr>
+          <a:xfrm>
+            <a:off x="8229600" y="164592"/>
+            <a:ext cx="3291840" cy="685800"/>
+          </a:xfrm>
+          <a:prstGeom prst="rect">
+            <a:avLst/>
+          </a:prstGeom>
+          <a:noFill/>
+        </p:spPr>
+        <p:txBody>
+          <a:bodyPr wrap="none">
+            <a:spAutoFit/>
+          </a:bodyPr>
+          <a:lstStyle/>
+          <a:p>
+            <a:pPr algn="r">
+              <a:defRPr b="1" sz="1300">
+                <a:solidFill>
+                  <a:srgbClr val="D97706"/>
+                </a:solidFill>
+              </a:defRPr>
+            </a:pPr>
+            <a:r>
+              <a:t>M4.2 MIB-2 HIERARCHY</a:t>
+            </a:r>
+          </a:p>
+        </p:txBody>
+      </p:sp>
+      <p:sp>
+        <p:nvSpPr>
+          <p:cNvPr id="6" name="TextBox 5"/>
+          <p:cNvSpPr txBox="1"/>
+          <p:nvPr/>
+        </p:nvSpPr>
+        <p:spPr>
+          <a:xfrm>
+            <a:off x="731520" y="1280160"/>
+            <a:ext cx="6858000" cy="4937760"/>
+          </a:xfrm>
+          <a:prstGeom prst="rect">
+            <a:avLst/>
+          </a:prstGeom>
+          <a:noFill/>
+        </p:spPr>
+        <p:txBody>
+          <a:bodyPr wrap="square">
+            <a:spAutoFit/>
+          </a:bodyPr>
+          <a:lstStyle/>
+          <a:p>
+            <a:pPr>
+              <a:spcAft>
+                <a:spcPts val="200"/>
+              </a:spcAft>
+              <a:defRPr b="1" sz="1500">
+                <a:solidFill>
+                  <a:srgbClr val="0F1E4A"/>
+                </a:solidFill>
+              </a:defRPr>
+            </a:pPr>
+            <a:r>
+              <a:t>• MIB-2 Tree Hierarchy</a:t>
+            </a:r>
+          </a:p>
+          <a:p>
+            <a:pPr>
+              <a:spcAft>
+                <a:spcPts val="800"/>
+              </a:spcAft>
+              <a:defRPr sz="1300">
+                <a:solidFill>
+                  <a:srgbClr val="1E293B"/>
+                </a:solidFill>
+              </a:defRPr>
+            </a:pPr>
+            <a:r>
+              <a:t>   All managed objects are organized into a globally unique hierarchical tree identified by dotted numeric Object Identifiers (OIDs).</a:t>
+            </a:r>
+          </a:p>
+          <a:p>
+            <a:pPr>
+              <a:spcAft>
+                <a:spcPts val="200"/>
+              </a:spcAft>
+              <a:defRPr b="1" sz="1500">
+                <a:solidFill>
+                  <a:srgbClr val="0F1E4A"/>
+                </a:solidFill>
+              </a:defRPr>
+            </a:pPr>
+            <a:r>
+              <a:t>• Standard Internet Root Path</a:t>
+            </a:r>
+          </a:p>
+          <a:p>
+            <a:pPr>
+              <a:spcAft>
+                <a:spcPts val="800"/>
+              </a:spcAft>
+              <a:defRPr sz="1300">
+                <a:solidFill>
+                  <a:srgbClr val="1E293B"/>
+                </a:solidFill>
+              </a:defRPr>
+            </a:pPr>
+            <a:r>
+              <a:t>   `iso(1) . org(3) . dod(6) . internet(1) . mgmt(2) . mib-2(1)` = `1.3.6.1.2.1`.</a:t>
+            </a:r>
+          </a:p>
+          <a:p>
+            <a:pPr>
+              <a:spcAft>
+                <a:spcPts val="200"/>
+              </a:spcAft>
+              <a:defRPr b="1" sz="1500">
+                <a:solidFill>
+                  <a:srgbClr val="0F1E4A"/>
+                </a:solidFill>
+              </a:defRPr>
+            </a:pPr>
+            <a:r>
+              <a:t>• Key MIB-2 Functional Groups</a:t>
+            </a:r>
+          </a:p>
+          <a:p>
+            <a:pPr>
+              <a:spcAft>
+                <a:spcPts val="800"/>
+              </a:spcAft>
+              <a:defRPr sz="1300">
+                <a:solidFill>
+                  <a:srgbClr val="1E293B"/>
+                </a:solidFill>
+              </a:defRPr>
+            </a:pPr>
+            <a:r>
+              <a:t>   1. `system (1.3.6.1.2.1.1)`: Device name, description, uptime, contact.</a:t>
+            </a:r>
+          </a:p>
+          <a:p>
+            <a:pPr>
+              <a:spcAft>
+                <a:spcPts val="200"/>
+              </a:spcAft>
+              <a:defRPr b="1" sz="1500">
+                <a:solidFill>
+                  <a:srgbClr val="0F1E4A"/>
+                </a:solidFill>
+              </a:defRPr>
+            </a:pPr>
+            <a:r>
+              <a:t>• 2. `interfaces (1.3.6.1.2.1.2)`</a:t>
+            </a:r>
+          </a:p>
+          <a:p>
+            <a:pPr>
+              <a:spcAft>
+                <a:spcPts val="800"/>
+              </a:spcAft>
+              <a:defRPr sz="1300">
+                <a:solidFill>
+                  <a:srgbClr val="1E293B"/>
+                </a:solidFill>
+              </a:defRPr>
+            </a:pPr>
+            <a:r>
+              <a:t>   Number of interfaces, interface speed, MTU, packet counters (`ifInOctets`, `ifOutOctets`).</a:t>
+            </a:r>
+          </a:p>
+          <a:p>
+            <a:pPr>
+              <a:spcAft>
+                <a:spcPts val="200"/>
+              </a:spcAft>
+              <a:defRPr b="1" sz="1500">
+                <a:solidFill>
+                  <a:srgbClr val="0F1E4A"/>
+                </a:solidFill>
+              </a:defRPr>
+            </a:pPr>
+            <a:r>
+              <a:t>• 3. `ip (1.3.6.1.2.1.4)` &amp; `tcp (1.3.6.1.2.1.6)`</a:t>
+            </a:r>
+          </a:p>
+          <a:p>
+            <a:pPr>
+              <a:spcAft>
+                <a:spcPts val="800"/>
+              </a:spcAft>
+              <a:defRPr sz="1300">
+                <a:solidFill>
+                  <a:srgbClr val="1E293B"/>
+                </a:solidFill>
+              </a:defRPr>
+            </a:pPr>
+            <a:r>
+              <a:t>   IP routing table (`ipRouteTable`), forwarding counters, active TCP connection table (`tcpConnTable`).</a:t>
+            </a:r>
+          </a:p>
+        </p:txBody>
+      </p:sp>
+      <p:sp>
+        <p:nvSpPr>
+          <p:cNvPr id="7" name="Rounded Rectangle 6"/>
+          <p:cNvSpPr/>
+          <p:nvPr/>
+        </p:nvSpPr>
+        <p:spPr>
+          <a:xfrm>
+            <a:off x="7955279" y="1280160"/>
+            <a:ext cx="3566160" cy="4846320"/>
+          </a:xfrm>
+          <a:prstGeom prst="roundRect">
+            <a:avLst/>
+          </a:prstGeom>
+          <a:solidFill>
+            <a:srgbClr val="F1F5F9"/>
+          </a:solidFill>
+          <a:ln w="19050">
+            <a:solidFill>
+              <a:srgbClr val="0E7490"/>
+            </a:solidFill>
+          </a:ln>
+        </p:spPr>
+        <p:style>
+          <a:lnRef idx="1">
+            <a:schemeClr val="accent1"/>
+          </a:lnRef>
+          <a:fillRef idx="3">
+            <a:schemeClr val="accent1"/>
+          </a:fillRef>
+          <a:effectRef idx="2">
+            <a:schemeClr val="accent1"/>
+          </a:effectRef>
+          <a:fontRef idx="minor">
+            <a:schemeClr val="lt1"/>
+          </a:fontRef>
+        </p:style>
+        <p:txBody>
+          <a:bodyPr rtlCol="0" anchor="ctr"/>
+          <a:lstStyle/>
+          <a:p>
+            <a:pPr algn="ctr"/>
+          </a:p>
+        </p:txBody>
+      </p:sp>
+      <p:sp>
+        <p:nvSpPr>
+          <p:cNvPr id="8" name="TextBox 7"/>
+          <p:cNvSpPr txBox="1"/>
+          <p:nvPr/>
+        </p:nvSpPr>
+        <p:spPr>
+          <a:xfrm>
+            <a:off x="8138160" y="1417320"/>
+            <a:ext cx="3200400" cy="4572000"/>
+          </a:xfrm>
+          <a:prstGeom prst="rect">
+            <a:avLst/>
+          </a:prstGeom>
+          <a:noFill/>
+        </p:spPr>
+        <p:txBody>
+          <a:bodyPr wrap="square">
+            <a:spAutoFit/>
+          </a:bodyPr>
+          <a:lstStyle/>
+          <a:p>
+            <a:pPr>
+              <a:spcAft>
+                <a:spcPts val="1000"/>
+              </a:spcAft>
+              <a:defRPr b="1" sz="1500">
+                <a:solidFill>
+                  <a:srgbClr val="0E7490"/>
+                </a:solidFill>
+              </a:defRPr>
+            </a:pPr>
+            <a:r>
+              <a:t>Key MIB OIDs</a:t>
+            </a:r>
+          </a:p>
+          <a:p>
+            <a:pPr>
+              <a:spcAft>
+                <a:spcPts val="600"/>
+              </a:spcAft>
+              <a:defRPr sz="1200">
+                <a:solidFill>
+                  <a:srgbClr val="1E293B"/>
+                </a:solidFill>
+              </a:defRPr>
+            </a:pPr>
+            <a:r>
+              <a:t>→ sysDescr: 1.3.6.1.2.1.1.1</a:t>
+            </a:r>
+          </a:p>
+          <a:p>
+            <a:pPr>
+              <a:spcAft>
+                <a:spcPts val="600"/>
+              </a:spcAft>
+              <a:defRPr sz="1200">
+                <a:solidFill>
+                  <a:srgbClr val="1E293B"/>
+                </a:solidFill>
+              </a:defRPr>
+            </a:pPr>
+            <a:r>
+              <a:t>→ sysUpTime: 1.3.6.1.2.1.1.3</a:t>
+            </a:r>
+          </a:p>
+          <a:p>
+            <a:pPr>
+              <a:spcAft>
+                <a:spcPts val="600"/>
+              </a:spcAft>
+              <a:defRPr sz="1200">
+                <a:solidFill>
+                  <a:srgbClr val="1E293B"/>
+                </a:solidFill>
+              </a:defRPr>
+            </a:pPr>
+            <a:r>
+              <a:t>→ ifNumber: 1.3.6.1.2.1.2.1</a:t>
+            </a:r>
+          </a:p>
+          <a:p>
+            <a:pPr>
+              <a:spcAft>
+                <a:spcPts val="600"/>
+              </a:spcAft>
+              <a:defRPr sz="1200">
+                <a:solidFill>
+                  <a:srgbClr val="1E293B"/>
+                </a:solidFill>
+              </a:defRPr>
+            </a:pPr>
+            <a:r>
+              <a:t>→ ipForwarding: 1.3.6.1.2.1.4.1</a:t>
+            </a:r>
+          </a:p>
+          <a:p>
+            <a:pPr>
+              <a:spcAft>
+                <a:spcPts val="600"/>
+              </a:spcAft>
+              <a:defRPr sz="1200">
+                <a:solidFill>
+                  <a:srgbClr val="1E293B"/>
+                </a:solidFill>
+              </a:defRPr>
+            </a:pPr>
+            <a:r>
+              <a:t>→ Scalar append .0: sysDescr.0</a:t>
+            </a:r>
+          </a:p>
+        </p:txBody>
+      </p:sp>
+      <p:sp>
+        <p:nvSpPr>
+          <p:cNvPr id="9" name="TextBox 8"/>
+          <p:cNvSpPr txBox="1"/>
+          <p:nvPr/>
+        </p:nvSpPr>
+        <p:spPr>
+          <a:xfrm>
+            <a:off x="731520" y="6309360"/>
+            <a:ext cx="10789920" cy="365760"/>
+          </a:xfrm>
+          <a:prstGeom prst="rect">
+            <a:avLst/>
+          </a:prstGeom>
+          <a:noFill/>
+        </p:spPr>
+        <p:txBody>
+          <a:bodyPr wrap="none">
+            <a:spAutoFit/>
+          </a:bodyPr>
+          <a:lstStyle/>
+          <a:p>
+            <a:pPr>
+              <a:defRPr sz="950">
+                <a:solidFill>
+                  <a:srgbClr val="64748B"/>
+                </a:solidFill>
+              </a:defRPr>
+            </a:pPr>
+            <a:r>
+              <a:t>PCCST501 Computer Networks | KTU 2024 Scheme | Prof. Anju Markose | Assistant Professor, Dept. of CSE | VJCET</a:t>
+            </a:r>
+          </a:p>
+        </p:txBody>
+      </p:sp>
+    </p:spTree>
+  </p:cSld>
+  <p:clrMapOvr>
+    <a:masterClrMapping/>
+  </p:clrMapOvr>
+</p:sld>
+</file>
+
+<file path=ppt/slides/slide9.xml><?xml version="1.0" encoding="utf-8"?>
+<p:sld xmlns:a="http://schemas.openxmlformats.org/drawingml/2006/main" xmlns:p="http://schemas.openxmlformats.org/presentationml/2006/main" xmlns:r="http://schemas.openxmlformats.org/officeDocument/2006/relationships">
+  <p:cSld>
+    <p:spTree>
+      <p:nvGrpSpPr>
+        <p:cNvPr id="1" name=""/>
+        <p:cNvGrpSpPr/>
+        <p:nvPr/>
+      </p:nvGrpSpPr>
+      <p:grpSpPr/>
+      <p:sp>
+        <p:nvSpPr>
+          <p:cNvPr id="2" name="Rectangle 1"/>
+          <p:cNvSpPr/>
+          <p:nvPr/>
+        </p:nvSpPr>
+        <p:spPr>
+          <a:xfrm>
+            <a:off x="0" y="0"/>
+            <a:ext cx="12191695" cy="6858000"/>
+          </a:xfrm>
+          <a:prstGeom prst="rect">
+            <a:avLst/>
+          </a:prstGeom>
+          <a:solidFill>
+            <a:srgbClr val="0F172A"/>
+          </a:solidFill>
+          <a:ln>
+            <a:noFill/>
+          </a:ln>
+        </p:spPr>
+        <p:style>
+          <a:lnRef idx="1">
+            <a:schemeClr val="accent1"/>
+          </a:lnRef>
+          <a:fillRef idx="3">
+            <a:schemeClr val="accent1"/>
+          </a:fillRef>
+          <a:effectRef idx="2">
+            <a:schemeClr val="accent1"/>
+          </a:effectRef>
+          <a:fontRef idx="minor">
+            <a:schemeClr val="lt1"/>
+          </a:fontRef>
+        </p:style>
+        <p:txBody>
+          <a:bodyPr rtlCol="0" anchor="ctr"/>
+          <a:lstStyle/>
+          <a:p>
+            <a:pPr algn="ctr"/>
+          </a:p>
+        </p:txBody>
+      </p:sp>
+      <p:sp>
+        <p:nvSpPr>
+          <p:cNvPr id="3" name="Rectangle 2"/>
+          <p:cNvSpPr/>
+          <p:nvPr/>
+        </p:nvSpPr>
+        <p:spPr>
+          <a:xfrm>
+            <a:off x="822960" y="1188720"/>
+            <a:ext cx="164592" cy="4480560"/>
+          </a:xfrm>
+          <a:prstGeom prst="rect">
+            <a:avLst/>
+          </a:prstGeom>
+          <a:solidFill>
+            <a:srgbClr val="D97706"/>
+          </a:solidFill>
+          <a:ln>
+            <a:noFill/>
+          </a:ln>
+        </p:spPr>
+        <p:style>
+          <a:lnRef idx="1">
+            <a:schemeClr val="accent1"/>
+          </a:lnRef>
+          <a:fillRef idx="3">
+            <a:schemeClr val="accent1"/>
+          </a:fillRef>
+          <a:effectRef idx="2">
+            <a:schemeClr val="accent1"/>
+          </a:effectRef>
+          <a:fontRef idx="minor">
+            <a:schemeClr val="lt1"/>
+          </a:fontRef>
+        </p:style>
+        <p:txBody>
+          <a:bodyPr rtlCol="0" anchor="ctr"/>
+          <a:lstStyle/>
+          <a:p>
+            <a:pPr algn="ctr"/>
+          </a:p>
+        </p:txBody>
+      </p:sp>
+      <p:sp>
+        <p:nvSpPr>
+          <p:cNvPr id="4" name="TextBox 3"/>
+          <p:cNvSpPr txBox="1"/>
+          <p:nvPr/>
+        </p:nvSpPr>
+        <p:spPr>
+          <a:xfrm>
+            <a:off x="1280160" y="1097280"/>
+            <a:ext cx="10058400" cy="4663440"/>
+          </a:xfrm>
+          <a:prstGeom prst="rect">
+            <a:avLst/>
+          </a:prstGeom>
+          <a:noFill/>
+        </p:spPr>
+        <p:txBody>
+          <a:bodyPr wrap="square">
+            <a:spAutoFit/>
+          </a:bodyPr>
+          <a:lstStyle/>
+          <a:p>
+            <a:pPr>
+              <a:spcAft>
+                <a:spcPts val="1200"/>
+              </a:spcAft>
+              <a:defRPr b="1" sz="1300">
+                <a:solidFill>
+                  <a:srgbClr val="D97706"/>
+                </a:solidFill>
+              </a:defRPr>
+            </a:pPr>
+            <a:r>
+              <a:t>PCCST501 Computer Networks | KTU 2024 Scheme • MODULE 4 • M4.3</a:t>
+            </a:r>
+          </a:p>
+          <a:p>
+            <a:pPr>
+              <a:spcAft>
+                <a:spcPts val="1400"/>
+              </a:spcAft>
+              <a:defRPr b="1" sz="3200">
+                <a:solidFill>
+                  <a:srgbClr val="F8FAFC"/>
+                </a:solidFill>
+              </a:defRPr>
+            </a:pPr>
+            <a:r>
+              <a:t>Physical Layer: Data, Signals &amp; Capacity Limits</a:t>
+            </a:r>
+          </a:p>
+          <a:p>
+            <a:pPr>
+              <a:spcAft>
+                <a:spcPts val="2800"/>
+              </a:spcAft>
+              <a:defRPr sz="1700">
+                <a:solidFill>
+                  <a:srgbClr val="94A3B8"/>
+                </a:solidFill>
+              </a:defRPr>
+            </a:pPr>
+            <a:r>
+              <a:t>Analog vs Digital Signals, Fourier Decomposition, Transmission Impairments, Nyquist Bit Rate &amp; Shannon Capacity Theorem</a:t>
+            </a:r>
+          </a:p>
+          <a:p>
+            <a:pPr>
+              <a:defRPr b="1" sz="1300">
+                <a:solidFill>
+                  <a:srgbClr val="E2E8F0"/>
+                </a:solidFill>
+              </a:defRPr>
+            </a:pPr>
+            <a:r>
+              <a:t>Prepared by: Prof. Anju Markose | Assistant Professor, Dept. of CSE | VJCET</a:t>
+            </a:r>
+          </a:p>
+          <a:p>
+            <a:pPr>
+              <a:defRPr sz="1100">
+                <a:solidFill>
+                  <a:srgbClr val="94A3B8"/>
+                </a:solidFill>
+              </a:defRPr>
+            </a:pPr>
+            <a:r>
+              <a:t>Viswajyothi College of Engineering and Technology (VJCET), Vazhakulam</a:t>
             </a:r>
           </a:p>
         </p:txBody>
